--- a/bp/融资计划.pptx
+++ b/bp/融资计划.pptx
@@ -3109,6 +3109,7 @@
           <a:ln>
             <a:noFill/>
           </a:ln>
+          <a:effectLst/>
         </p:spPr>
         <p:style>
           <a:lnRef idx="1">
@@ -3141,7 +3142,7 @@
         <p:spPr>
           <a:xfrm>
             <a:off x="502920" y="329184"/>
-            <a:ext cx="7315200" cy="246888"/>
+            <a:ext cx="7315200" cy="274320"/>
           </a:xfrm>
           <a:prstGeom prst="rect">
             <a:avLst/>
@@ -3149,21 +3150,21 @@
           <a:noFill/>
         </p:spPr>
         <p:txBody>
-          <a:bodyPr wrap="square" lIns="0" rIns="0" tIns="0" bIns="0">
+          <a:bodyPr wrap="square" anchor="t" lIns="0" rIns="0" tIns="0" bIns="0">
             <a:spAutoFit/>
           </a:bodyPr>
           <a:lstStyle/>
           <a:p>
             <a:pPr algn="l"/>
             <a:r>
-              <a:rPr sz="950" b="0" spc="120">
+              <a:rPr sz="950" b="0" i="0" spc="120">
                 <a:solidFill>
                   <a:srgbClr val="FFFFFF"/>
                 </a:solidFill>
                 <a:latin typeface="Arial"/>
                 <a:ea typeface="微软雅黑"/>
               </a:rPr>
-              <a:t>The Ask · 融资计划</a:t>
+              <a:t>家安 housafe · 融资计划</a:t>
             </a:r>
           </a:p>
         </p:txBody>
@@ -3177,7 +3178,7 @@
         <p:spPr>
           <a:xfrm>
             <a:off x="5790895" y="329184"/>
-            <a:ext cx="5897880" cy="246888"/>
+            <a:ext cx="5897880" cy="274320"/>
           </a:xfrm>
           <a:prstGeom prst="rect">
             <a:avLst/>
@@ -3185,21 +3186,21 @@
           <a:noFill/>
         </p:spPr>
         <p:txBody>
-          <a:bodyPr wrap="square" lIns="0" rIns="0" tIns="0" bIns="0">
+          <a:bodyPr wrap="square" anchor="t" lIns="0" rIns="0" tIns="0" bIns="0">
             <a:spAutoFit/>
           </a:bodyPr>
           <a:lstStyle/>
           <a:p>
             <a:pPr algn="r"/>
             <a:r>
-              <a:rPr sz="950" b="0" spc="120">
+              <a:rPr sz="950" b="0" i="0" spc="120">
                 <a:solidFill>
                   <a:srgbClr val="FFFFFF"/>
                 </a:solidFill>
                 <a:latin typeface="Arial"/>
                 <a:ea typeface="微软雅黑"/>
               </a:rPr>
-              <a:t>家安 housafe · 天使轮</a:t>
+              <a:t>天使轮 · 01 / 02</a:t>
             </a:r>
           </a:p>
         </p:txBody>
@@ -3213,7 +3214,7 @@
         <p:spPr>
           <a:xfrm>
             <a:off x="502920" y="777240"/>
-            <a:ext cx="8229600" cy="246888"/>
+            <a:ext cx="8229600" cy="274320"/>
           </a:xfrm>
           <a:prstGeom prst="rect">
             <a:avLst/>
@@ -3221,21 +3222,21 @@
           <a:noFill/>
         </p:spPr>
         <p:txBody>
-          <a:bodyPr wrap="square" lIns="0" rIns="0" tIns="0" bIns="0">
+          <a:bodyPr wrap="square" anchor="t" lIns="0" rIns="0" tIns="0" bIns="0">
             <a:spAutoFit/>
           </a:bodyPr>
           <a:lstStyle/>
           <a:p>
             <a:pPr algn="l"/>
             <a:r>
-              <a:rPr sz="1050" b="1" spc="150">
+              <a:rPr sz="1050" b="1" i="0" spc="150">
                 <a:solidFill>
                   <a:srgbClr val="5B7BFF"/>
                 </a:solidFill>
                 <a:latin typeface="Arial"/>
                 <a:ea typeface="微软雅黑"/>
               </a:rPr>
-              <a:t>SEED ROUND</a:t>
+              <a:t>SEED ROUND · 500 万人民币</a:t>
             </a:r>
           </a:p>
         </p:txBody>
@@ -3248,8 +3249,8 @@
         </p:nvSpPr>
         <p:spPr>
           <a:xfrm>
-            <a:off x="502920" y="1051560"/>
-            <a:ext cx="10972800" cy="411480"/>
+            <a:off x="502920" y="1097280"/>
+            <a:ext cx="11155680" cy="1165860"/>
           </a:xfrm>
           <a:prstGeom prst="rect">
             <a:avLst/>
@@ -3257,14 +3258,18 @@
           <a:noFill/>
         </p:spPr>
         <p:txBody>
-          <a:bodyPr wrap="square" lIns="0" rIns="0" tIns="0" bIns="0">
+          <a:bodyPr wrap="square" anchor="t" lIns="0" rIns="0" tIns="0" bIns="0">
             <a:spAutoFit/>
           </a:bodyPr>
           <a:lstStyle/>
           <a:p>
-            <a:pPr algn="l"/>
-            <a:r>
-              <a:rPr sz="2200" b="0">
+            <a:pPr>
+              <a:lnSpc>
+                <a:spcPct val="105000"/>
+              </a:lnSpc>
+            </a:pPr>
+            <a:r>
+              <a:rPr sz="2700" b="0" i="0">
                 <a:solidFill>
                   <a:srgbClr val="FFFFFF"/>
                 </a:solidFill>
@@ -3284,8 +3289,8 @@
         </p:nvSpPr>
         <p:spPr>
           <a:xfrm>
-            <a:off x="502920" y="1600200"/>
-            <a:ext cx="2651760" cy="2011680"/>
+            <a:off x="502920" y="1920240"/>
+            <a:ext cx="3794760" cy="2148840"/>
           </a:xfrm>
           <a:prstGeom prst="rect">
             <a:avLst/>
@@ -3296,6 +3301,7 @@
           <a:ln>
             <a:noFill/>
           </a:ln>
+          <a:effectLst/>
         </p:spPr>
         <p:style>
           <a:lnRef idx="1">
@@ -3327,8 +3333,8 @@
         </p:nvSpPr>
         <p:spPr>
           <a:xfrm>
-            <a:off x="667512" y="1746504"/>
-            <a:ext cx="2322576" cy="182880"/>
+            <a:off x="758952" y="2121408"/>
+            <a:ext cx="3291840" cy="274320"/>
           </a:xfrm>
           <a:prstGeom prst="rect">
             <a:avLst/>
@@ -3336,21 +3342,21 @@
           <a:noFill/>
         </p:spPr>
         <p:txBody>
-          <a:bodyPr wrap="square" lIns="0" rIns="0" tIns="0" bIns="0">
+          <a:bodyPr wrap="square" anchor="t" lIns="0" rIns="0" tIns="0" bIns="0">
             <a:spAutoFit/>
           </a:bodyPr>
           <a:lstStyle/>
           <a:p>
             <a:pPr algn="l"/>
             <a:r>
-              <a:rPr sz="900" b="1" spc="110">
+              <a:rPr sz="950" b="0" i="0" spc="120">
                 <a:solidFill>
                   <a:srgbClr val="FFFFFF"/>
                 </a:solidFill>
                 <a:latin typeface="Arial"/>
                 <a:ea typeface="微软雅黑"/>
               </a:rPr>
-              <a:t>融资额</a:t>
+              <a:t>融资金额</a:t>
             </a:r>
           </a:p>
         </p:txBody>
@@ -3363,8 +3369,8 @@
         </p:nvSpPr>
         <p:spPr>
           <a:xfrm>
-            <a:off x="667512" y="2039112"/>
-            <a:ext cx="2322576" cy="457200"/>
+            <a:off x="758952" y="2423160"/>
+            <a:ext cx="3291840" cy="777240"/>
           </a:xfrm>
           <a:prstGeom prst="rect">
             <a:avLst/>
@@ -3372,21 +3378,21 @@
           <a:noFill/>
         </p:spPr>
         <p:txBody>
-          <a:bodyPr wrap="square" lIns="0" rIns="0" tIns="0" bIns="0">
+          <a:bodyPr wrap="square" anchor="t" lIns="0" rIns="0" tIns="0" bIns="0">
             <a:spAutoFit/>
           </a:bodyPr>
           <a:lstStyle/>
           <a:p>
             <a:pPr algn="l"/>
             <a:r>
-              <a:rPr sz="2200" b="0">
+              <a:rPr sz="3600" b="0" i="0">
                 <a:solidFill>
                   <a:srgbClr val="FFFFFF"/>
                 </a:solidFill>
                 <a:latin typeface="Arial"/>
                 <a:ea typeface="微软雅黑"/>
               </a:rPr>
-              <a:t>300 万</a:t>
+              <a:t>500 万</a:t>
             </a:r>
           </a:p>
         </p:txBody>
@@ -3399,8 +3405,8 @@
         </p:nvSpPr>
         <p:spPr>
           <a:xfrm>
-            <a:off x="667512" y="2560320"/>
-            <a:ext cx="2322576" cy="914400"/>
+            <a:off x="758952" y="3246120"/>
+            <a:ext cx="3291840" cy="640080"/>
           </a:xfrm>
           <a:prstGeom prst="rect">
             <a:avLst/>
@@ -3408,27 +3414,26 @@
           <a:noFill/>
         </p:spPr>
         <p:txBody>
-          <a:bodyPr wrap="square" lIns="0" rIns="0" tIns="0" bIns="0">
+          <a:bodyPr wrap="square" anchor="t" lIns="0" rIns="0" tIns="0" bIns="0">
             <a:spAutoFit/>
           </a:bodyPr>
           <a:lstStyle/>
           <a:p>
             <a:pPr algn="l">
               <a:lnSpc>
-                <a:spcPct val="122000"/>
+                <a:spcPct val="135000"/>
               </a:lnSpc>
             </a:pPr>
             <a:r>
-              <a:rPr sz="850" b="0">
+              <a:rPr sz="1000" b="0" i="0">
                 <a:solidFill>
                   <a:srgbClr val="DDE4F5"/>
                 </a:solidFill>
                 <a:latin typeface="Arial"/>
                 <a:ea typeface="微软雅黑"/>
               </a:rPr>
-              <a:t>人民币
-出让约 15–20%
-投前估值 1,500–2,000 万</a:t>
+              <a:t>人民币 · 出让约 14–17%
+投前估值约 2,500–3,000 万</a:t>
             </a:r>
           </a:p>
         </p:txBody>
@@ -3441,8 +3446,8 @@
         </p:nvSpPr>
         <p:spPr>
           <a:xfrm>
-            <a:off x="3319272" y="1600200"/>
-            <a:ext cx="2651760" cy="2011680"/>
+            <a:off x="4572000" y="1920240"/>
+            <a:ext cx="3749039" cy="960120"/>
           </a:xfrm>
           <a:prstGeom prst="rect">
             <a:avLst/>
@@ -3453,6 +3458,7 @@
           <a:ln>
             <a:noFill/>
           </a:ln>
+          <a:effectLst/>
         </p:spPr>
         <p:style>
           <a:lnRef idx="1">
@@ -3484,8 +3490,8 @@
         </p:nvSpPr>
         <p:spPr>
           <a:xfrm>
-            <a:off x="3483864" y="1746504"/>
-            <a:ext cx="2322576" cy="182880"/>
+            <a:off x="4773168" y="2057400"/>
+            <a:ext cx="3383280" cy="228600"/>
           </a:xfrm>
           <a:prstGeom prst="rect">
             <a:avLst/>
@@ -3493,21 +3499,21 @@
           <a:noFill/>
         </p:spPr>
         <p:txBody>
-          <a:bodyPr wrap="square" lIns="0" rIns="0" tIns="0" bIns="0">
+          <a:bodyPr wrap="square" anchor="t" lIns="0" rIns="0" tIns="0" bIns="0">
             <a:spAutoFit/>
           </a:bodyPr>
           <a:lstStyle/>
           <a:p>
             <a:pPr algn="l"/>
             <a:r>
-              <a:rPr sz="900" b="1" spc="110">
+              <a:rPr sz="900" b="0" i="0" spc="110">
                 <a:solidFill>
                   <a:srgbClr val="737373"/>
                 </a:solidFill>
                 <a:latin typeface="Arial"/>
                 <a:ea typeface="微软雅黑"/>
               </a:rPr>
-              <a:t>跑道</a:t>
+              <a:t>融资跑道</a:t>
             </a:r>
           </a:p>
         </p:txBody>
@@ -3520,8 +3526,8 @@
         </p:nvSpPr>
         <p:spPr>
           <a:xfrm>
-            <a:off x="3483864" y="2039112"/>
-            <a:ext cx="2322576" cy="457200"/>
+            <a:off x="4773168" y="2304288"/>
+            <a:ext cx="3383280" cy="457200"/>
           </a:xfrm>
           <a:prstGeom prst="rect">
             <a:avLst/>
@@ -3529,14 +3535,14 @@
           <a:noFill/>
         </p:spPr>
         <p:txBody>
-          <a:bodyPr wrap="square" lIns="0" rIns="0" tIns="0" bIns="0">
+          <a:bodyPr wrap="square" anchor="t" lIns="0" rIns="0" tIns="0" bIns="0">
             <a:spAutoFit/>
           </a:bodyPr>
           <a:lstStyle/>
           <a:p>
             <a:pPr algn="l"/>
             <a:r>
-              <a:rPr sz="2200" b="0">
+              <a:rPr sz="2400" b="0" i="0">
                 <a:solidFill>
                   <a:srgbClr val="0A0A0A"/>
                 </a:solidFill>
@@ -3550,56 +3556,14 @@
       </p:sp>
       <p:sp>
         <p:nvSpPr>
-          <p:cNvPr id="14" name="TextBox 13"/>
-          <p:cNvSpPr txBox="1"/>
-          <p:nvPr/>
-        </p:nvSpPr>
-        <p:spPr>
-          <a:xfrm>
-            <a:off x="3483864" y="2560320"/>
-            <a:ext cx="2322576" cy="914400"/>
-          </a:xfrm>
-          <a:prstGeom prst="rect">
-            <a:avLst/>
-          </a:prstGeom>
-          <a:noFill/>
-        </p:spPr>
-        <p:txBody>
-          <a:bodyPr wrap="square" lIns="0" rIns="0" tIns="0" bIns="0">
-            <a:spAutoFit/>
-          </a:bodyPr>
-          <a:lstStyle/>
-          <a:p>
-            <a:pPr algn="l">
-              <a:lnSpc>
-                <a:spcPct val="122000"/>
-              </a:lnSpc>
-            </a:pPr>
-            <a:r>
-              <a:rPr sz="850" b="0">
-                <a:solidFill>
-                  <a:srgbClr val="444444"/>
-                </a:solidFill>
-                <a:latin typeface="Arial"/>
-                <a:ea typeface="微软雅黑"/>
-              </a:rPr>
-              <a:t>M0–6 MVP 验证
-M6–12 商用冷启动
-首批 500–1,000 户装机</a:t>
-            </a:r>
-          </a:p>
-        </p:txBody>
-      </p:sp>
-      <p:sp>
-        <p:nvSpPr>
-          <p:cNvPr id="15" name="Rectangle 14"/>
+          <p:cNvPr id="14" name="Rectangle 13"/>
           <p:cNvSpPr/>
           <p:nvPr/>
         </p:nvSpPr>
         <p:spPr>
           <a:xfrm>
-            <a:off x="6135624" y="1600200"/>
-            <a:ext cx="2651760" cy="2011680"/>
+            <a:off x="4572000" y="3108960"/>
+            <a:ext cx="3749039" cy="960120"/>
           </a:xfrm>
           <a:prstGeom prst="rect">
             <a:avLst/>
@@ -3610,6 +3574,7 @@
           <a:ln>
             <a:noFill/>
           </a:ln>
+          <a:effectLst/>
         </p:spPr>
         <p:style>
           <a:lnRef idx="1">
@@ -3635,14 +3600,50 @@
       </p:sp>
       <p:sp>
         <p:nvSpPr>
+          <p:cNvPr id="15" name="TextBox 14"/>
+          <p:cNvSpPr txBox="1"/>
+          <p:nvPr/>
+        </p:nvSpPr>
+        <p:spPr>
+          <a:xfrm>
+            <a:off x="4773168" y="3246120"/>
+            <a:ext cx="3383280" cy="228600"/>
+          </a:xfrm>
+          <a:prstGeom prst="rect">
+            <a:avLst/>
+          </a:prstGeom>
+          <a:noFill/>
+        </p:spPr>
+        <p:txBody>
+          <a:bodyPr wrap="square" anchor="t" lIns="0" rIns="0" tIns="0" bIns="0">
+            <a:spAutoFit/>
+          </a:bodyPr>
+          <a:lstStyle/>
+          <a:p>
+            <a:pPr algn="l"/>
+            <a:r>
+              <a:rPr sz="900" b="0" i="0" spc="110">
+                <a:solidFill>
+                  <a:srgbClr val="737373"/>
+                </a:solidFill>
+                <a:latin typeface="Arial"/>
+                <a:ea typeface="微软雅黑"/>
+              </a:rPr>
+              <a:t>融资阶段</a:t>
+            </a:r>
+          </a:p>
+        </p:txBody>
+      </p:sp>
+      <p:sp>
+        <p:nvSpPr>
           <p:cNvPr id="16" name="TextBox 15"/>
           <p:cNvSpPr txBox="1"/>
           <p:nvPr/>
         </p:nvSpPr>
         <p:spPr>
           <a:xfrm>
-            <a:off x="6300216" y="1746504"/>
-            <a:ext cx="2322576" cy="182880"/>
+            <a:off x="4773168" y="3493008"/>
+            <a:ext cx="3383280" cy="457200"/>
           </a:xfrm>
           <a:prstGeom prst="rect">
             <a:avLst/>
@@ -3650,78 +3651,35 @@
           <a:noFill/>
         </p:spPr>
         <p:txBody>
-          <a:bodyPr wrap="square" lIns="0" rIns="0" tIns="0" bIns="0">
+          <a:bodyPr wrap="square" anchor="t" lIns="0" rIns="0" tIns="0" bIns="0">
             <a:spAutoFit/>
           </a:bodyPr>
           <a:lstStyle/>
           <a:p>
             <a:pPr algn="l"/>
             <a:r>
-              <a:rPr sz="900" b="1" spc="110">
-                <a:solidFill>
-                  <a:srgbClr val="737373"/>
-                </a:solidFill>
-                <a:latin typeface="Arial"/>
-                <a:ea typeface="微软雅黑"/>
-              </a:rPr>
-              <a:t>资金用途</a:t>
-            </a:r>
-          </a:p>
-        </p:txBody>
-      </p:sp>
-      <p:sp>
-        <p:nvSpPr>
-          <p:cNvPr id="17" name="TextBox 16"/>
-          <p:cNvSpPr txBox="1"/>
-          <p:nvPr/>
-        </p:nvSpPr>
-        <p:spPr>
-          <a:xfrm>
-            <a:off x="6300216" y="2039112"/>
-            <a:ext cx="2322576" cy="914400"/>
-          </a:xfrm>
-          <a:prstGeom prst="rect">
-            <a:avLst/>
-          </a:prstGeom>
-          <a:noFill/>
-        </p:spPr>
-        <p:txBody>
-          <a:bodyPr wrap="square" lIns="0" rIns="0" tIns="0" bIns="0">
-            <a:spAutoFit/>
-          </a:bodyPr>
-          <a:lstStyle/>
-          <a:p>
-            <a:pPr algn="l">
-              <a:lnSpc>
-                <a:spcPct val="122000"/>
-              </a:lnSpc>
-            </a:pPr>
-            <a:r>
-              <a:rPr sz="850" b="0">
-                <a:solidFill>
-                  <a:srgbClr val="444444"/>
-                </a:solidFill>
-                <a:latin typeface="Arial"/>
-                <a:ea typeface="微软雅黑"/>
-              </a:rPr>
-              <a:t>研发/团队 60%（180万）
-设备/云 15%（45万）
-获客/运营 15%（45万）
-行政/其他 10%（30万）</a:t>
-            </a:r>
-          </a:p>
-        </p:txBody>
-      </p:sp>
-      <p:sp>
-        <p:nvSpPr>
-          <p:cNvPr id="18" name="Rectangle 17"/>
+              <a:rPr sz="2400" b="0" i="0">
+                <a:solidFill>
+                  <a:srgbClr val="0A0A0A"/>
+                </a:solidFill>
+                <a:latin typeface="Arial"/>
+                <a:ea typeface="微软雅黑"/>
+              </a:rPr>
+              <a:t>天使轮</a:t>
+            </a:r>
+          </a:p>
+        </p:txBody>
+      </p:sp>
+      <p:sp>
+        <p:nvSpPr>
+          <p:cNvPr id="17" name="Rectangle 16"/>
           <p:cNvSpPr/>
           <p:nvPr/>
         </p:nvSpPr>
         <p:spPr>
           <a:xfrm>
-            <a:off x="8951976" y="1600200"/>
-            <a:ext cx="2651760" cy="2011680"/>
+            <a:off x="8595360" y="1920240"/>
+            <a:ext cx="3593592" cy="2148840"/>
           </a:xfrm>
           <a:prstGeom prst="rect">
             <a:avLst/>
@@ -3732,6 +3690,7 @@
           <a:ln>
             <a:noFill/>
           </a:ln>
+          <a:effectLst/>
         </p:spPr>
         <p:style>
           <a:lnRef idx="1">
@@ -3757,14 +3716,50 @@
       </p:sp>
       <p:sp>
         <p:nvSpPr>
+          <p:cNvPr id="18" name="TextBox 17"/>
+          <p:cNvSpPr txBox="1"/>
+          <p:nvPr/>
+        </p:nvSpPr>
+        <p:spPr>
+          <a:xfrm>
+            <a:off x="8796528" y="2121408"/>
+            <a:ext cx="3200400" cy="228600"/>
+          </a:xfrm>
+          <a:prstGeom prst="rect">
+            <a:avLst/>
+          </a:prstGeom>
+          <a:noFill/>
+        </p:spPr>
+        <p:txBody>
+          <a:bodyPr wrap="square" anchor="t" lIns="0" rIns="0" tIns="0" bIns="0">
+            <a:spAutoFit/>
+          </a:bodyPr>
+          <a:lstStyle/>
+          <a:p>
+            <a:pPr algn="l"/>
+            <a:r>
+              <a:rPr sz="900" b="0" i="0" spc="110">
+                <a:solidFill>
+                  <a:srgbClr val="737373"/>
+                </a:solidFill>
+                <a:latin typeface="Arial"/>
+                <a:ea typeface="微软雅黑"/>
+              </a:rPr>
+              <a:t>融资后目标</a:t>
+            </a:r>
+          </a:p>
+        </p:txBody>
+      </p:sp>
+      <p:sp>
+        <p:nvSpPr>
           <p:cNvPr id="19" name="TextBox 18"/>
           <p:cNvSpPr txBox="1"/>
           <p:nvPr/>
         </p:nvSpPr>
         <p:spPr>
           <a:xfrm>
-            <a:off x="9116568" y="1746504"/>
-            <a:ext cx="2322576" cy="182880"/>
+            <a:off x="8796528" y="2395728"/>
+            <a:ext cx="3200400" cy="347472"/>
           </a:xfrm>
           <a:prstGeom prst="rect">
             <a:avLst/>
@@ -3772,21 +3767,25 @@
           <a:noFill/>
         </p:spPr>
         <p:txBody>
-          <a:bodyPr wrap="square" lIns="0" rIns="0" tIns="0" bIns="0">
+          <a:bodyPr wrap="square" anchor="t" lIns="0" rIns="0" tIns="0" bIns="0">
             <a:spAutoFit/>
           </a:bodyPr>
           <a:lstStyle/>
           <a:p>
-            <a:pPr algn="l"/>
-            <a:r>
-              <a:rPr sz="900" b="1" spc="110">
-                <a:solidFill>
-                  <a:srgbClr val="737373"/>
-                </a:solidFill>
-                <a:latin typeface="Arial"/>
-                <a:ea typeface="微软雅黑"/>
-              </a:rPr>
-              <a:t>关键里程碑</a:t>
+            <a:pPr algn="l">
+              <a:lnSpc>
+                <a:spcPct val="120000"/>
+              </a:lnSpc>
+            </a:pPr>
+            <a:r>
+              <a:rPr sz="1050" b="0" i="0">
+                <a:solidFill>
+                  <a:srgbClr val="0A0A0A"/>
+                </a:solidFill>
+                <a:latin typeface="Arial"/>
+                <a:ea typeface="微软雅黑"/>
+              </a:rPr>
+              <a:t>— 1,000+ 户付费装机</a:t>
             </a:r>
           </a:p>
         </p:txBody>
@@ -3799,8 +3798,8 @@
         </p:nvSpPr>
         <p:spPr>
           <a:xfrm>
-            <a:off x="9116568" y="2039112"/>
-            <a:ext cx="2322576" cy="914400"/>
+            <a:off x="8796528" y="2779776"/>
+            <a:ext cx="3200400" cy="347472"/>
           </a:xfrm>
           <a:prstGeom prst="rect">
             <a:avLst/>
@@ -3808,51 +3807,129 @@
           <a:noFill/>
         </p:spPr>
         <p:txBody>
-          <a:bodyPr wrap="square" lIns="0" rIns="0" tIns="0" bIns="0">
+          <a:bodyPr wrap="square" anchor="t" lIns="0" rIns="0" tIns="0" bIns="0">
             <a:spAutoFit/>
           </a:bodyPr>
           <a:lstStyle/>
           <a:p>
             <a:pPr algn="l">
               <a:lnSpc>
-                <a:spcPct val="122000"/>
+                <a:spcPct val="120000"/>
               </a:lnSpc>
             </a:pPr>
             <a:r>
-              <a:rPr sz="850" b="0">
-                <a:solidFill>
-                  <a:srgbClr val="444444"/>
-                </a:solidFill>
-                <a:latin typeface="Arial"/>
-                <a:ea typeface="微软雅黑"/>
-              </a:rPr>
-              <a:t>MVP（跌倒≥90%）
-首批 500–1,000 户
-高级订阅上线
-启动 A 轮</a:t>
+              <a:rPr sz="1050" b="0" i="0">
+                <a:solidFill>
+                  <a:srgbClr val="002FA7"/>
+                </a:solidFill>
+                <a:latin typeface="Arial"/>
+                <a:ea typeface="微软雅黑"/>
+              </a:rPr>
+              <a:t>— 误报 &lt; 2 次/周/户</a:t>
+            </a:r>
+          </a:p>
+        </p:txBody>
+      </p:sp>
+      <p:sp>
+        <p:nvSpPr>
+          <p:cNvPr id="21" name="TextBox 20"/>
+          <p:cNvSpPr txBox="1"/>
+          <p:nvPr/>
+        </p:nvSpPr>
+        <p:spPr>
+          <a:xfrm>
+            <a:off x="8796528" y="3163824"/>
+            <a:ext cx="3200400" cy="347472"/>
+          </a:xfrm>
+          <a:prstGeom prst="rect">
+            <a:avLst/>
+          </a:prstGeom>
+          <a:noFill/>
+        </p:spPr>
+        <p:txBody>
+          <a:bodyPr wrap="square" anchor="t" lIns="0" rIns="0" tIns="0" bIns="0">
+            <a:spAutoFit/>
+          </a:bodyPr>
+          <a:lstStyle/>
+          <a:p>
+            <a:pPr algn="l">
+              <a:lnSpc>
+                <a:spcPct val="120000"/>
+              </a:lnSpc>
+            </a:pPr>
+            <a:r>
+              <a:rPr sz="1050" b="0" i="0">
+                <a:solidFill>
+                  <a:srgbClr val="0A0A0A"/>
+                </a:solidFill>
+                <a:latin typeface="Arial"/>
+                <a:ea typeface="微软雅黑"/>
+              </a:rPr>
+              <a:t>— 续费率数据初步验证</a:t>
+            </a:r>
+          </a:p>
+        </p:txBody>
+      </p:sp>
+      <p:sp>
+        <p:nvSpPr>
+          <p:cNvPr id="22" name="TextBox 21"/>
+          <p:cNvSpPr txBox="1"/>
+          <p:nvPr/>
+        </p:nvSpPr>
+        <p:spPr>
+          <a:xfrm>
+            <a:off x="8796528" y="3547872"/>
+            <a:ext cx="3200400" cy="347472"/>
+          </a:xfrm>
+          <a:prstGeom prst="rect">
+            <a:avLst/>
+          </a:prstGeom>
+          <a:noFill/>
+        </p:spPr>
+        <p:txBody>
+          <a:bodyPr wrap="square" anchor="t" lIns="0" rIns="0" tIns="0" bIns="0">
+            <a:spAutoFit/>
+          </a:bodyPr>
+          <a:lstStyle/>
+          <a:p>
+            <a:pPr algn="l">
+              <a:lnSpc>
+                <a:spcPct val="120000"/>
+              </a:lnSpc>
+            </a:pPr>
+            <a:r>
+              <a:rPr sz="1050" b="0" i="0">
+                <a:solidFill>
+                  <a:srgbClr val="0A0A0A"/>
+                </a:solidFill>
+                <a:latin typeface="Arial"/>
+                <a:ea typeface="微软雅黑"/>
+              </a:rPr>
+              <a:t>— 启动 A 轮融资</a:t>
             </a:r>
           </a:p>
         </p:txBody>
       </p:sp>
       <p:cxnSp>
         <p:nvCxnSpPr>
-          <p:cNvPr id="21" name="Connector 20"/>
+          <p:cNvPr id="23" name="Connector 22"/>
           <p:cNvCxnSpPr/>
           <p:nvPr/>
         </p:nvCxnSpPr>
         <p:spPr>
           <a:xfrm>
-            <a:off x="502920" y="3840480"/>
+            <a:off x="502920" y="4206240"/>
             <a:ext cx="11183112" cy="0"/>
           </a:xfrm>
           <a:prstGeom prst="bentConnector3">
             <a:avLst/>
           </a:prstGeom>
-          <a:ln w="12700">
+          <a:ln w="10160">
             <a:solidFill>
-              <a:srgbClr val="555555"/>
+              <a:srgbClr val="444444"/>
             </a:solidFill>
           </a:ln>
+          <a:effectLst/>
         </p:spPr>
         <p:style>
           <a:lnRef idx="2">
@@ -3871,14 +3948,14 @@
       </p:cxnSp>
       <p:sp>
         <p:nvSpPr>
-          <p:cNvPr id="22" name="TextBox 21"/>
+          <p:cNvPr id="24" name="TextBox 23"/>
           <p:cNvSpPr txBox="1"/>
           <p:nvPr/>
         </p:nvSpPr>
         <p:spPr>
           <a:xfrm>
-            <a:off x="502920" y="3931920"/>
-            <a:ext cx="11183112" cy="182880"/>
+            <a:off x="502920" y="4297680"/>
+            <a:ext cx="5486400" cy="274320"/>
           </a:xfrm>
           <a:prstGeom prst="rect">
             <a:avLst/>
@@ -3886,35 +3963,79 @@
           <a:noFill/>
         </p:spPr>
         <p:txBody>
-          <a:bodyPr wrap="square" lIns="0" rIns="0" tIns="0" bIns="0">
+          <a:bodyPr wrap="square" anchor="t" lIns="0" rIns="0" tIns="0" bIns="0">
             <a:spAutoFit/>
           </a:bodyPr>
           <a:lstStyle/>
           <a:p>
             <a:pPr algn="l"/>
             <a:r>
-              <a:rPr sz="900" b="1" spc="100">
+              <a:rPr sz="950" b="0" i="0" spc="120">
                 <a:solidFill>
                   <a:srgbClr val="FFFFFF"/>
                 </a:solidFill>
                 <a:latin typeface="Arial"/>
                 <a:ea typeface="微软雅黑"/>
               </a:rPr>
-              <a:t>估值逻辑 | Y3 前瞻收入 637 万 × P/S 倍数</a:t>
-            </a:r>
-          </a:p>
-        </p:txBody>
-      </p:sp>
-      <p:sp>
-        <p:nvSpPr>
-          <p:cNvPr id="23" name="TextBox 22"/>
+              <a:t>资金用途明细</a:t>
+            </a:r>
+          </a:p>
+        </p:txBody>
+      </p:sp>
+      <p:sp>
+        <p:nvSpPr>
+          <p:cNvPr id="25" name="Rectangle 24"/>
+          <p:cNvSpPr/>
+          <p:nvPr/>
+        </p:nvSpPr>
+        <p:spPr>
+          <a:xfrm>
+            <a:off x="502920" y="4663440"/>
+            <a:ext cx="2670048" cy="1828800"/>
+          </a:xfrm>
+          <a:prstGeom prst="rect">
+            <a:avLst/>
+          </a:prstGeom>
+          <a:solidFill>
+            <a:srgbClr val="002FA7"/>
+          </a:solidFill>
+          <a:ln>
+            <a:noFill/>
+          </a:ln>
+          <a:effectLst/>
+        </p:spPr>
+        <p:style>
+          <a:lnRef idx="1">
+            <a:schemeClr val="accent1"/>
+          </a:lnRef>
+          <a:fillRef idx="3">
+            <a:schemeClr val="accent1"/>
+          </a:fillRef>
+          <a:effectRef idx="2">
+            <a:schemeClr val="accent1"/>
+          </a:effectRef>
+          <a:fontRef idx="minor">
+            <a:schemeClr val="lt1"/>
+          </a:fontRef>
+        </p:style>
+        <p:txBody>
+          <a:bodyPr rtlCol="0" anchor="ctr"/>
+          <a:lstStyle/>
+          <a:p>
+            <a:pPr algn="ctr"/>
+          </a:p>
+        </p:txBody>
+      </p:sp>
+      <p:sp>
+        <p:nvSpPr>
+          <p:cNvPr id="26" name="TextBox 25"/>
           <p:cNvSpPr txBox="1"/>
           <p:nvPr/>
         </p:nvSpPr>
         <p:spPr>
           <a:xfrm>
-            <a:off x="502920" y="4160520"/>
-            <a:ext cx="1645920" cy="182880"/>
+            <a:off x="667512" y="4800600"/>
+            <a:ext cx="2340864" cy="228600"/>
           </a:xfrm>
           <a:prstGeom prst="rect">
             <a:avLst/>
@@ -3922,35 +4043,35 @@
           <a:noFill/>
         </p:spPr>
         <p:txBody>
-          <a:bodyPr wrap="square" lIns="0" rIns="0" tIns="0" bIns="0">
+          <a:bodyPr wrap="square" anchor="t" lIns="0" rIns="0" tIns="0" bIns="0">
             <a:spAutoFit/>
           </a:bodyPr>
           <a:lstStyle/>
           <a:p>
             <a:pPr algn="l"/>
             <a:r>
-              <a:rPr sz="800" b="1" spc="60">
-                <a:solidFill>
-                  <a:srgbClr val="002FA7"/>
-                </a:solidFill>
-                <a:latin typeface="Arial"/>
-                <a:ea typeface="微软雅黑"/>
-              </a:rPr>
-              <a:t/>
-            </a:r>
-          </a:p>
-        </p:txBody>
-      </p:sp>
-      <p:sp>
-        <p:nvSpPr>
-          <p:cNvPr id="24" name="TextBox 23"/>
+              <a:rPr sz="900" b="0" i="0" spc="100">
+                <a:solidFill>
+                  <a:srgbClr val="FFFFFF"/>
+                </a:solidFill>
+                <a:latin typeface="Arial"/>
+                <a:ea typeface="微软雅黑"/>
+              </a:rPr>
+              <a:t>研发 / 团队</a:t>
+            </a:r>
+          </a:p>
+        </p:txBody>
+      </p:sp>
+      <p:sp>
+        <p:nvSpPr>
+          <p:cNvPr id="27" name="TextBox 26"/>
           <p:cNvSpPr txBox="1"/>
           <p:nvPr/>
         </p:nvSpPr>
         <p:spPr>
           <a:xfrm>
-            <a:off x="2148840" y="4160520"/>
-            <a:ext cx="2377440" cy="182880"/>
+            <a:off x="667512" y="5047488"/>
+            <a:ext cx="2340864" cy="502920"/>
           </a:xfrm>
           <a:prstGeom prst="rect">
             <a:avLst/>
@@ -3958,35 +4079,49 @@
           <a:noFill/>
         </p:spPr>
         <p:txBody>
-          <a:bodyPr wrap="square" lIns="0" rIns="0" tIns="0" bIns="0">
+          <a:bodyPr wrap="square" anchor="t" lIns="0" rIns="0" tIns="0" bIns="0">
             <a:spAutoFit/>
           </a:bodyPr>
           <a:lstStyle/>
           <a:p>
-            <a:pPr algn="l"/>
-            <a:r>
-              <a:rPr sz="800" b="1" spc="60">
-                <a:solidFill>
-                  <a:srgbClr val="002FA7"/>
-                </a:solidFill>
-                <a:latin typeface="Arial"/>
-                <a:ea typeface="微软雅黑"/>
-              </a:rPr>
-              <a:t>5×</a:t>
-            </a:r>
-          </a:p>
-        </p:txBody>
-      </p:sp>
-      <p:sp>
-        <p:nvSpPr>
-          <p:cNvPr id="25" name="TextBox 24"/>
+            <a:pPr>
+              <a:lnSpc>
+                <a:spcPct val="110000"/>
+              </a:lnSpc>
+            </a:pPr>
+            <a:r>
+              <a:rPr sz="2000" b="0" i="0">
+                <a:solidFill>
+                  <a:srgbClr val="FFFFFF"/>
+                </a:solidFill>
+                <a:latin typeface="Arial"/>
+                <a:ea typeface="微软雅黑"/>
+              </a:rPr>
+              <a:t>275 万</a:t>
+            </a:r>
+            <a:r>
+              <a:rPr sz="1200" b="0" i="0" spc="80">
+                <a:solidFill>
+                  <a:srgbClr val="FFFFFF"/>
+                </a:solidFill>
+                <a:latin typeface="Arial"/>
+                <a:ea typeface="微软雅黑"/>
+              </a:rPr>
+              <a:t>  55%</a:t>
+            </a:r>
+          </a:p>
+        </p:txBody>
+      </p:sp>
+      <p:sp>
+        <p:nvSpPr>
+          <p:cNvPr id="28" name="TextBox 27"/>
           <p:cNvSpPr txBox="1"/>
           <p:nvPr/>
         </p:nvSpPr>
         <p:spPr>
           <a:xfrm>
-            <a:off x="4526280" y="4160520"/>
-            <a:ext cx="2377440" cy="182880"/>
+            <a:off x="667512" y="5623560"/>
+            <a:ext cx="2340864" cy="777240"/>
           </a:xfrm>
           <a:prstGeom prst="rect">
             <a:avLst/>
@@ -3994,35 +4129,84 @@
           <a:noFill/>
         </p:spPr>
         <p:txBody>
-          <a:bodyPr wrap="square" lIns="0" rIns="0" tIns="0" bIns="0">
+          <a:bodyPr wrap="square" anchor="t" lIns="0" rIns="0" tIns="0" bIns="0">
             <a:spAutoFit/>
           </a:bodyPr>
           <a:lstStyle/>
           <a:p>
-            <a:pPr algn="l"/>
-            <a:r>
-              <a:rPr sz="800" b="1" spc="60">
-                <a:solidFill>
-                  <a:srgbClr val="002FA7"/>
-                </a:solidFill>
-                <a:latin typeface="Arial"/>
-                <a:ea typeface="微软雅黑"/>
-              </a:rPr>
-              <a:t>6×</a:t>
-            </a:r>
-          </a:p>
-        </p:txBody>
-      </p:sp>
-      <p:sp>
-        <p:nvSpPr>
-          <p:cNvPr id="26" name="TextBox 25"/>
+            <a:pPr algn="l">
+              <a:lnSpc>
+                <a:spcPct val="130000"/>
+              </a:lnSpc>
+            </a:pPr>
+            <a:r>
+              <a:rPr sz="900" b="0" i="0">
+                <a:solidFill>
+                  <a:srgbClr val="DDE4F5"/>
+                </a:solidFill>
+                <a:latin typeface="Arial"/>
+                <a:ea typeface="微软雅黑"/>
+              </a:rPr>
+              <a:t>5→8 人 · 含创始人薪资
+AI 模型训练 · 后端 · App</a:t>
+            </a:r>
+          </a:p>
+        </p:txBody>
+      </p:sp>
+      <p:sp>
+        <p:nvSpPr>
+          <p:cNvPr id="29" name="Rectangle 28"/>
+          <p:cNvSpPr/>
+          <p:nvPr/>
+        </p:nvSpPr>
+        <p:spPr>
+          <a:xfrm>
+            <a:off x="3337560" y="4663440"/>
+            <a:ext cx="2670048" cy="1828800"/>
+          </a:xfrm>
+          <a:prstGeom prst="rect">
+            <a:avLst/>
+          </a:prstGeom>
+          <a:solidFill>
+            <a:srgbClr val="F5F5F4"/>
+          </a:solidFill>
+          <a:ln>
+            <a:noFill/>
+          </a:ln>
+          <a:effectLst/>
+        </p:spPr>
+        <p:style>
+          <a:lnRef idx="1">
+            <a:schemeClr val="accent1"/>
+          </a:lnRef>
+          <a:fillRef idx="3">
+            <a:schemeClr val="accent1"/>
+          </a:fillRef>
+          <a:effectRef idx="2">
+            <a:schemeClr val="accent1"/>
+          </a:effectRef>
+          <a:fontRef idx="minor">
+            <a:schemeClr val="lt1"/>
+          </a:fontRef>
+        </p:style>
+        <p:txBody>
+          <a:bodyPr rtlCol="0" anchor="ctr"/>
+          <a:lstStyle/>
+          <a:p>
+            <a:pPr algn="ctr"/>
+          </a:p>
+        </p:txBody>
+      </p:sp>
+      <p:sp>
+        <p:nvSpPr>
+          <p:cNvPr id="30" name="TextBox 29"/>
           <p:cNvSpPr txBox="1"/>
           <p:nvPr/>
         </p:nvSpPr>
         <p:spPr>
           <a:xfrm>
-            <a:off x="6903720" y="4160520"/>
-            <a:ext cx="2377440" cy="182880"/>
+            <a:off x="3502152" y="4800600"/>
+            <a:ext cx="2340864" cy="228600"/>
           </a:xfrm>
           <a:prstGeom prst="rect">
             <a:avLst/>
@@ -4030,35 +4214,35 @@
           <a:noFill/>
         </p:spPr>
         <p:txBody>
-          <a:bodyPr wrap="square" lIns="0" rIns="0" tIns="0" bIns="0">
+          <a:bodyPr wrap="square" anchor="t" lIns="0" rIns="0" tIns="0" bIns="0">
             <a:spAutoFit/>
           </a:bodyPr>
           <a:lstStyle/>
           <a:p>
             <a:pPr algn="l"/>
             <a:r>
-              <a:rPr sz="800" b="1" spc="60">
-                <a:solidFill>
-                  <a:srgbClr val="002FA7"/>
-                </a:solidFill>
-                <a:latin typeface="Arial"/>
-                <a:ea typeface="微软雅黑"/>
-              </a:rPr>
-              <a:t>7×</a:t>
-            </a:r>
-          </a:p>
-        </p:txBody>
-      </p:sp>
-      <p:sp>
-        <p:nvSpPr>
-          <p:cNvPr id="27" name="TextBox 26"/>
+              <a:rPr sz="900" b="0" i="0" spc="100">
+                <a:solidFill>
+                  <a:srgbClr val="737373"/>
+                </a:solidFill>
+                <a:latin typeface="Arial"/>
+                <a:ea typeface="微软雅黑"/>
+              </a:rPr>
+              <a:t>硬件 / 供应链</a:t>
+            </a:r>
+          </a:p>
+        </p:txBody>
+      </p:sp>
+      <p:sp>
+        <p:nvSpPr>
+          <p:cNvPr id="31" name="TextBox 30"/>
           <p:cNvSpPr txBox="1"/>
           <p:nvPr/>
         </p:nvSpPr>
         <p:spPr>
           <a:xfrm>
-            <a:off x="9281160" y="4160520"/>
-            <a:ext cx="2377440" cy="182880"/>
+            <a:off x="3502152" y="5047488"/>
+            <a:ext cx="2340864" cy="502920"/>
           </a:xfrm>
           <a:prstGeom prst="rect">
             <a:avLst/>
@@ -4066,35 +4250,49 @@
           <a:noFill/>
         </p:spPr>
         <p:txBody>
-          <a:bodyPr wrap="square" lIns="0" rIns="0" tIns="0" bIns="0">
+          <a:bodyPr wrap="square" anchor="t" lIns="0" rIns="0" tIns="0" bIns="0">
             <a:spAutoFit/>
           </a:bodyPr>
           <a:lstStyle/>
           <a:p>
-            <a:pPr algn="l"/>
-            <a:r>
-              <a:rPr sz="800" b="1" spc="60">
-                <a:solidFill>
-                  <a:srgbClr val="002FA7"/>
-                </a:solidFill>
-                <a:latin typeface="Arial"/>
-                <a:ea typeface="微软雅黑"/>
-              </a:rPr>
-              <a:t>8×</a:t>
-            </a:r>
-          </a:p>
-        </p:txBody>
-      </p:sp>
-      <p:sp>
-        <p:nvSpPr>
-          <p:cNvPr id="28" name="TextBox 27"/>
+            <a:pPr>
+              <a:lnSpc>
+                <a:spcPct val="110000"/>
+              </a:lnSpc>
+            </a:pPr>
+            <a:r>
+              <a:rPr sz="2000" b="0" i="0">
+                <a:solidFill>
+                  <a:srgbClr val="0A0A0A"/>
+                </a:solidFill>
+                <a:latin typeface="Arial"/>
+                <a:ea typeface="微软雅黑"/>
+              </a:rPr>
+              <a:t>75 万</a:t>
+            </a:r>
+            <a:r>
+              <a:rPr sz="1200" b="0" i="0" spc="80">
+                <a:solidFill>
+                  <a:srgbClr val="737373"/>
+                </a:solidFill>
+                <a:latin typeface="Arial"/>
+                <a:ea typeface="微软雅黑"/>
+              </a:rPr>
+              <a:t>  15%</a:t>
+            </a:r>
+          </a:p>
+        </p:txBody>
+      </p:sp>
+      <p:sp>
+        <p:nvSpPr>
+          <p:cNvPr id="32" name="TextBox 31"/>
           <p:cNvSpPr txBox="1"/>
           <p:nvPr/>
         </p:nvSpPr>
         <p:spPr>
           <a:xfrm>
-            <a:off x="502920" y="4361688"/>
-            <a:ext cx="1645920" cy="182880"/>
+            <a:off x="3502152" y="5623560"/>
+            <a:ext cx="2340864" cy="777240"/>
           </a:xfrm>
           <a:prstGeom prst="rect">
             <a:avLst/>
@@ -4102,35 +4300,84 @@
           <a:noFill/>
         </p:spPr>
         <p:txBody>
-          <a:bodyPr wrap="square" lIns="0" rIns="0" tIns="0" bIns="0">
+          <a:bodyPr wrap="square" anchor="t" lIns="0" rIns="0" tIns="0" bIns="0">
             <a:spAutoFit/>
           </a:bodyPr>
           <a:lstStyle/>
           <a:p>
-            <a:pPr algn="l"/>
-            <a:r>
-              <a:rPr sz="800" b="1" spc="60">
-                <a:solidFill>
-                  <a:srgbClr val="002FA7"/>
-                </a:solidFill>
-                <a:latin typeface="Arial"/>
-                <a:ea typeface="微软雅黑"/>
-              </a:rPr>
-              <a:t>投后估值</a:t>
-            </a:r>
-          </a:p>
-        </p:txBody>
-      </p:sp>
-      <p:sp>
-        <p:nvSpPr>
-          <p:cNvPr id="29" name="TextBox 28"/>
+            <a:pPr algn="l">
+              <a:lnSpc>
+                <a:spcPct val="130000"/>
+              </a:lnSpc>
+            </a:pPr>
+            <a:r>
+              <a:rPr sz="900" b="0" i="0">
+                <a:solidFill>
+                  <a:srgbClr val="444444"/>
+                </a:solidFill>
+                <a:latin typeface="Arial"/>
+                <a:ea typeface="微软雅黑"/>
+              </a:rPr>
+              <a:t>雷达开发板 · 模组采购
+小批量试产 · 工装夹具</a:t>
+            </a:r>
+          </a:p>
+        </p:txBody>
+      </p:sp>
+      <p:sp>
+        <p:nvSpPr>
+          <p:cNvPr id="33" name="Rectangle 32"/>
+          <p:cNvSpPr/>
+          <p:nvPr/>
+        </p:nvSpPr>
+        <p:spPr>
+          <a:xfrm>
+            <a:off x="6172200" y="4663440"/>
+            <a:ext cx="2670048" cy="1828800"/>
+          </a:xfrm>
+          <a:prstGeom prst="rect">
+            <a:avLst/>
+          </a:prstGeom>
+          <a:solidFill>
+            <a:srgbClr val="F5F5F4"/>
+          </a:solidFill>
+          <a:ln>
+            <a:noFill/>
+          </a:ln>
+          <a:effectLst/>
+        </p:spPr>
+        <p:style>
+          <a:lnRef idx="1">
+            <a:schemeClr val="accent1"/>
+          </a:lnRef>
+          <a:fillRef idx="3">
+            <a:schemeClr val="accent1"/>
+          </a:fillRef>
+          <a:effectRef idx="2">
+            <a:schemeClr val="accent1"/>
+          </a:effectRef>
+          <a:fontRef idx="minor">
+            <a:schemeClr val="lt1"/>
+          </a:fontRef>
+        </p:style>
+        <p:txBody>
+          <a:bodyPr rtlCol="0" anchor="ctr"/>
+          <a:lstStyle/>
+          <a:p>
+            <a:pPr algn="ctr"/>
+          </a:p>
+        </p:txBody>
+      </p:sp>
+      <p:sp>
+        <p:nvSpPr>
+          <p:cNvPr id="34" name="TextBox 33"/>
           <p:cNvSpPr txBox="1"/>
           <p:nvPr/>
         </p:nvSpPr>
         <p:spPr>
           <a:xfrm>
-            <a:off x="2148840" y="4361688"/>
-            <a:ext cx="2377440" cy="182880"/>
+            <a:off x="6336792" y="4800600"/>
+            <a:ext cx="2340864" cy="228600"/>
           </a:xfrm>
           <a:prstGeom prst="rect">
             <a:avLst/>
@@ -4138,35 +4385,35 @@
           <a:noFill/>
         </p:spPr>
         <p:txBody>
-          <a:bodyPr wrap="square" lIns="0" rIns="0" tIns="0" bIns="0">
+          <a:bodyPr wrap="square" anchor="t" lIns="0" rIns="0" tIns="0" bIns="0">
             <a:spAutoFit/>
           </a:bodyPr>
           <a:lstStyle/>
           <a:p>
             <a:pPr algn="l"/>
             <a:r>
-              <a:rPr sz="800" b="0" spc="60">
-                <a:solidFill>
-                  <a:srgbClr val="FFFFFF"/>
-                </a:solidFill>
-                <a:latin typeface="Arial"/>
-                <a:ea typeface="微软雅黑"/>
-              </a:rPr>
-              <a:t>3,185万</a:t>
-            </a:r>
-          </a:p>
-        </p:txBody>
-      </p:sp>
-      <p:sp>
-        <p:nvSpPr>
-          <p:cNvPr id="30" name="TextBox 29"/>
+              <a:rPr sz="900" b="0" i="0" spc="100">
+                <a:solidFill>
+                  <a:srgbClr val="737373"/>
+                </a:solidFill>
+                <a:latin typeface="Arial"/>
+                <a:ea typeface="微软雅黑"/>
+              </a:rPr>
+              <a:t>获客 / 运营</a:t>
+            </a:r>
+          </a:p>
+        </p:txBody>
+      </p:sp>
+      <p:sp>
+        <p:nvSpPr>
+          <p:cNvPr id="35" name="TextBox 34"/>
           <p:cNvSpPr txBox="1"/>
           <p:nvPr/>
         </p:nvSpPr>
         <p:spPr>
           <a:xfrm>
-            <a:off x="4526280" y="4361688"/>
-            <a:ext cx="2377440" cy="182880"/>
+            <a:off x="6336792" y="5047488"/>
+            <a:ext cx="2340864" cy="502920"/>
           </a:xfrm>
           <a:prstGeom prst="rect">
             <a:avLst/>
@@ -4174,35 +4421,49 @@
           <a:noFill/>
         </p:spPr>
         <p:txBody>
-          <a:bodyPr wrap="square" lIns="0" rIns="0" tIns="0" bIns="0">
+          <a:bodyPr wrap="square" anchor="t" lIns="0" rIns="0" tIns="0" bIns="0">
             <a:spAutoFit/>
           </a:bodyPr>
           <a:lstStyle/>
           <a:p>
-            <a:pPr algn="l"/>
-            <a:r>
-              <a:rPr sz="800" b="0" spc="60">
-                <a:solidFill>
-                  <a:srgbClr val="FFFFFF"/>
-                </a:solidFill>
-                <a:latin typeface="Arial"/>
-                <a:ea typeface="微软雅黑"/>
-              </a:rPr>
-              <a:t>3,822万</a:t>
-            </a:r>
-          </a:p>
-        </p:txBody>
-      </p:sp>
-      <p:sp>
-        <p:nvSpPr>
-          <p:cNvPr id="31" name="TextBox 30"/>
+            <a:pPr>
+              <a:lnSpc>
+                <a:spcPct val="110000"/>
+              </a:lnSpc>
+            </a:pPr>
+            <a:r>
+              <a:rPr sz="2000" b="0" i="0">
+                <a:solidFill>
+                  <a:srgbClr val="0A0A0A"/>
+                </a:solidFill>
+                <a:latin typeface="Arial"/>
+                <a:ea typeface="微软雅黑"/>
+              </a:rPr>
+              <a:t>100 万</a:t>
+            </a:r>
+            <a:r>
+              <a:rPr sz="1200" b="0" i="0" spc="80">
+                <a:solidFill>
+                  <a:srgbClr val="737373"/>
+                </a:solidFill>
+                <a:latin typeface="Arial"/>
+                <a:ea typeface="微软雅黑"/>
+              </a:rPr>
+              <a:t>  20%</a:t>
+            </a:r>
+          </a:p>
+        </p:txBody>
+      </p:sp>
+      <p:sp>
+        <p:nvSpPr>
+          <p:cNvPr id="36" name="TextBox 35"/>
           <p:cNvSpPr txBox="1"/>
           <p:nvPr/>
         </p:nvSpPr>
         <p:spPr>
           <a:xfrm>
-            <a:off x="6903720" y="4361688"/>
-            <a:ext cx="2377440" cy="182880"/>
+            <a:off x="6336792" y="5623560"/>
+            <a:ext cx="2340864" cy="777240"/>
           </a:xfrm>
           <a:prstGeom prst="rect">
             <a:avLst/>
@@ -4210,35 +4471,84 @@
           <a:noFill/>
         </p:spPr>
         <p:txBody>
-          <a:bodyPr wrap="square" lIns="0" rIns="0" tIns="0" bIns="0">
+          <a:bodyPr wrap="square" anchor="t" lIns="0" rIns="0" tIns="0" bIns="0">
             <a:spAutoFit/>
           </a:bodyPr>
           <a:lstStyle/>
           <a:p>
-            <a:pPr algn="l"/>
-            <a:r>
-              <a:rPr sz="800" b="0" spc="60">
-                <a:solidFill>
-                  <a:srgbClr val="FFFFFF"/>
-                </a:solidFill>
-                <a:latin typeface="Arial"/>
-                <a:ea typeface="微软雅黑"/>
-              </a:rPr>
-              <a:t>4,460万</a:t>
-            </a:r>
-          </a:p>
-        </p:txBody>
-      </p:sp>
-      <p:sp>
-        <p:nvSpPr>
-          <p:cNvPr id="32" name="TextBox 31"/>
+            <a:pPr algn="l">
+              <a:lnSpc>
+                <a:spcPct val="130000"/>
+              </a:lnSpc>
+            </a:pPr>
+            <a:r>
+              <a:rPr sz="900" b="0" i="0">
+                <a:solidFill>
+                  <a:srgbClr val="444444"/>
+                </a:solidFill>
+                <a:latin typeface="Arial"/>
+                <a:ea typeface="微软雅黑"/>
+              </a:rPr>
+              <a:t>种子用户获取 · 社区冷启
+适老化补贴渠道对接</a:t>
+            </a:r>
+          </a:p>
+        </p:txBody>
+      </p:sp>
+      <p:sp>
+        <p:nvSpPr>
+          <p:cNvPr id="37" name="Rectangle 36"/>
+          <p:cNvSpPr/>
+          <p:nvPr/>
+        </p:nvSpPr>
+        <p:spPr>
+          <a:xfrm>
+            <a:off x="9006840" y="4663440"/>
+            <a:ext cx="2670048" cy="1828800"/>
+          </a:xfrm>
+          <a:prstGeom prst="rect">
+            <a:avLst/>
+          </a:prstGeom>
+          <a:solidFill>
+            <a:srgbClr val="F5F5F4"/>
+          </a:solidFill>
+          <a:ln>
+            <a:noFill/>
+          </a:ln>
+          <a:effectLst/>
+        </p:spPr>
+        <p:style>
+          <a:lnRef idx="1">
+            <a:schemeClr val="accent1"/>
+          </a:lnRef>
+          <a:fillRef idx="3">
+            <a:schemeClr val="accent1"/>
+          </a:fillRef>
+          <a:effectRef idx="2">
+            <a:schemeClr val="accent1"/>
+          </a:effectRef>
+          <a:fontRef idx="minor">
+            <a:schemeClr val="lt1"/>
+          </a:fontRef>
+        </p:style>
+        <p:txBody>
+          <a:bodyPr rtlCol="0" anchor="ctr"/>
+          <a:lstStyle/>
+          <a:p>
+            <a:pPr algn="ctr"/>
+          </a:p>
+        </p:txBody>
+      </p:sp>
+      <p:sp>
+        <p:nvSpPr>
+          <p:cNvPr id="38" name="TextBox 37"/>
           <p:cNvSpPr txBox="1"/>
           <p:nvPr/>
         </p:nvSpPr>
         <p:spPr>
           <a:xfrm>
-            <a:off x="9281160" y="4361688"/>
-            <a:ext cx="2377440" cy="182880"/>
+            <a:off x="9171432" y="4800600"/>
+            <a:ext cx="2340864" cy="228600"/>
           </a:xfrm>
           <a:prstGeom prst="rect">
             <a:avLst/>
@@ -4246,35 +4556,35 @@
           <a:noFill/>
         </p:spPr>
         <p:txBody>
-          <a:bodyPr wrap="square" lIns="0" rIns="0" tIns="0" bIns="0">
+          <a:bodyPr wrap="square" anchor="t" lIns="0" rIns="0" tIns="0" bIns="0">
             <a:spAutoFit/>
           </a:bodyPr>
           <a:lstStyle/>
           <a:p>
             <a:pPr algn="l"/>
             <a:r>
-              <a:rPr sz="800" b="0" spc="60">
-                <a:solidFill>
-                  <a:srgbClr val="FFFFFF"/>
-                </a:solidFill>
-                <a:latin typeface="Arial"/>
-                <a:ea typeface="微软雅黑"/>
-              </a:rPr>
-              <a:t>5,097万</a:t>
-            </a:r>
-          </a:p>
-        </p:txBody>
-      </p:sp>
-      <p:sp>
-        <p:nvSpPr>
-          <p:cNvPr id="33" name="TextBox 32"/>
+              <a:rPr sz="900" b="0" i="0" spc="100">
+                <a:solidFill>
+                  <a:srgbClr val="737373"/>
+                </a:solidFill>
+                <a:latin typeface="Arial"/>
+                <a:ea typeface="微软雅黑"/>
+              </a:rPr>
+              <a:t>云 / 数据 / 其他</a:t>
+            </a:r>
+          </a:p>
+        </p:txBody>
+      </p:sp>
+      <p:sp>
+        <p:nvSpPr>
+          <p:cNvPr id="39" name="TextBox 38"/>
           <p:cNvSpPr txBox="1"/>
           <p:nvPr/>
         </p:nvSpPr>
         <p:spPr>
           <a:xfrm>
-            <a:off x="502920" y="4562856"/>
-            <a:ext cx="1645920" cy="182880"/>
+            <a:off x="9171432" y="5047488"/>
+            <a:ext cx="2340864" cy="502920"/>
           </a:xfrm>
           <a:prstGeom prst="rect">
             <a:avLst/>
@@ -4282,35 +4592,49 @@
           <a:noFill/>
         </p:spPr>
         <p:txBody>
-          <a:bodyPr wrap="square" lIns="0" rIns="0" tIns="0" bIns="0">
+          <a:bodyPr wrap="square" anchor="t" lIns="0" rIns="0" tIns="0" bIns="0">
             <a:spAutoFit/>
           </a:bodyPr>
           <a:lstStyle/>
           <a:p>
-            <a:pPr algn="l"/>
-            <a:r>
-              <a:rPr sz="800" b="1" spc="60">
-                <a:solidFill>
-                  <a:srgbClr val="002FA7"/>
-                </a:solidFill>
-                <a:latin typeface="Arial"/>
-                <a:ea typeface="微软雅黑"/>
-              </a:rPr>
-              <a:t>投前（−300万）</a:t>
-            </a:r>
-          </a:p>
-        </p:txBody>
-      </p:sp>
-      <p:sp>
-        <p:nvSpPr>
-          <p:cNvPr id="34" name="TextBox 33"/>
+            <a:pPr>
+              <a:lnSpc>
+                <a:spcPct val="110000"/>
+              </a:lnSpc>
+            </a:pPr>
+            <a:r>
+              <a:rPr sz="2000" b="0" i="0">
+                <a:solidFill>
+                  <a:srgbClr val="0A0A0A"/>
+                </a:solidFill>
+                <a:latin typeface="Arial"/>
+                <a:ea typeface="微软雅黑"/>
+              </a:rPr>
+              <a:t>50 万</a:t>
+            </a:r>
+            <a:r>
+              <a:rPr sz="1200" b="0" i="0" spc="80">
+                <a:solidFill>
+                  <a:srgbClr val="737373"/>
+                </a:solidFill>
+                <a:latin typeface="Arial"/>
+                <a:ea typeface="微软雅黑"/>
+              </a:rPr>
+              <a:t>  10%</a:t>
+            </a:r>
+          </a:p>
+        </p:txBody>
+      </p:sp>
+      <p:sp>
+        <p:nvSpPr>
+          <p:cNvPr id="40" name="TextBox 39"/>
           <p:cNvSpPr txBox="1"/>
           <p:nvPr/>
         </p:nvSpPr>
         <p:spPr>
           <a:xfrm>
-            <a:off x="2148840" y="4562856"/>
-            <a:ext cx="2377440" cy="182880"/>
+            <a:off x="9171432" y="5623560"/>
+            <a:ext cx="2340864" cy="777240"/>
           </a:xfrm>
           <a:prstGeom prst="rect">
             <a:avLst/>
@@ -4318,237 +4642,26 @@
           <a:noFill/>
         </p:spPr>
         <p:txBody>
-          <a:bodyPr wrap="square" lIns="0" rIns="0" tIns="0" bIns="0">
+          <a:bodyPr wrap="square" anchor="t" lIns="0" rIns="0" tIns="0" bIns="0">
             <a:spAutoFit/>
           </a:bodyPr>
           <a:lstStyle/>
           <a:p>
-            <a:pPr algn="l"/>
-            <a:r>
-              <a:rPr sz="800" b="0" spc="60">
-                <a:solidFill>
-                  <a:srgbClr val="FFFFFF"/>
-                </a:solidFill>
-                <a:latin typeface="Arial"/>
-                <a:ea typeface="微软雅黑"/>
-              </a:rPr>
-              <a:t>2,885万</a:t>
-            </a:r>
-          </a:p>
-        </p:txBody>
-      </p:sp>
-      <p:sp>
-        <p:nvSpPr>
-          <p:cNvPr id="35" name="TextBox 34"/>
-          <p:cNvSpPr txBox="1"/>
-          <p:nvPr/>
-        </p:nvSpPr>
-        <p:spPr>
-          <a:xfrm>
-            <a:off x="4526280" y="4562856"/>
-            <a:ext cx="2377440" cy="182880"/>
-          </a:xfrm>
-          <a:prstGeom prst="rect">
-            <a:avLst/>
-          </a:prstGeom>
-          <a:noFill/>
-        </p:spPr>
-        <p:txBody>
-          <a:bodyPr wrap="square" lIns="0" rIns="0" tIns="0" bIns="0">
-            <a:spAutoFit/>
-          </a:bodyPr>
-          <a:lstStyle/>
-          <a:p>
-            <a:pPr algn="l"/>
-            <a:r>
-              <a:rPr sz="800" b="0" spc="60">
-                <a:solidFill>
-                  <a:srgbClr val="FFFFFF"/>
-                </a:solidFill>
-                <a:latin typeface="Arial"/>
-                <a:ea typeface="微软雅黑"/>
-              </a:rPr>
-              <a:t>3,522万</a:t>
-            </a:r>
-          </a:p>
-        </p:txBody>
-      </p:sp>
-      <p:sp>
-        <p:nvSpPr>
-          <p:cNvPr id="36" name="TextBox 35"/>
-          <p:cNvSpPr txBox="1"/>
-          <p:nvPr/>
-        </p:nvSpPr>
-        <p:spPr>
-          <a:xfrm>
-            <a:off x="6903720" y="4562856"/>
-            <a:ext cx="2377440" cy="182880"/>
-          </a:xfrm>
-          <a:prstGeom prst="rect">
-            <a:avLst/>
-          </a:prstGeom>
-          <a:noFill/>
-        </p:spPr>
-        <p:txBody>
-          <a:bodyPr wrap="square" lIns="0" rIns="0" tIns="0" bIns="0">
-            <a:spAutoFit/>
-          </a:bodyPr>
-          <a:lstStyle/>
-          <a:p>
-            <a:pPr algn="l"/>
-            <a:r>
-              <a:rPr sz="800" b="0" spc="60">
-                <a:solidFill>
-                  <a:srgbClr val="FFFFFF"/>
-                </a:solidFill>
-                <a:latin typeface="Arial"/>
-                <a:ea typeface="微软雅黑"/>
-              </a:rPr>
-              <a:t>4,160万</a:t>
-            </a:r>
-          </a:p>
-        </p:txBody>
-      </p:sp>
-      <p:sp>
-        <p:nvSpPr>
-          <p:cNvPr id="37" name="TextBox 36"/>
-          <p:cNvSpPr txBox="1"/>
-          <p:nvPr/>
-        </p:nvSpPr>
-        <p:spPr>
-          <a:xfrm>
-            <a:off x="9281160" y="4562856"/>
-            <a:ext cx="2377440" cy="182880"/>
-          </a:xfrm>
-          <a:prstGeom prst="rect">
-            <a:avLst/>
-          </a:prstGeom>
-          <a:noFill/>
-        </p:spPr>
-        <p:txBody>
-          <a:bodyPr wrap="square" lIns="0" rIns="0" tIns="0" bIns="0">
-            <a:spAutoFit/>
-          </a:bodyPr>
-          <a:lstStyle/>
-          <a:p>
-            <a:pPr algn="l"/>
-            <a:r>
-              <a:rPr sz="800" b="0" spc="60">
-                <a:solidFill>
-                  <a:srgbClr val="FFFFFF"/>
-                </a:solidFill>
-                <a:latin typeface="Arial"/>
-                <a:ea typeface="微软雅黑"/>
-              </a:rPr>
-              <a:t>4,797万</a:t>
-            </a:r>
-          </a:p>
-        </p:txBody>
-      </p:sp>
-      <p:sp>
-        <p:nvSpPr>
-          <p:cNvPr id="38" name="TextBox 37"/>
-          <p:cNvSpPr txBox="1"/>
-          <p:nvPr/>
-        </p:nvSpPr>
-        <p:spPr>
-          <a:xfrm>
-            <a:off x="502920" y="4764024"/>
-            <a:ext cx="1645920" cy="182880"/>
-          </a:xfrm>
-          <a:prstGeom prst="rect">
-            <a:avLst/>
-          </a:prstGeom>
-          <a:noFill/>
-        </p:spPr>
-        <p:txBody>
-          <a:bodyPr wrap="square" lIns="0" rIns="0" tIns="0" bIns="0">
-            <a:spAutoFit/>
-          </a:bodyPr>
-          <a:lstStyle/>
-          <a:p>
-            <a:pPr algn="l"/>
-            <a:r>
-              <a:rPr sz="800" b="1" spc="60">
-                <a:solidFill>
-                  <a:srgbClr val="002FA7"/>
-                </a:solidFill>
-                <a:latin typeface="Arial"/>
-                <a:ea typeface="微软雅黑"/>
-              </a:rPr>
-              <a:t>出让比例</a:t>
-            </a:r>
-          </a:p>
-        </p:txBody>
-      </p:sp>
-      <p:sp>
-        <p:nvSpPr>
-          <p:cNvPr id="39" name="TextBox 38"/>
-          <p:cNvSpPr txBox="1"/>
-          <p:nvPr/>
-        </p:nvSpPr>
-        <p:spPr>
-          <a:xfrm>
-            <a:off x="2148840" y="4764024"/>
-            <a:ext cx="2377440" cy="182880"/>
-          </a:xfrm>
-          <a:prstGeom prst="rect">
-            <a:avLst/>
-          </a:prstGeom>
-          <a:noFill/>
-        </p:spPr>
-        <p:txBody>
-          <a:bodyPr wrap="square" lIns="0" rIns="0" tIns="0" bIns="0">
-            <a:spAutoFit/>
-          </a:bodyPr>
-          <a:lstStyle/>
-          <a:p>
-            <a:pPr algn="l"/>
-            <a:r>
-              <a:rPr sz="800" b="0" spc="60">
-                <a:solidFill>
-                  <a:srgbClr val="FFFFFF"/>
-                </a:solidFill>
-                <a:latin typeface="Arial"/>
-                <a:ea typeface="微软雅黑"/>
-              </a:rPr>
-              <a:t>9.4%</a:t>
-            </a:r>
-          </a:p>
-        </p:txBody>
-      </p:sp>
-      <p:sp>
-        <p:nvSpPr>
-          <p:cNvPr id="40" name="TextBox 39"/>
-          <p:cNvSpPr txBox="1"/>
-          <p:nvPr/>
-        </p:nvSpPr>
-        <p:spPr>
-          <a:xfrm>
-            <a:off x="4526280" y="4764024"/>
-            <a:ext cx="2377440" cy="182880"/>
-          </a:xfrm>
-          <a:prstGeom prst="rect">
-            <a:avLst/>
-          </a:prstGeom>
-          <a:noFill/>
-        </p:spPr>
-        <p:txBody>
-          <a:bodyPr wrap="square" lIns="0" rIns="0" tIns="0" bIns="0">
-            <a:spAutoFit/>
-          </a:bodyPr>
-          <a:lstStyle/>
-          <a:p>
-            <a:pPr algn="l"/>
-            <a:r>
-              <a:rPr sz="800" b="0" spc="60">
-                <a:solidFill>
-                  <a:srgbClr val="FFFFFF"/>
-                </a:solidFill>
-                <a:latin typeface="Arial"/>
-                <a:ea typeface="微软雅黑"/>
-              </a:rPr>
-              <a:t>7.8%</a:t>
+            <a:pPr algn="l">
+              <a:lnSpc>
+                <a:spcPct val="130000"/>
+              </a:lnSpc>
+            </a:pPr>
+            <a:r>
+              <a:rPr sz="900" b="0" i="0">
+                <a:solidFill>
+                  <a:srgbClr val="444444"/>
+                </a:solidFill>
+                <a:latin typeface="Arial"/>
+                <a:ea typeface="微软雅黑"/>
+              </a:rPr>
+              <a:t>GPU 云 · TimescaleDB
+办公 · 行政 · 合规</a:t>
             </a:r>
           </a:p>
         </p:txBody>
@@ -4561,8 +4674,8 @@
         </p:nvSpPr>
         <p:spPr>
           <a:xfrm>
-            <a:off x="6903720" y="4764024"/>
-            <a:ext cx="2377440" cy="182880"/>
+            <a:off x="502920" y="6400800"/>
+            <a:ext cx="11183112" cy="365760"/>
           </a:xfrm>
           <a:prstGeom prst="rect">
             <a:avLst/>
@@ -4570,79 +4683,7 @@
           <a:noFill/>
         </p:spPr>
         <p:txBody>
-          <a:bodyPr wrap="square" lIns="0" rIns="0" tIns="0" bIns="0">
-            <a:spAutoFit/>
-          </a:bodyPr>
-          <a:lstStyle/>
-          <a:p>
-            <a:pPr algn="l"/>
-            <a:r>
-              <a:rPr sz="800" b="0" spc="60">
-                <a:solidFill>
-                  <a:srgbClr val="FFFFFF"/>
-                </a:solidFill>
-                <a:latin typeface="Arial"/>
-                <a:ea typeface="微软雅黑"/>
-              </a:rPr>
-              <a:t>6.7%</a:t>
-            </a:r>
-          </a:p>
-        </p:txBody>
-      </p:sp>
-      <p:sp>
-        <p:nvSpPr>
-          <p:cNvPr id="42" name="TextBox 41"/>
-          <p:cNvSpPr txBox="1"/>
-          <p:nvPr/>
-        </p:nvSpPr>
-        <p:spPr>
-          <a:xfrm>
-            <a:off x="9281160" y="4764024"/>
-            <a:ext cx="2377440" cy="182880"/>
-          </a:xfrm>
-          <a:prstGeom prst="rect">
-            <a:avLst/>
-          </a:prstGeom>
-          <a:noFill/>
-        </p:spPr>
-        <p:txBody>
-          <a:bodyPr wrap="square" lIns="0" rIns="0" tIns="0" bIns="0">
-            <a:spAutoFit/>
-          </a:bodyPr>
-          <a:lstStyle/>
-          <a:p>
-            <a:pPr algn="l"/>
-            <a:r>
-              <a:rPr sz="800" b="0" spc="60">
-                <a:solidFill>
-                  <a:srgbClr val="FFFFFF"/>
-                </a:solidFill>
-                <a:latin typeface="Arial"/>
-                <a:ea typeface="微软雅黑"/>
-              </a:rPr>
-              <a:t>5.9%</a:t>
-            </a:r>
-          </a:p>
-        </p:txBody>
-      </p:sp>
-      <p:sp>
-        <p:nvSpPr>
-          <p:cNvPr id="43" name="TextBox 42"/>
-          <p:cNvSpPr txBox="1"/>
-          <p:nvPr/>
-        </p:nvSpPr>
-        <p:spPr>
-          <a:xfrm>
-            <a:off x="502920" y="5257800"/>
-            <a:ext cx="11183112" cy="457200"/>
-          </a:xfrm>
-          <a:prstGeom prst="rect">
-            <a:avLst/>
-          </a:prstGeom>
-          <a:noFill/>
-        </p:spPr>
-        <p:txBody>
-          <a:bodyPr wrap="square" lIns="0" rIns="0" tIns="0" bIns="0">
+          <a:bodyPr wrap="square" anchor="t" lIns="0" rIns="0" tIns="0" bIns="0">
             <a:spAutoFit/>
           </a:bodyPr>
           <a:lstStyle/>
@@ -4653,90 +4694,14 @@
               </a:lnSpc>
             </a:pPr>
             <a:r>
-              <a:rPr sz="750" b="0">
-                <a:solidFill>
-                  <a:srgbClr val="BBBBBB"/>
-                </a:solidFill>
-                <a:latin typeface="Arial"/>
-                <a:ea typeface="微软雅黑"/>
-              </a:rPr>
-              <a:t>可比：萤石上市前 8–12× P/S | 小米 IoT 3–5× | Vayyar C轮 ~10× | 国内天使轮硬件 2–5× 前瞻。家安取 5–8×：硬件+SaaS叠加（订阅毛利90%），1.5万户数据飞轮已冷启动，CAGR 218%，国产SoC降本确定性高。</a:t>
-            </a:r>
-          </a:p>
-        </p:txBody>
-      </p:sp>
-      <p:sp>
-        <p:nvSpPr>
-          <p:cNvPr id="44" name="TextBox 43"/>
-          <p:cNvSpPr txBox="1"/>
-          <p:nvPr/>
-        </p:nvSpPr>
-        <p:spPr>
-          <a:xfrm>
-            <a:off x="502920" y="5806440"/>
-            <a:ext cx="11183112" cy="274320"/>
-          </a:xfrm>
-          <a:prstGeom prst="rect">
-            <a:avLst/>
-          </a:prstGeom>
-          <a:noFill/>
-        </p:spPr>
-        <p:txBody>
-          <a:bodyPr wrap="square" lIns="0" rIns="0" tIns="0" bIns="0">
-            <a:spAutoFit/>
-          </a:bodyPr>
-          <a:lstStyle/>
-          <a:p>
-            <a:pPr algn="l">
-              <a:lnSpc>
-                <a:spcPct val="115000"/>
-              </a:lnSpc>
-            </a:pPr>
-            <a:r>
-              <a:rPr sz="750" b="0">
-                <a:solidFill>
-                  <a:srgbClr val="BBBBBB"/>
-                </a:solidFill>
-                <a:latin typeface="Arial"/>
-                <a:ea typeface="微软雅黑"/>
-              </a:rPr>
-              <a:t>政策背书：国办发〔2024〕1 号"家庭配备智能安全监护设备" | 毫米波雷达已入工信部/民政部/卫健委《推广目录》</a:t>
-            </a:r>
-          </a:p>
-        </p:txBody>
-      </p:sp>
-      <p:sp>
-        <p:nvSpPr>
-          <p:cNvPr id="45" name="TextBox 44"/>
-          <p:cNvSpPr txBox="1"/>
-          <p:nvPr/>
-        </p:nvSpPr>
-        <p:spPr>
-          <a:xfrm>
-            <a:off x="502920" y="6263640"/>
-            <a:ext cx="11183112" cy="182880"/>
-          </a:xfrm>
-          <a:prstGeom prst="rect">
-            <a:avLst/>
-          </a:prstGeom>
-          <a:noFill/>
-        </p:spPr>
-        <p:txBody>
-          <a:bodyPr wrap="square" lIns="0" rIns="0" tIns="0" bIns="0">
-            <a:spAutoFit/>
-          </a:bodyPr>
-          <a:lstStyle/>
-          <a:p>
-            <a:pPr algn="r"/>
-            <a:r>
-              <a:rPr sz="800" b="0" spc="100">
-                <a:solidFill>
-                  <a:srgbClr val="737373"/>
-                </a:solidFill>
-                <a:latin typeface="Arial"/>
-                <a:ea typeface="微软雅黑"/>
-              </a:rPr>
-              <a:t>家安 housafe · 天使轮 300 万</a:t>
+              <a:rPr sz="850" b="0" i="0">
+                <a:solidFill>
+                  <a:srgbClr val="999999"/>
+                </a:solidFill>
+                <a:latin typeface="Arial"/>
+                <a:ea typeface="微软雅黑"/>
+              </a:rPr>
+              <a:t>当前进展：地基系统 10 Tasks ✅ + AI 引擎 Phase A-1/2/3 ✅ — 软件骨架已跑通，本轮资金主要投向 AI 模型训练 + 硬件采购 + 商业化启动</a:t>
             </a:r>
           </a:p>
         </p:txBody>
@@ -4779,6 +4744,7 @@
           <a:ln>
             <a:noFill/>
           </a:ln>
+          <a:effectLst/>
         </p:spPr>
         <p:style>
           <a:lnRef idx="1">
@@ -4811,7 +4777,7 @@
         <p:spPr>
           <a:xfrm>
             <a:off x="502920" y="329184"/>
-            <a:ext cx="7315200" cy="246888"/>
+            <a:ext cx="7315200" cy="274320"/>
           </a:xfrm>
           <a:prstGeom prst="rect">
             <a:avLst/>
@@ -4819,21 +4785,21 @@
           <a:noFill/>
         </p:spPr>
         <p:txBody>
-          <a:bodyPr wrap="square" lIns="0" rIns="0" tIns="0" bIns="0">
+          <a:bodyPr wrap="square" anchor="t" lIns="0" rIns="0" tIns="0" bIns="0">
             <a:spAutoFit/>
           </a:bodyPr>
           <a:lstStyle/>
           <a:p>
             <a:pPr algn="l"/>
             <a:r>
-              <a:rPr sz="950" b="0" spc="120">
+              <a:rPr sz="950" b="0" i="0" spc="120">
                 <a:solidFill>
                   <a:srgbClr val="737373"/>
                 </a:solidFill>
                 <a:latin typeface="Arial"/>
                 <a:ea typeface="微软雅黑"/>
               </a:rPr>
-              <a:t>Financials &amp; Roadmap · 财务与里程碑</a:t>
+              <a:t>家安 housafe · 融资计划</a:t>
             </a:r>
           </a:p>
         </p:txBody>
@@ -4847,7 +4813,7 @@
         <p:spPr>
           <a:xfrm>
             <a:off x="5790895" y="329184"/>
-            <a:ext cx="5897880" cy="246888"/>
+            <a:ext cx="5897880" cy="274320"/>
           </a:xfrm>
           <a:prstGeom prst="rect">
             <a:avLst/>
@@ -4855,21 +4821,21 @@
           <a:noFill/>
         </p:spPr>
         <p:txBody>
-          <a:bodyPr wrap="square" lIns="0" rIns="0" tIns="0" bIns="0">
+          <a:bodyPr wrap="square" anchor="t" lIns="0" rIns="0" tIns="0" bIns="0">
             <a:spAutoFit/>
           </a:bodyPr>
           <a:lstStyle/>
           <a:p>
             <a:pPr algn="r"/>
             <a:r>
-              <a:rPr sz="950" b="0" spc="120">
+              <a:rPr sz="950" b="0" i="0" spc="120">
                 <a:solidFill>
                   <a:srgbClr val="737373"/>
                 </a:solidFill>
                 <a:latin typeface="Arial"/>
                 <a:ea typeface="微软雅黑"/>
               </a:rPr>
-              <a:t>家安 housafe · 天使轮</a:t>
+              <a:t>天使轮 · 02 / 02</a:t>
             </a:r>
           </a:p>
         </p:txBody>
@@ -4883,7 +4849,7 @@
         <p:spPr>
           <a:xfrm>
             <a:off x="502920" y="777240"/>
-            <a:ext cx="8229600" cy="246888"/>
+            <a:ext cx="8229600" cy="274320"/>
           </a:xfrm>
           <a:prstGeom prst="rect">
             <a:avLst/>
@@ -4891,21 +4857,21 @@
           <a:noFill/>
         </p:spPr>
         <p:txBody>
-          <a:bodyPr wrap="square" lIns="0" rIns="0" tIns="0" bIns="0">
+          <a:bodyPr wrap="square" anchor="t" lIns="0" rIns="0" tIns="0" bIns="0">
             <a:spAutoFit/>
           </a:bodyPr>
           <a:lstStyle/>
           <a:p>
             <a:pPr algn="l"/>
             <a:r>
-              <a:rPr sz="1050" b="1" spc="150">
+              <a:rPr sz="1050" b="1" i="0" spc="150">
                 <a:solidFill>
                   <a:srgbClr val="002FA7"/>
                 </a:solidFill>
                 <a:latin typeface="Arial"/>
                 <a:ea typeface="微软雅黑"/>
               </a:rPr>
-              <a:t>FINANCIALS &amp; ROADMAP</a:t>
+              <a:t>ROADMAP &amp; PROGRESS</a:t>
             </a:r>
           </a:p>
         </p:txBody>
@@ -4918,8 +4884,8 @@
         </p:nvSpPr>
         <p:spPr>
           <a:xfrm>
-            <a:off x="502920" y="1143000"/>
-            <a:ext cx="6858000" cy="201168"/>
+            <a:off x="502920" y="1097280"/>
+            <a:ext cx="11155680" cy="1165860"/>
           </a:xfrm>
           <a:prstGeom prst="rect">
             <a:avLst/>
@@ -4927,21 +4893,25 @@
           <a:noFill/>
         </p:spPr>
         <p:txBody>
-          <a:bodyPr wrap="square" lIns="0" rIns="0" tIns="0" bIns="0">
+          <a:bodyPr wrap="square" anchor="t" lIns="0" rIns="0" tIns="0" bIns="0">
             <a:spAutoFit/>
           </a:bodyPr>
           <a:lstStyle/>
           <a:p>
-            <a:pPr algn="l"/>
-            <a:r>
-              <a:rPr sz="1000" b="1" spc="100">
-                <a:solidFill>
-                  <a:srgbClr val="002FA7"/>
-                </a:solidFill>
-                <a:latin typeface="Arial"/>
-                <a:ea typeface="微软雅黑"/>
-              </a:rPr>
-              <a:t>三年财务预测（万元）</a:t>
+            <a:pPr>
+              <a:lnSpc>
+                <a:spcPct val="105000"/>
+              </a:lnSpc>
+            </a:pPr>
+            <a:r>
+              <a:rPr sz="2700" b="0" i="0">
+                <a:solidFill>
+                  <a:srgbClr val="0A0A0A"/>
+                </a:solidFill>
+                <a:latin typeface="Arial"/>
+                <a:ea typeface="微软雅黑"/>
+              </a:rPr>
+              <a:t>关键里程碑与当前进展</a:t>
             </a:r>
           </a:p>
         </p:txBody>
@@ -4954,8 +4924,8 @@
         </p:nvSpPr>
         <p:spPr>
           <a:xfrm>
-            <a:off x="502920" y="1389888"/>
-            <a:ext cx="1828800" cy="164592"/>
+            <a:off x="502920" y="1920240"/>
+            <a:ext cx="5486400" cy="274320"/>
           </a:xfrm>
           <a:prstGeom prst="rect">
             <a:avLst/>
@@ -4963,2611 +4933,45 @@
           <a:noFill/>
         </p:spPr>
         <p:txBody>
-          <a:bodyPr wrap="square" lIns="0" rIns="0" tIns="0" bIns="0">
+          <a:bodyPr wrap="square" anchor="t" lIns="0" rIns="0" tIns="0" bIns="0">
             <a:spAutoFit/>
           </a:bodyPr>
           <a:lstStyle/>
           <a:p>
             <a:pPr algn="l"/>
             <a:r>
-              <a:rPr sz="700" b="1" spc="50">
-                <a:solidFill>
-                  <a:srgbClr val="002FA7"/>
-                </a:solidFill>
-                <a:latin typeface="Arial"/>
-                <a:ea typeface="微软雅黑"/>
-              </a:rPr>
-              <a:t/>
-            </a:r>
-          </a:p>
-        </p:txBody>
-      </p:sp>
-      <p:sp>
-        <p:nvSpPr>
-          <p:cNvPr id="8" name="TextBox 7"/>
-          <p:cNvSpPr txBox="1"/>
-          <p:nvPr/>
-        </p:nvSpPr>
-        <p:spPr>
-          <a:xfrm>
-            <a:off x="2331720" y="1389888"/>
-            <a:ext cx="1554480" cy="164592"/>
-          </a:xfrm>
-          <a:prstGeom prst="rect">
-            <a:avLst/>
-          </a:prstGeom>
-          <a:noFill/>
-        </p:spPr>
-        <p:txBody>
-          <a:bodyPr wrap="square" lIns="0" rIns="0" tIns="0" bIns="0">
-            <a:spAutoFit/>
-          </a:bodyPr>
-          <a:lstStyle/>
-          <a:p>
-            <a:pPr algn="l"/>
-            <a:r>
-              <a:rPr sz="700" b="1" spc="50">
-                <a:solidFill>
-                  <a:srgbClr val="002FA7"/>
-                </a:solidFill>
-                <a:latin typeface="Arial"/>
-                <a:ea typeface="微软雅黑"/>
-              </a:rPr>
-              <a:t>Y1</a:t>
-            </a:r>
-          </a:p>
-        </p:txBody>
-      </p:sp>
-      <p:sp>
-        <p:nvSpPr>
-          <p:cNvPr id="9" name="TextBox 8"/>
-          <p:cNvSpPr txBox="1"/>
-          <p:nvPr/>
-        </p:nvSpPr>
-        <p:spPr>
-          <a:xfrm>
-            <a:off x="3886200" y="1389888"/>
-            <a:ext cx="1554480" cy="164592"/>
-          </a:xfrm>
-          <a:prstGeom prst="rect">
-            <a:avLst/>
-          </a:prstGeom>
-          <a:noFill/>
-        </p:spPr>
-        <p:txBody>
-          <a:bodyPr wrap="square" lIns="0" rIns="0" tIns="0" bIns="0">
-            <a:spAutoFit/>
-          </a:bodyPr>
-          <a:lstStyle/>
-          <a:p>
-            <a:pPr algn="l"/>
-            <a:r>
-              <a:rPr sz="700" b="1" spc="50">
-                <a:solidFill>
-                  <a:srgbClr val="002FA7"/>
-                </a:solidFill>
-                <a:latin typeface="Arial"/>
-                <a:ea typeface="微软雅黑"/>
-              </a:rPr>
-              <a:t>Y2</a:t>
-            </a:r>
-          </a:p>
-        </p:txBody>
-      </p:sp>
-      <p:sp>
-        <p:nvSpPr>
-          <p:cNvPr id="10" name="TextBox 9"/>
-          <p:cNvSpPr txBox="1"/>
-          <p:nvPr/>
-        </p:nvSpPr>
-        <p:spPr>
-          <a:xfrm>
-            <a:off x="5440680" y="1389888"/>
-            <a:ext cx="1554480" cy="164592"/>
-          </a:xfrm>
-          <a:prstGeom prst="rect">
-            <a:avLst/>
-          </a:prstGeom>
-          <a:noFill/>
-        </p:spPr>
-        <p:txBody>
-          <a:bodyPr wrap="square" lIns="0" rIns="0" tIns="0" bIns="0">
-            <a:spAutoFit/>
-          </a:bodyPr>
-          <a:lstStyle/>
-          <a:p>
-            <a:pPr algn="l"/>
-            <a:r>
-              <a:rPr sz="700" b="1" spc="50">
-                <a:solidFill>
-                  <a:srgbClr val="002FA7"/>
-                </a:solidFill>
-                <a:latin typeface="Arial"/>
-                <a:ea typeface="微软雅黑"/>
-              </a:rPr>
-              <a:t>Y3</a:t>
-            </a:r>
-          </a:p>
-        </p:txBody>
-      </p:sp>
-      <p:sp>
-        <p:nvSpPr>
-          <p:cNvPr id="11" name="TextBox 10"/>
-          <p:cNvSpPr txBox="1"/>
-          <p:nvPr/>
-        </p:nvSpPr>
-        <p:spPr>
-          <a:xfrm>
-            <a:off x="502920" y="1572768"/>
-            <a:ext cx="1828800" cy="164592"/>
-          </a:xfrm>
-          <a:prstGeom prst="rect">
-            <a:avLst/>
-          </a:prstGeom>
-          <a:noFill/>
-        </p:spPr>
-        <p:txBody>
-          <a:bodyPr wrap="square" lIns="0" rIns="0" tIns="0" bIns="0">
-            <a:spAutoFit/>
-          </a:bodyPr>
-          <a:lstStyle/>
-          <a:p>
-            <a:pPr algn="l"/>
-            <a:r>
-              <a:rPr sz="700" b="1" spc="50">
-                <a:solidFill>
-                  <a:srgbClr val="333333"/>
-                </a:solidFill>
-                <a:latin typeface="Arial"/>
-                <a:ea typeface="微软雅黑"/>
-              </a:rPr>
-              <a:t>年末装机（户）</a:t>
-            </a:r>
-          </a:p>
-        </p:txBody>
-      </p:sp>
-      <p:sp>
-        <p:nvSpPr>
-          <p:cNvPr id="12" name="TextBox 11"/>
-          <p:cNvSpPr txBox="1"/>
-          <p:nvPr/>
-        </p:nvSpPr>
-        <p:spPr>
-          <a:xfrm>
-            <a:off x="2331720" y="1572768"/>
-            <a:ext cx="1554480" cy="164592"/>
-          </a:xfrm>
-          <a:prstGeom prst="rect">
-            <a:avLst/>
-          </a:prstGeom>
-          <a:noFill/>
-        </p:spPr>
-        <p:txBody>
-          <a:bodyPr wrap="square" lIns="0" rIns="0" tIns="0" bIns="0">
-            <a:spAutoFit/>
-          </a:bodyPr>
-          <a:lstStyle/>
-          <a:p>
-            <a:pPr algn="l"/>
-            <a:r>
-              <a:rPr sz="700" b="0" spc="50">
-                <a:solidFill>
-                  <a:srgbClr val="333333"/>
-                </a:solidFill>
-                <a:latin typeface="Arial"/>
-                <a:ea typeface="微软雅黑"/>
-              </a:rPr>
-              <a:t>1,000</a:t>
-            </a:r>
-          </a:p>
-        </p:txBody>
-      </p:sp>
-      <p:sp>
-        <p:nvSpPr>
-          <p:cNvPr id="13" name="TextBox 12"/>
-          <p:cNvSpPr txBox="1"/>
-          <p:nvPr/>
-        </p:nvSpPr>
-        <p:spPr>
-          <a:xfrm>
-            <a:off x="3886200" y="1572768"/>
-            <a:ext cx="1554480" cy="164592"/>
-          </a:xfrm>
-          <a:prstGeom prst="rect">
-            <a:avLst/>
-          </a:prstGeom>
-          <a:noFill/>
-        </p:spPr>
-        <p:txBody>
-          <a:bodyPr wrap="square" lIns="0" rIns="0" tIns="0" bIns="0">
-            <a:spAutoFit/>
-          </a:bodyPr>
-          <a:lstStyle/>
-          <a:p>
-            <a:pPr algn="l"/>
-            <a:r>
-              <a:rPr sz="700" b="0" spc="50">
-                <a:solidFill>
-                  <a:srgbClr val="333333"/>
-                </a:solidFill>
-                <a:latin typeface="Arial"/>
-                <a:ea typeface="微软雅黑"/>
-              </a:rPr>
-              <a:t>5,000</a:t>
-            </a:r>
-          </a:p>
-        </p:txBody>
-      </p:sp>
-      <p:sp>
-        <p:nvSpPr>
-          <p:cNvPr id="14" name="TextBox 13"/>
-          <p:cNvSpPr txBox="1"/>
-          <p:nvPr/>
-        </p:nvSpPr>
-        <p:spPr>
-          <a:xfrm>
-            <a:off x="5440680" y="1572768"/>
-            <a:ext cx="1554480" cy="164592"/>
-          </a:xfrm>
-          <a:prstGeom prst="rect">
-            <a:avLst/>
-          </a:prstGeom>
-          <a:noFill/>
-        </p:spPr>
-        <p:txBody>
-          <a:bodyPr wrap="square" lIns="0" rIns="0" tIns="0" bIns="0">
-            <a:spAutoFit/>
-          </a:bodyPr>
-          <a:lstStyle/>
-          <a:p>
-            <a:pPr algn="l"/>
-            <a:r>
-              <a:rPr sz="700" b="0" spc="50">
-                <a:solidFill>
-                  <a:srgbClr val="333333"/>
-                </a:solidFill>
-                <a:latin typeface="Arial"/>
-                <a:ea typeface="微软雅黑"/>
-              </a:rPr>
-              <a:t>15,000</a:t>
-            </a:r>
-          </a:p>
-        </p:txBody>
-      </p:sp>
-      <p:sp>
-        <p:nvSpPr>
-          <p:cNvPr id="15" name="TextBox 14"/>
-          <p:cNvSpPr txBox="1"/>
-          <p:nvPr/>
-        </p:nvSpPr>
-        <p:spPr>
-          <a:xfrm>
-            <a:off x="502920" y="1755648"/>
-            <a:ext cx="1828800" cy="164592"/>
-          </a:xfrm>
-          <a:prstGeom prst="rect">
-            <a:avLst/>
-          </a:prstGeom>
-          <a:noFill/>
-        </p:spPr>
-        <p:txBody>
-          <a:bodyPr wrap="square" lIns="0" rIns="0" tIns="0" bIns="0">
-            <a:spAutoFit/>
-          </a:bodyPr>
-          <a:lstStyle/>
-          <a:p>
-            <a:pPr algn="l"/>
-            <a:r>
-              <a:rPr sz="700" b="1" spc="50">
-                <a:solidFill>
-                  <a:srgbClr val="333333"/>
-                </a:solidFill>
-                <a:latin typeface="Arial"/>
-                <a:ea typeface="微软雅黑"/>
-              </a:rPr>
-              <a:t>硬件收入</a:t>
-            </a:r>
-          </a:p>
-        </p:txBody>
-      </p:sp>
-      <p:sp>
-        <p:nvSpPr>
-          <p:cNvPr id="16" name="TextBox 15"/>
-          <p:cNvSpPr txBox="1"/>
-          <p:nvPr/>
-        </p:nvSpPr>
-        <p:spPr>
-          <a:xfrm>
-            <a:off x="2331720" y="1755648"/>
-            <a:ext cx="1554480" cy="164592"/>
-          </a:xfrm>
-          <a:prstGeom prst="rect">
-            <a:avLst/>
-          </a:prstGeom>
-          <a:noFill/>
-        </p:spPr>
-        <p:txBody>
-          <a:bodyPr wrap="square" lIns="0" rIns="0" tIns="0" bIns="0">
-            <a:spAutoFit/>
-          </a:bodyPr>
-          <a:lstStyle/>
-          <a:p>
-            <a:pPr algn="l"/>
-            <a:r>
-              <a:rPr sz="700" b="0" spc="50">
-                <a:solidFill>
-                  <a:srgbClr val="333333"/>
-                </a:solidFill>
-                <a:latin typeface="Arial"/>
-                <a:ea typeface="微软雅黑"/>
-              </a:rPr>
-              <a:t>59.9</a:t>
-            </a:r>
-          </a:p>
-        </p:txBody>
-      </p:sp>
-      <p:sp>
-        <p:nvSpPr>
-          <p:cNvPr id="17" name="TextBox 16"/>
-          <p:cNvSpPr txBox="1"/>
-          <p:nvPr/>
-        </p:nvSpPr>
-        <p:spPr>
-          <a:xfrm>
-            <a:off x="3886200" y="1755648"/>
-            <a:ext cx="1554480" cy="164592"/>
-          </a:xfrm>
-          <a:prstGeom prst="rect">
-            <a:avLst/>
-          </a:prstGeom>
-          <a:noFill/>
-        </p:spPr>
-        <p:txBody>
-          <a:bodyPr wrap="square" lIns="0" rIns="0" tIns="0" bIns="0">
-            <a:spAutoFit/>
-          </a:bodyPr>
-          <a:lstStyle/>
-          <a:p>
-            <a:pPr algn="l"/>
-            <a:r>
-              <a:rPr sz="700" b="0" spc="50">
-                <a:solidFill>
-                  <a:srgbClr val="333333"/>
-                </a:solidFill>
-                <a:latin typeface="Arial"/>
-                <a:ea typeface="微软雅黑"/>
-              </a:rPr>
-              <a:t>239.6</a:t>
-            </a:r>
-          </a:p>
-        </p:txBody>
-      </p:sp>
-      <p:sp>
-        <p:nvSpPr>
-          <p:cNvPr id="18" name="TextBox 17"/>
-          <p:cNvSpPr txBox="1"/>
-          <p:nvPr/>
-        </p:nvSpPr>
-        <p:spPr>
-          <a:xfrm>
-            <a:off x="5440680" y="1755648"/>
-            <a:ext cx="1554480" cy="164592"/>
-          </a:xfrm>
-          <a:prstGeom prst="rect">
-            <a:avLst/>
-          </a:prstGeom>
-          <a:noFill/>
-        </p:spPr>
-        <p:txBody>
-          <a:bodyPr wrap="square" lIns="0" rIns="0" tIns="0" bIns="0">
-            <a:spAutoFit/>
-          </a:bodyPr>
-          <a:lstStyle/>
-          <a:p>
-            <a:pPr algn="l"/>
-            <a:r>
-              <a:rPr sz="700" b="0" spc="50">
-                <a:solidFill>
-                  <a:srgbClr val="333333"/>
-                </a:solidFill>
-                <a:latin typeface="Arial"/>
-                <a:ea typeface="微软雅黑"/>
-              </a:rPr>
-              <a:t>599.0</a:t>
-            </a:r>
-          </a:p>
-        </p:txBody>
-      </p:sp>
-      <p:sp>
-        <p:nvSpPr>
-          <p:cNvPr id="19" name="TextBox 18"/>
-          <p:cNvSpPr txBox="1"/>
-          <p:nvPr/>
-        </p:nvSpPr>
-        <p:spPr>
-          <a:xfrm>
-            <a:off x="502920" y="1938528"/>
-            <a:ext cx="1828800" cy="164592"/>
-          </a:xfrm>
-          <a:prstGeom prst="rect">
-            <a:avLst/>
-          </a:prstGeom>
-          <a:noFill/>
-        </p:spPr>
-        <p:txBody>
-          <a:bodyPr wrap="square" lIns="0" rIns="0" tIns="0" bIns="0">
-            <a:spAutoFit/>
-          </a:bodyPr>
-          <a:lstStyle/>
-          <a:p>
-            <a:pPr algn="l"/>
-            <a:r>
-              <a:rPr sz="700" b="1" spc="50">
-                <a:solidFill>
-                  <a:srgbClr val="333333"/>
-                </a:solidFill>
-                <a:latin typeface="Arial"/>
-                <a:ea typeface="微软雅黑"/>
-              </a:rPr>
-              <a:t>订阅收入</a:t>
-            </a:r>
-          </a:p>
-        </p:txBody>
-      </p:sp>
-      <p:sp>
-        <p:nvSpPr>
-          <p:cNvPr id="20" name="TextBox 19"/>
-          <p:cNvSpPr txBox="1"/>
-          <p:nvPr/>
-        </p:nvSpPr>
-        <p:spPr>
-          <a:xfrm>
-            <a:off x="2331720" y="1938528"/>
-            <a:ext cx="1554480" cy="164592"/>
-          </a:xfrm>
-          <a:prstGeom prst="rect">
-            <a:avLst/>
-          </a:prstGeom>
-          <a:noFill/>
-        </p:spPr>
-        <p:txBody>
-          <a:bodyPr wrap="square" lIns="0" rIns="0" tIns="0" bIns="0">
-            <a:spAutoFit/>
-          </a:bodyPr>
-          <a:lstStyle/>
-          <a:p>
-            <a:pPr algn="l"/>
-            <a:r>
-              <a:rPr sz="700" b="0" spc="50">
-                <a:solidFill>
-                  <a:srgbClr val="333333"/>
-                </a:solidFill>
-                <a:latin typeface="Arial"/>
-                <a:ea typeface="微软雅黑"/>
-              </a:rPr>
-              <a:t>3.0</a:t>
-            </a:r>
-          </a:p>
-        </p:txBody>
-      </p:sp>
-      <p:sp>
-        <p:nvSpPr>
-          <p:cNvPr id="21" name="TextBox 20"/>
-          <p:cNvSpPr txBox="1"/>
-          <p:nvPr/>
-        </p:nvSpPr>
-        <p:spPr>
-          <a:xfrm>
-            <a:off x="3886200" y="1938528"/>
-            <a:ext cx="1554480" cy="164592"/>
-          </a:xfrm>
-          <a:prstGeom prst="rect">
-            <a:avLst/>
-          </a:prstGeom>
-          <a:noFill/>
-        </p:spPr>
-        <p:txBody>
-          <a:bodyPr wrap="square" lIns="0" rIns="0" tIns="0" bIns="0">
-            <a:spAutoFit/>
-          </a:bodyPr>
-          <a:lstStyle/>
-          <a:p>
-            <a:pPr algn="l"/>
-            <a:r>
-              <a:rPr sz="700" b="0" spc="50">
-                <a:solidFill>
-                  <a:srgbClr val="333333"/>
-                </a:solidFill>
-                <a:latin typeface="Arial"/>
-                <a:ea typeface="微软雅黑"/>
-              </a:rPr>
-              <a:t>13.7</a:t>
-            </a:r>
-          </a:p>
-        </p:txBody>
-      </p:sp>
-      <p:sp>
-        <p:nvSpPr>
-          <p:cNvPr id="22" name="TextBox 21"/>
-          <p:cNvSpPr txBox="1"/>
-          <p:nvPr/>
-        </p:nvSpPr>
-        <p:spPr>
-          <a:xfrm>
-            <a:off x="5440680" y="1938528"/>
-            <a:ext cx="1554480" cy="164592"/>
-          </a:xfrm>
-          <a:prstGeom prst="rect">
-            <a:avLst/>
-          </a:prstGeom>
-          <a:noFill/>
-        </p:spPr>
-        <p:txBody>
-          <a:bodyPr wrap="square" lIns="0" rIns="0" tIns="0" bIns="0">
-            <a:spAutoFit/>
-          </a:bodyPr>
-          <a:lstStyle/>
-          <a:p>
-            <a:pPr algn="l"/>
-            <a:r>
-              <a:rPr sz="700" b="0" spc="50">
-                <a:solidFill>
-                  <a:srgbClr val="333333"/>
-                </a:solidFill>
-                <a:latin typeface="Arial"/>
-                <a:ea typeface="微软雅黑"/>
-              </a:rPr>
-              <a:t>38.1</a:t>
-            </a:r>
-          </a:p>
-        </p:txBody>
-      </p:sp>
-      <p:sp>
-        <p:nvSpPr>
-          <p:cNvPr id="23" name="TextBox 22"/>
-          <p:cNvSpPr txBox="1"/>
-          <p:nvPr/>
-        </p:nvSpPr>
-        <p:spPr>
-          <a:xfrm>
-            <a:off x="502920" y="2121408"/>
-            <a:ext cx="1828800" cy="164592"/>
-          </a:xfrm>
-          <a:prstGeom prst="rect">
-            <a:avLst/>
-          </a:prstGeom>
-          <a:noFill/>
-        </p:spPr>
-        <p:txBody>
-          <a:bodyPr wrap="square" lIns="0" rIns="0" tIns="0" bIns="0">
-            <a:spAutoFit/>
-          </a:bodyPr>
-          <a:lstStyle/>
-          <a:p>
-            <a:pPr algn="l"/>
-            <a:r>
-              <a:rPr sz="700" b="1" spc="50">
-                <a:solidFill>
-                  <a:srgbClr val="333333"/>
-                </a:solidFill>
-                <a:latin typeface="Arial"/>
-                <a:ea typeface="微软雅黑"/>
-              </a:rPr>
-              <a:t>总收入</a:t>
-            </a:r>
-          </a:p>
-        </p:txBody>
-      </p:sp>
-      <p:sp>
-        <p:nvSpPr>
-          <p:cNvPr id="24" name="TextBox 23"/>
-          <p:cNvSpPr txBox="1"/>
-          <p:nvPr/>
-        </p:nvSpPr>
-        <p:spPr>
-          <a:xfrm>
-            <a:off x="2331720" y="2121408"/>
-            <a:ext cx="1554480" cy="164592"/>
-          </a:xfrm>
-          <a:prstGeom prst="rect">
-            <a:avLst/>
-          </a:prstGeom>
-          <a:noFill/>
-        </p:spPr>
-        <p:txBody>
-          <a:bodyPr wrap="square" lIns="0" rIns="0" tIns="0" bIns="0">
-            <a:spAutoFit/>
-          </a:bodyPr>
-          <a:lstStyle/>
-          <a:p>
-            <a:pPr algn="l"/>
-            <a:r>
-              <a:rPr sz="700" b="0" spc="50">
-                <a:solidFill>
-                  <a:srgbClr val="333333"/>
-                </a:solidFill>
-                <a:latin typeface="Arial"/>
-                <a:ea typeface="微软雅黑"/>
-              </a:rPr>
-              <a:t>62.9</a:t>
-            </a:r>
-          </a:p>
-        </p:txBody>
-      </p:sp>
-      <p:sp>
-        <p:nvSpPr>
-          <p:cNvPr id="25" name="TextBox 24"/>
-          <p:cNvSpPr txBox="1"/>
-          <p:nvPr/>
-        </p:nvSpPr>
-        <p:spPr>
-          <a:xfrm>
-            <a:off x="3886200" y="2121408"/>
-            <a:ext cx="1554480" cy="164592"/>
-          </a:xfrm>
-          <a:prstGeom prst="rect">
-            <a:avLst/>
-          </a:prstGeom>
-          <a:noFill/>
-        </p:spPr>
-        <p:txBody>
-          <a:bodyPr wrap="square" lIns="0" rIns="0" tIns="0" bIns="0">
-            <a:spAutoFit/>
-          </a:bodyPr>
-          <a:lstStyle/>
-          <a:p>
-            <a:pPr algn="l"/>
-            <a:r>
-              <a:rPr sz="700" b="0" spc="50">
-                <a:solidFill>
-                  <a:srgbClr val="333333"/>
-                </a:solidFill>
-                <a:latin typeface="Arial"/>
-                <a:ea typeface="微软雅黑"/>
-              </a:rPr>
-              <a:t>253.3</a:t>
-            </a:r>
-          </a:p>
-        </p:txBody>
-      </p:sp>
-      <p:sp>
-        <p:nvSpPr>
-          <p:cNvPr id="26" name="TextBox 25"/>
-          <p:cNvSpPr txBox="1"/>
-          <p:nvPr/>
-        </p:nvSpPr>
-        <p:spPr>
-          <a:xfrm>
-            <a:off x="5440680" y="2121408"/>
-            <a:ext cx="1554480" cy="164592"/>
-          </a:xfrm>
-          <a:prstGeom prst="rect">
-            <a:avLst/>
-          </a:prstGeom>
-          <a:noFill/>
-        </p:spPr>
-        <p:txBody>
-          <a:bodyPr wrap="square" lIns="0" rIns="0" tIns="0" bIns="0">
-            <a:spAutoFit/>
-          </a:bodyPr>
-          <a:lstStyle/>
-          <a:p>
-            <a:pPr algn="l"/>
-            <a:r>
-              <a:rPr sz="700" b="0" spc="50">
-                <a:solidFill>
-                  <a:srgbClr val="333333"/>
-                </a:solidFill>
-                <a:latin typeface="Arial"/>
-                <a:ea typeface="微软雅黑"/>
-              </a:rPr>
-              <a:t>637.1</a:t>
-            </a:r>
-          </a:p>
-        </p:txBody>
-      </p:sp>
-      <p:sp>
-        <p:nvSpPr>
-          <p:cNvPr id="27" name="TextBox 26"/>
-          <p:cNvSpPr txBox="1"/>
-          <p:nvPr/>
-        </p:nvSpPr>
-        <p:spPr>
-          <a:xfrm>
-            <a:off x="502920" y="2304288"/>
-            <a:ext cx="1828800" cy="164592"/>
-          </a:xfrm>
-          <a:prstGeom prst="rect">
-            <a:avLst/>
-          </a:prstGeom>
-          <a:noFill/>
-        </p:spPr>
-        <p:txBody>
-          <a:bodyPr wrap="square" lIns="0" rIns="0" tIns="0" bIns="0">
-            <a:spAutoFit/>
-          </a:bodyPr>
-          <a:lstStyle/>
-          <a:p>
-            <a:pPr algn="l"/>
-            <a:r>
-              <a:rPr sz="700" b="1" spc="50">
-                <a:solidFill>
-                  <a:srgbClr val="333333"/>
-                </a:solidFill>
-                <a:latin typeface="Arial"/>
-                <a:ea typeface="微软雅黑"/>
-              </a:rPr>
-              <a:t>硬件 BOM</a:t>
-            </a:r>
-          </a:p>
-        </p:txBody>
-      </p:sp>
-      <p:sp>
-        <p:nvSpPr>
-          <p:cNvPr id="28" name="TextBox 27"/>
-          <p:cNvSpPr txBox="1"/>
-          <p:nvPr/>
-        </p:nvSpPr>
-        <p:spPr>
-          <a:xfrm>
-            <a:off x="2331720" y="2304288"/>
-            <a:ext cx="1554480" cy="164592"/>
-          </a:xfrm>
-          <a:prstGeom prst="rect">
-            <a:avLst/>
-          </a:prstGeom>
-          <a:noFill/>
-        </p:spPr>
-        <p:txBody>
-          <a:bodyPr wrap="square" lIns="0" rIns="0" tIns="0" bIns="0">
-            <a:spAutoFit/>
-          </a:bodyPr>
-          <a:lstStyle/>
-          <a:p>
-            <a:pPr algn="l"/>
-            <a:r>
-              <a:rPr sz="700" b="0" spc="50">
-                <a:solidFill>
-                  <a:srgbClr val="333333"/>
-                </a:solidFill>
-                <a:latin typeface="Arial"/>
-                <a:ea typeface="微软雅黑"/>
-              </a:rPr>
-              <a:t>42.5</a:t>
-            </a:r>
-          </a:p>
-        </p:txBody>
-      </p:sp>
-      <p:sp>
-        <p:nvSpPr>
-          <p:cNvPr id="29" name="TextBox 28"/>
-          <p:cNvSpPr txBox="1"/>
-          <p:nvPr/>
-        </p:nvSpPr>
-        <p:spPr>
-          <a:xfrm>
-            <a:off x="3886200" y="2304288"/>
-            <a:ext cx="1554480" cy="164592"/>
-          </a:xfrm>
-          <a:prstGeom prst="rect">
-            <a:avLst/>
-          </a:prstGeom>
-          <a:noFill/>
-        </p:spPr>
-        <p:txBody>
-          <a:bodyPr wrap="square" lIns="0" rIns="0" tIns="0" bIns="0">
-            <a:spAutoFit/>
-          </a:bodyPr>
-          <a:lstStyle/>
-          <a:p>
-            <a:pPr algn="l"/>
-            <a:r>
-              <a:rPr sz="700" b="0" spc="50">
-                <a:solidFill>
-                  <a:srgbClr val="333333"/>
-                </a:solidFill>
-                <a:latin typeface="Arial"/>
-                <a:ea typeface="微软雅黑"/>
-              </a:rPr>
-              <a:t>170.0</a:t>
-            </a:r>
-          </a:p>
-        </p:txBody>
-      </p:sp>
-      <p:sp>
-        <p:nvSpPr>
-          <p:cNvPr id="30" name="TextBox 29"/>
-          <p:cNvSpPr txBox="1"/>
-          <p:nvPr/>
-        </p:nvSpPr>
-        <p:spPr>
-          <a:xfrm>
-            <a:off x="5440680" y="2304288"/>
-            <a:ext cx="1554480" cy="164592"/>
-          </a:xfrm>
-          <a:prstGeom prst="rect">
-            <a:avLst/>
-          </a:prstGeom>
-          <a:noFill/>
-        </p:spPr>
-        <p:txBody>
-          <a:bodyPr wrap="square" lIns="0" rIns="0" tIns="0" bIns="0">
-            <a:spAutoFit/>
-          </a:bodyPr>
-          <a:lstStyle/>
-          <a:p>
-            <a:pPr algn="l"/>
-            <a:r>
-              <a:rPr sz="700" b="0" spc="50">
-                <a:solidFill>
-                  <a:srgbClr val="333333"/>
-                </a:solidFill>
-                <a:latin typeface="Arial"/>
-                <a:ea typeface="微软雅黑"/>
-              </a:rPr>
-              <a:t>425.0</a:t>
-            </a:r>
-          </a:p>
-        </p:txBody>
-      </p:sp>
-      <p:sp>
-        <p:nvSpPr>
-          <p:cNvPr id="31" name="TextBox 30"/>
-          <p:cNvSpPr txBox="1"/>
-          <p:nvPr/>
-        </p:nvSpPr>
-        <p:spPr>
-          <a:xfrm>
-            <a:off x="502920" y="2487168"/>
-            <a:ext cx="1828800" cy="164592"/>
-          </a:xfrm>
-          <a:prstGeom prst="rect">
-            <a:avLst/>
-          </a:prstGeom>
-          <a:noFill/>
-        </p:spPr>
-        <p:txBody>
-          <a:bodyPr wrap="square" lIns="0" rIns="0" tIns="0" bIns="0">
-            <a:spAutoFit/>
-          </a:bodyPr>
-          <a:lstStyle/>
-          <a:p>
-            <a:pPr algn="l"/>
-            <a:r>
-              <a:rPr sz="700" b="1" spc="50">
-                <a:solidFill>
-                  <a:srgbClr val="333333"/>
-                </a:solidFill>
-                <a:latin typeface="Arial"/>
-                <a:ea typeface="微软雅黑"/>
-              </a:rPr>
-              <a:t>云服务</a:t>
-            </a:r>
-          </a:p>
-        </p:txBody>
-      </p:sp>
-      <p:sp>
-        <p:nvSpPr>
-          <p:cNvPr id="32" name="TextBox 31"/>
-          <p:cNvSpPr txBox="1"/>
-          <p:nvPr/>
-        </p:nvSpPr>
-        <p:spPr>
-          <a:xfrm>
-            <a:off x="2331720" y="2487168"/>
-            <a:ext cx="1554480" cy="164592"/>
-          </a:xfrm>
-          <a:prstGeom prst="rect">
-            <a:avLst/>
-          </a:prstGeom>
-          <a:noFill/>
-        </p:spPr>
-        <p:txBody>
-          <a:bodyPr wrap="square" lIns="0" rIns="0" tIns="0" bIns="0">
-            <a:spAutoFit/>
-          </a:bodyPr>
-          <a:lstStyle/>
-          <a:p>
-            <a:pPr algn="l"/>
-            <a:r>
-              <a:rPr sz="700" b="0" spc="50">
-                <a:solidFill>
-                  <a:srgbClr val="333333"/>
-                </a:solidFill>
-                <a:latin typeface="Arial"/>
-                <a:ea typeface="微软雅黑"/>
-              </a:rPr>
-              <a:t>1.4</a:t>
-            </a:r>
-          </a:p>
-        </p:txBody>
-      </p:sp>
-      <p:sp>
-        <p:nvSpPr>
-          <p:cNvPr id="33" name="TextBox 32"/>
-          <p:cNvSpPr txBox="1"/>
-          <p:nvPr/>
-        </p:nvSpPr>
-        <p:spPr>
-          <a:xfrm>
-            <a:off x="3886200" y="2487168"/>
-            <a:ext cx="1554480" cy="164592"/>
-          </a:xfrm>
-          <a:prstGeom prst="rect">
-            <a:avLst/>
-          </a:prstGeom>
-          <a:noFill/>
-        </p:spPr>
-        <p:txBody>
-          <a:bodyPr wrap="square" lIns="0" rIns="0" tIns="0" bIns="0">
-            <a:spAutoFit/>
-          </a:bodyPr>
-          <a:lstStyle/>
-          <a:p>
-            <a:pPr algn="l"/>
-            <a:r>
-              <a:rPr sz="700" b="0" spc="50">
-                <a:solidFill>
-                  <a:srgbClr val="333333"/>
-                </a:solidFill>
-                <a:latin typeface="Arial"/>
-                <a:ea typeface="微软雅黑"/>
-              </a:rPr>
-              <a:t>6.6</a:t>
-            </a:r>
-          </a:p>
-        </p:txBody>
-      </p:sp>
-      <p:sp>
-        <p:nvSpPr>
-          <p:cNvPr id="34" name="TextBox 33"/>
-          <p:cNvSpPr txBox="1"/>
-          <p:nvPr/>
-        </p:nvSpPr>
-        <p:spPr>
-          <a:xfrm>
-            <a:off x="5440680" y="2487168"/>
-            <a:ext cx="1554480" cy="164592"/>
-          </a:xfrm>
-          <a:prstGeom prst="rect">
-            <a:avLst/>
-          </a:prstGeom>
-          <a:noFill/>
-        </p:spPr>
-        <p:txBody>
-          <a:bodyPr wrap="square" lIns="0" rIns="0" tIns="0" bIns="0">
-            <a:spAutoFit/>
-          </a:bodyPr>
-          <a:lstStyle/>
-          <a:p>
-            <a:pPr algn="l"/>
-            <a:r>
-              <a:rPr sz="700" b="0" spc="50">
-                <a:solidFill>
-                  <a:srgbClr val="333333"/>
-                </a:solidFill>
-                <a:latin typeface="Arial"/>
-                <a:ea typeface="微软雅黑"/>
-              </a:rPr>
-              <a:t>19.6</a:t>
-            </a:r>
-          </a:p>
-        </p:txBody>
-      </p:sp>
-      <p:sp>
-        <p:nvSpPr>
-          <p:cNvPr id="35" name="TextBox 34"/>
-          <p:cNvSpPr txBox="1"/>
-          <p:nvPr/>
-        </p:nvSpPr>
-        <p:spPr>
-          <a:xfrm>
-            <a:off x="502920" y="2670048"/>
-            <a:ext cx="1828800" cy="164592"/>
-          </a:xfrm>
-          <a:prstGeom prst="rect">
-            <a:avLst/>
-          </a:prstGeom>
-          <a:noFill/>
-        </p:spPr>
-        <p:txBody>
-          <a:bodyPr wrap="square" lIns="0" rIns="0" tIns="0" bIns="0">
-            <a:spAutoFit/>
-          </a:bodyPr>
-          <a:lstStyle/>
-          <a:p>
-            <a:pPr algn="l"/>
-            <a:r>
-              <a:rPr sz="700" b="1" spc="50">
-                <a:solidFill>
-                  <a:srgbClr val="333333"/>
-                </a:solidFill>
-                <a:latin typeface="Arial"/>
-                <a:ea typeface="微软雅黑"/>
-              </a:rPr>
-              <a:t>获客成本</a:t>
-            </a:r>
-          </a:p>
-        </p:txBody>
-      </p:sp>
-      <p:sp>
-        <p:nvSpPr>
-          <p:cNvPr id="36" name="TextBox 35"/>
-          <p:cNvSpPr txBox="1"/>
-          <p:nvPr/>
-        </p:nvSpPr>
-        <p:spPr>
-          <a:xfrm>
-            <a:off x="2331720" y="2670048"/>
-            <a:ext cx="1554480" cy="164592"/>
-          </a:xfrm>
-          <a:prstGeom prst="rect">
-            <a:avLst/>
-          </a:prstGeom>
-          <a:noFill/>
-        </p:spPr>
-        <p:txBody>
-          <a:bodyPr wrap="square" lIns="0" rIns="0" tIns="0" bIns="0">
-            <a:spAutoFit/>
-          </a:bodyPr>
-          <a:lstStyle/>
-          <a:p>
-            <a:pPr algn="l"/>
-            <a:r>
-              <a:rPr sz="700" b="0" spc="50">
-                <a:solidFill>
-                  <a:srgbClr val="333333"/>
-                </a:solidFill>
-                <a:latin typeface="Arial"/>
-                <a:ea typeface="微软雅黑"/>
-              </a:rPr>
-              <a:t>0.3</a:t>
-            </a:r>
-          </a:p>
-        </p:txBody>
-      </p:sp>
-      <p:sp>
-        <p:nvSpPr>
-          <p:cNvPr id="37" name="TextBox 36"/>
-          <p:cNvSpPr txBox="1"/>
-          <p:nvPr/>
-        </p:nvSpPr>
-        <p:spPr>
-          <a:xfrm>
-            <a:off x="3886200" y="2670048"/>
-            <a:ext cx="1554480" cy="164592"/>
-          </a:xfrm>
-          <a:prstGeom prst="rect">
-            <a:avLst/>
-          </a:prstGeom>
-          <a:noFill/>
-        </p:spPr>
-        <p:txBody>
-          <a:bodyPr wrap="square" lIns="0" rIns="0" tIns="0" bIns="0">
-            <a:spAutoFit/>
-          </a:bodyPr>
-          <a:lstStyle/>
-          <a:p>
-            <a:pPr algn="l"/>
-            <a:r>
-              <a:rPr sz="700" b="0" spc="50">
-                <a:solidFill>
-                  <a:srgbClr val="333333"/>
-                </a:solidFill>
-                <a:latin typeface="Arial"/>
-                <a:ea typeface="微软雅黑"/>
-              </a:rPr>
-              <a:t>1.2</a:t>
-            </a:r>
-          </a:p>
-        </p:txBody>
-      </p:sp>
-      <p:sp>
-        <p:nvSpPr>
-          <p:cNvPr id="38" name="TextBox 37"/>
-          <p:cNvSpPr txBox="1"/>
-          <p:nvPr/>
-        </p:nvSpPr>
-        <p:spPr>
-          <a:xfrm>
-            <a:off x="5440680" y="2670048"/>
-            <a:ext cx="1554480" cy="164592"/>
-          </a:xfrm>
-          <a:prstGeom prst="rect">
-            <a:avLst/>
-          </a:prstGeom>
-          <a:noFill/>
-        </p:spPr>
-        <p:txBody>
-          <a:bodyPr wrap="square" lIns="0" rIns="0" tIns="0" bIns="0">
-            <a:spAutoFit/>
-          </a:bodyPr>
-          <a:lstStyle/>
-          <a:p>
-            <a:pPr algn="l"/>
-            <a:r>
-              <a:rPr sz="700" b="0" spc="50">
-                <a:solidFill>
-                  <a:srgbClr val="333333"/>
-                </a:solidFill>
-                <a:latin typeface="Arial"/>
-                <a:ea typeface="微软雅黑"/>
-              </a:rPr>
-              <a:t>3.0</a:t>
-            </a:r>
-          </a:p>
-        </p:txBody>
-      </p:sp>
-      <p:sp>
-        <p:nvSpPr>
-          <p:cNvPr id="39" name="TextBox 38"/>
-          <p:cNvSpPr txBox="1"/>
-          <p:nvPr/>
-        </p:nvSpPr>
-        <p:spPr>
-          <a:xfrm>
-            <a:off x="502920" y="2852928"/>
-            <a:ext cx="1828800" cy="164592"/>
-          </a:xfrm>
-          <a:prstGeom prst="rect">
-            <a:avLst/>
-          </a:prstGeom>
-          <a:noFill/>
-        </p:spPr>
-        <p:txBody>
-          <a:bodyPr wrap="square" lIns="0" rIns="0" tIns="0" bIns="0">
-            <a:spAutoFit/>
-          </a:bodyPr>
-          <a:lstStyle/>
-          <a:p>
-            <a:pPr algn="l"/>
-            <a:r>
-              <a:rPr sz="700" b="1" spc="50">
-                <a:solidFill>
-                  <a:srgbClr val="333333"/>
-                </a:solidFill>
-                <a:latin typeface="Arial"/>
-                <a:ea typeface="微软雅黑"/>
-              </a:rPr>
-              <a:t>人力（5/8/12人）</a:t>
-            </a:r>
-          </a:p>
-        </p:txBody>
-      </p:sp>
-      <p:sp>
-        <p:nvSpPr>
-          <p:cNvPr id="40" name="TextBox 39"/>
-          <p:cNvSpPr txBox="1"/>
-          <p:nvPr/>
-        </p:nvSpPr>
-        <p:spPr>
-          <a:xfrm>
-            <a:off x="2331720" y="2852928"/>
-            <a:ext cx="1554480" cy="164592"/>
-          </a:xfrm>
-          <a:prstGeom prst="rect">
-            <a:avLst/>
-          </a:prstGeom>
-          <a:noFill/>
-        </p:spPr>
-        <p:txBody>
-          <a:bodyPr wrap="square" lIns="0" rIns="0" tIns="0" bIns="0">
-            <a:spAutoFit/>
-          </a:bodyPr>
-          <a:lstStyle/>
-          <a:p>
-            <a:pPr algn="l"/>
-            <a:r>
-              <a:rPr sz="700" b="0" spc="50">
-                <a:solidFill>
-                  <a:srgbClr val="333333"/>
-                </a:solidFill>
-                <a:latin typeface="Arial"/>
-                <a:ea typeface="微软雅黑"/>
-              </a:rPr>
-              <a:t>175</a:t>
-            </a:r>
-          </a:p>
-        </p:txBody>
-      </p:sp>
-      <p:sp>
-        <p:nvSpPr>
-          <p:cNvPr id="41" name="TextBox 40"/>
-          <p:cNvSpPr txBox="1"/>
-          <p:nvPr/>
-        </p:nvSpPr>
-        <p:spPr>
-          <a:xfrm>
-            <a:off x="3886200" y="2852928"/>
-            <a:ext cx="1554480" cy="164592"/>
-          </a:xfrm>
-          <a:prstGeom prst="rect">
-            <a:avLst/>
-          </a:prstGeom>
-          <a:noFill/>
-        </p:spPr>
-        <p:txBody>
-          <a:bodyPr wrap="square" lIns="0" rIns="0" tIns="0" bIns="0">
-            <a:spAutoFit/>
-          </a:bodyPr>
-          <a:lstStyle/>
-          <a:p>
-            <a:pPr algn="l"/>
-            <a:r>
-              <a:rPr sz="700" b="0" spc="50">
-                <a:solidFill>
-                  <a:srgbClr val="333333"/>
-                </a:solidFill>
-                <a:latin typeface="Arial"/>
-                <a:ea typeface="微软雅黑"/>
-              </a:rPr>
-              <a:t>280</a:t>
-            </a:r>
-          </a:p>
-        </p:txBody>
-      </p:sp>
-      <p:sp>
-        <p:nvSpPr>
-          <p:cNvPr id="42" name="TextBox 41"/>
-          <p:cNvSpPr txBox="1"/>
-          <p:nvPr/>
-        </p:nvSpPr>
-        <p:spPr>
-          <a:xfrm>
-            <a:off x="5440680" y="2852928"/>
-            <a:ext cx="1554480" cy="164592"/>
-          </a:xfrm>
-          <a:prstGeom prst="rect">
-            <a:avLst/>
-          </a:prstGeom>
-          <a:noFill/>
-        </p:spPr>
-        <p:txBody>
-          <a:bodyPr wrap="square" lIns="0" rIns="0" tIns="0" bIns="0">
-            <a:spAutoFit/>
-          </a:bodyPr>
-          <a:lstStyle/>
-          <a:p>
-            <a:pPr algn="l"/>
-            <a:r>
-              <a:rPr sz="700" b="0" spc="50">
-                <a:solidFill>
-                  <a:srgbClr val="333333"/>
-                </a:solidFill>
-                <a:latin typeface="Arial"/>
-                <a:ea typeface="微软雅黑"/>
-              </a:rPr>
-              <a:t>420</a:t>
-            </a:r>
-          </a:p>
-        </p:txBody>
-      </p:sp>
-      <p:sp>
-        <p:nvSpPr>
-          <p:cNvPr id="43" name="TextBox 42"/>
-          <p:cNvSpPr txBox="1"/>
-          <p:nvPr/>
-        </p:nvSpPr>
-        <p:spPr>
-          <a:xfrm>
-            <a:off x="502920" y="3035808"/>
-            <a:ext cx="1828800" cy="164592"/>
-          </a:xfrm>
-          <a:prstGeom prst="rect">
-            <a:avLst/>
-          </a:prstGeom>
-          <a:noFill/>
-        </p:spPr>
-        <p:txBody>
-          <a:bodyPr wrap="square" lIns="0" rIns="0" tIns="0" bIns="0">
-            <a:spAutoFit/>
-          </a:bodyPr>
-          <a:lstStyle/>
-          <a:p>
-            <a:pPr algn="l"/>
-            <a:r>
-              <a:rPr sz="700" b="1" spc="50">
-                <a:solidFill>
-                  <a:srgbClr val="333333"/>
-                </a:solidFill>
-                <a:latin typeface="Arial"/>
-                <a:ea typeface="微软雅黑"/>
-              </a:rPr>
-              <a:t>行政</a:t>
-            </a:r>
-          </a:p>
-        </p:txBody>
-      </p:sp>
-      <p:sp>
-        <p:nvSpPr>
-          <p:cNvPr id="44" name="TextBox 43"/>
-          <p:cNvSpPr txBox="1"/>
-          <p:nvPr/>
-        </p:nvSpPr>
-        <p:spPr>
-          <a:xfrm>
-            <a:off x="2331720" y="3035808"/>
-            <a:ext cx="1554480" cy="164592"/>
-          </a:xfrm>
-          <a:prstGeom prst="rect">
-            <a:avLst/>
-          </a:prstGeom>
-          <a:noFill/>
-        </p:spPr>
-        <p:txBody>
-          <a:bodyPr wrap="square" lIns="0" rIns="0" tIns="0" bIns="0">
-            <a:spAutoFit/>
-          </a:bodyPr>
-          <a:lstStyle/>
-          <a:p>
-            <a:pPr algn="l"/>
-            <a:r>
-              <a:rPr sz="700" b="0" spc="50">
-                <a:solidFill>
-                  <a:srgbClr val="333333"/>
-                </a:solidFill>
-                <a:latin typeface="Arial"/>
-                <a:ea typeface="微软雅黑"/>
-              </a:rPr>
-              <a:t>15</a:t>
-            </a:r>
-          </a:p>
-        </p:txBody>
-      </p:sp>
-      <p:sp>
-        <p:nvSpPr>
-          <p:cNvPr id="45" name="TextBox 44"/>
-          <p:cNvSpPr txBox="1"/>
-          <p:nvPr/>
-        </p:nvSpPr>
-        <p:spPr>
-          <a:xfrm>
-            <a:off x="3886200" y="3035808"/>
-            <a:ext cx="1554480" cy="164592"/>
-          </a:xfrm>
-          <a:prstGeom prst="rect">
-            <a:avLst/>
-          </a:prstGeom>
-          <a:noFill/>
-        </p:spPr>
-        <p:txBody>
-          <a:bodyPr wrap="square" lIns="0" rIns="0" tIns="0" bIns="0">
-            <a:spAutoFit/>
-          </a:bodyPr>
-          <a:lstStyle/>
-          <a:p>
-            <a:pPr algn="l"/>
-            <a:r>
-              <a:rPr sz="700" b="0" spc="50">
-                <a:solidFill>
-                  <a:srgbClr val="333333"/>
-                </a:solidFill>
-                <a:latin typeface="Arial"/>
-                <a:ea typeface="微软雅黑"/>
-              </a:rPr>
-              <a:t>20</a:t>
-            </a:r>
-          </a:p>
-        </p:txBody>
-      </p:sp>
-      <p:sp>
-        <p:nvSpPr>
-          <p:cNvPr id="46" name="TextBox 45"/>
-          <p:cNvSpPr txBox="1"/>
-          <p:nvPr/>
-        </p:nvSpPr>
-        <p:spPr>
-          <a:xfrm>
-            <a:off x="5440680" y="3035808"/>
-            <a:ext cx="1554480" cy="164592"/>
-          </a:xfrm>
-          <a:prstGeom prst="rect">
-            <a:avLst/>
-          </a:prstGeom>
-          <a:noFill/>
-        </p:spPr>
-        <p:txBody>
-          <a:bodyPr wrap="square" lIns="0" rIns="0" tIns="0" bIns="0">
-            <a:spAutoFit/>
-          </a:bodyPr>
-          <a:lstStyle/>
-          <a:p>
-            <a:pPr algn="l"/>
-            <a:r>
-              <a:rPr sz="700" b="0" spc="50">
-                <a:solidFill>
-                  <a:srgbClr val="333333"/>
-                </a:solidFill>
-                <a:latin typeface="Arial"/>
-                <a:ea typeface="微软雅黑"/>
-              </a:rPr>
-              <a:t>30</a:t>
-            </a:r>
-          </a:p>
-        </p:txBody>
-      </p:sp>
-      <p:sp>
-        <p:nvSpPr>
-          <p:cNvPr id="47" name="TextBox 46"/>
-          <p:cNvSpPr txBox="1"/>
-          <p:nvPr/>
-        </p:nvSpPr>
-        <p:spPr>
-          <a:xfrm>
-            <a:off x="502920" y="3218688"/>
-            <a:ext cx="1828800" cy="164592"/>
-          </a:xfrm>
-          <a:prstGeom prst="rect">
-            <a:avLst/>
-          </a:prstGeom>
-          <a:noFill/>
-        </p:spPr>
-        <p:txBody>
-          <a:bodyPr wrap="square" lIns="0" rIns="0" tIns="0" bIns="0">
-            <a:spAutoFit/>
-          </a:bodyPr>
-          <a:lstStyle/>
-          <a:p>
-            <a:pPr algn="l"/>
-            <a:r>
-              <a:rPr sz="700" b="1" spc="50">
-                <a:solidFill>
-                  <a:srgbClr val="333333"/>
-                </a:solidFill>
-                <a:latin typeface="Arial"/>
-                <a:ea typeface="微软雅黑"/>
-              </a:rPr>
-              <a:t>总费用</a:t>
-            </a:r>
-          </a:p>
-        </p:txBody>
-      </p:sp>
-      <p:sp>
-        <p:nvSpPr>
-          <p:cNvPr id="48" name="TextBox 47"/>
-          <p:cNvSpPr txBox="1"/>
-          <p:nvPr/>
-        </p:nvSpPr>
-        <p:spPr>
-          <a:xfrm>
-            <a:off x="2331720" y="3218688"/>
-            <a:ext cx="1554480" cy="164592"/>
-          </a:xfrm>
-          <a:prstGeom prst="rect">
-            <a:avLst/>
-          </a:prstGeom>
-          <a:noFill/>
-        </p:spPr>
-        <p:txBody>
-          <a:bodyPr wrap="square" lIns="0" rIns="0" tIns="0" bIns="0">
-            <a:spAutoFit/>
-          </a:bodyPr>
-          <a:lstStyle/>
-          <a:p>
-            <a:pPr algn="l"/>
-            <a:r>
-              <a:rPr sz="700" b="0" spc="50">
-                <a:solidFill>
-                  <a:srgbClr val="333333"/>
-                </a:solidFill>
-                <a:latin typeface="Arial"/>
-                <a:ea typeface="微软雅黑"/>
-              </a:rPr>
-              <a:t>234.2</a:t>
-            </a:r>
-          </a:p>
-        </p:txBody>
-      </p:sp>
-      <p:sp>
-        <p:nvSpPr>
-          <p:cNvPr id="49" name="TextBox 48"/>
-          <p:cNvSpPr txBox="1"/>
-          <p:nvPr/>
-        </p:nvSpPr>
-        <p:spPr>
-          <a:xfrm>
-            <a:off x="3886200" y="3218688"/>
-            <a:ext cx="1554480" cy="164592"/>
-          </a:xfrm>
-          <a:prstGeom prst="rect">
-            <a:avLst/>
-          </a:prstGeom>
-          <a:noFill/>
-        </p:spPr>
-        <p:txBody>
-          <a:bodyPr wrap="square" lIns="0" rIns="0" tIns="0" bIns="0">
-            <a:spAutoFit/>
-          </a:bodyPr>
-          <a:lstStyle/>
-          <a:p>
-            <a:pPr algn="l"/>
-            <a:r>
-              <a:rPr sz="700" b="0" spc="50">
-                <a:solidFill>
-                  <a:srgbClr val="333333"/>
-                </a:solidFill>
-                <a:latin typeface="Arial"/>
-                <a:ea typeface="微软雅黑"/>
-              </a:rPr>
-              <a:t>477.8</a:t>
-            </a:r>
-          </a:p>
-        </p:txBody>
-      </p:sp>
-      <p:sp>
-        <p:nvSpPr>
-          <p:cNvPr id="50" name="TextBox 49"/>
-          <p:cNvSpPr txBox="1"/>
-          <p:nvPr/>
-        </p:nvSpPr>
-        <p:spPr>
-          <a:xfrm>
-            <a:off x="5440680" y="3218688"/>
-            <a:ext cx="1554480" cy="164592"/>
-          </a:xfrm>
-          <a:prstGeom prst="rect">
-            <a:avLst/>
-          </a:prstGeom>
-          <a:noFill/>
-        </p:spPr>
-        <p:txBody>
-          <a:bodyPr wrap="square" lIns="0" rIns="0" tIns="0" bIns="0">
-            <a:spAutoFit/>
-          </a:bodyPr>
-          <a:lstStyle/>
-          <a:p>
-            <a:pPr algn="l"/>
-            <a:r>
-              <a:rPr sz="700" b="0" spc="50">
-                <a:solidFill>
-                  <a:srgbClr val="333333"/>
-                </a:solidFill>
-                <a:latin typeface="Arial"/>
-                <a:ea typeface="微软雅黑"/>
-              </a:rPr>
-              <a:t>897.6</a:t>
-            </a:r>
-          </a:p>
-        </p:txBody>
-      </p:sp>
-      <p:sp>
-        <p:nvSpPr>
-          <p:cNvPr id="51" name="TextBox 50"/>
-          <p:cNvSpPr txBox="1"/>
-          <p:nvPr/>
-        </p:nvSpPr>
-        <p:spPr>
-          <a:xfrm>
-            <a:off x="502920" y="3401568"/>
-            <a:ext cx="1828800" cy="164592"/>
-          </a:xfrm>
-          <a:prstGeom prst="rect">
-            <a:avLst/>
-          </a:prstGeom>
-          <a:noFill/>
-        </p:spPr>
-        <p:txBody>
-          <a:bodyPr wrap="square" lIns="0" rIns="0" tIns="0" bIns="0">
-            <a:spAutoFit/>
-          </a:bodyPr>
-          <a:lstStyle/>
-          <a:p>
-            <a:pPr algn="l"/>
-            <a:r>
-              <a:rPr sz="700" b="1" spc="50">
-                <a:solidFill>
-                  <a:srgbClr val="002FA7"/>
-                </a:solidFill>
-                <a:latin typeface="Arial"/>
-                <a:ea typeface="微软雅黑"/>
-              </a:rPr>
-              <a:t>净利</a:t>
-            </a:r>
-          </a:p>
-        </p:txBody>
-      </p:sp>
-      <p:sp>
-        <p:nvSpPr>
-          <p:cNvPr id="52" name="TextBox 51"/>
-          <p:cNvSpPr txBox="1"/>
-          <p:nvPr/>
-        </p:nvSpPr>
-        <p:spPr>
-          <a:xfrm>
-            <a:off x="2331720" y="3401568"/>
-            <a:ext cx="1554480" cy="164592"/>
-          </a:xfrm>
-          <a:prstGeom prst="rect">
-            <a:avLst/>
-          </a:prstGeom>
-          <a:noFill/>
-        </p:spPr>
-        <p:txBody>
-          <a:bodyPr wrap="square" lIns="0" rIns="0" tIns="0" bIns="0">
-            <a:spAutoFit/>
-          </a:bodyPr>
-          <a:lstStyle/>
-          <a:p>
-            <a:pPr algn="l"/>
-            <a:r>
-              <a:rPr sz="700" b="1" spc="50">
+              <a:rPr sz="1100" b="0" i="0" spc="100">
                 <a:solidFill>
                   <a:srgbClr val="0A0A0A"/>
                 </a:solidFill>
                 <a:latin typeface="Arial"/>
                 <a:ea typeface="微软雅黑"/>
               </a:rPr>
-              <a:t>−206.5</a:t>
-            </a:r>
-          </a:p>
-        </p:txBody>
-      </p:sp>
-      <p:sp>
-        <p:nvSpPr>
-          <p:cNvPr id="53" name="TextBox 52"/>
-          <p:cNvSpPr txBox="1"/>
-          <p:nvPr/>
-        </p:nvSpPr>
-        <p:spPr>
-          <a:xfrm>
-            <a:off x="3886200" y="3401568"/>
-            <a:ext cx="1554480" cy="164592"/>
-          </a:xfrm>
-          <a:prstGeom prst="rect">
-            <a:avLst/>
-          </a:prstGeom>
-          <a:noFill/>
-        </p:spPr>
-        <p:txBody>
-          <a:bodyPr wrap="square" lIns="0" rIns="0" tIns="0" bIns="0">
-            <a:spAutoFit/>
-          </a:bodyPr>
-          <a:lstStyle/>
-          <a:p>
-            <a:pPr algn="l"/>
-            <a:r>
-              <a:rPr sz="700" b="1" spc="50">
-                <a:solidFill>
-                  <a:srgbClr val="0A0A0A"/>
-                </a:solidFill>
-                <a:latin typeface="Arial"/>
-                <a:ea typeface="微软雅黑"/>
-              </a:rPr>
-              <a:t>−355.8</a:t>
-            </a:r>
-          </a:p>
-        </p:txBody>
-      </p:sp>
-      <p:sp>
-        <p:nvSpPr>
-          <p:cNvPr id="54" name="TextBox 53"/>
-          <p:cNvSpPr txBox="1"/>
-          <p:nvPr/>
-        </p:nvSpPr>
-        <p:spPr>
-          <a:xfrm>
-            <a:off x="5440680" y="3401568"/>
-            <a:ext cx="1554480" cy="164592"/>
-          </a:xfrm>
-          <a:prstGeom prst="rect">
-            <a:avLst/>
-          </a:prstGeom>
-          <a:noFill/>
-        </p:spPr>
-        <p:txBody>
-          <a:bodyPr wrap="square" lIns="0" rIns="0" tIns="0" bIns="0">
-            <a:spAutoFit/>
-          </a:bodyPr>
-          <a:lstStyle/>
-          <a:p>
-            <a:pPr algn="l"/>
-            <a:r>
-              <a:rPr sz="700" b="1" spc="50">
-                <a:solidFill>
-                  <a:srgbClr val="0A0A0A"/>
-                </a:solidFill>
-                <a:latin typeface="Arial"/>
-                <a:ea typeface="微软雅黑"/>
-              </a:rPr>
-              <a:t>−584.5</a:t>
-            </a:r>
-          </a:p>
-        </p:txBody>
-      </p:sp>
-      <p:sp>
-        <p:nvSpPr>
-          <p:cNvPr id="55" name="Rectangle 54"/>
-          <p:cNvSpPr/>
-          <p:nvPr/>
-        </p:nvSpPr>
-        <p:spPr>
-          <a:xfrm>
-            <a:off x="6858000" y="1143000"/>
-            <a:ext cx="4754880" cy="2240280"/>
-          </a:xfrm>
-          <a:prstGeom prst="rect">
-            <a:avLst/>
-          </a:prstGeom>
-          <a:solidFill>
-            <a:srgbClr val="F0F0EE"/>
-          </a:solidFill>
-          <a:ln>
-            <a:noFill/>
-          </a:ln>
-        </p:spPr>
-        <p:style>
-          <a:lnRef idx="1">
-            <a:schemeClr val="accent1"/>
-          </a:lnRef>
-          <a:fillRef idx="3">
-            <a:schemeClr val="accent1"/>
-          </a:fillRef>
-          <a:effectRef idx="2">
-            <a:schemeClr val="accent1"/>
-          </a:effectRef>
-          <a:fontRef idx="minor">
-            <a:schemeClr val="lt1"/>
-          </a:fontRef>
-        </p:style>
-        <p:txBody>
-          <a:bodyPr rtlCol="0" anchor="ctr"/>
-          <a:lstStyle/>
-          <a:p>
-            <a:pPr algn="ctr"/>
-          </a:p>
-        </p:txBody>
-      </p:sp>
-      <p:sp>
-        <p:nvSpPr>
-          <p:cNvPr id="56" name="TextBox 55"/>
-          <p:cNvSpPr txBox="1"/>
-          <p:nvPr/>
-        </p:nvSpPr>
-        <p:spPr>
-          <a:xfrm>
-            <a:off x="6995160" y="1234440"/>
-            <a:ext cx="4480560" cy="182880"/>
-          </a:xfrm>
-          <a:prstGeom prst="rect">
-            <a:avLst/>
-          </a:prstGeom>
-          <a:noFill/>
-        </p:spPr>
-        <p:txBody>
-          <a:bodyPr wrap="square" lIns="0" rIns="0" tIns="0" bIns="0">
-            <a:spAutoFit/>
-          </a:bodyPr>
-          <a:lstStyle/>
-          <a:p>
-            <a:pPr algn="l"/>
-            <a:r>
-              <a:rPr sz="900" b="1" spc="100">
-                <a:solidFill>
-                  <a:srgbClr val="002FA7"/>
-                </a:solidFill>
-                <a:latin typeface="Arial"/>
-                <a:ea typeface="微软雅黑"/>
-              </a:rPr>
-              <a:t>单位经济（单用户加权平均）</a:t>
-            </a:r>
-          </a:p>
-        </p:txBody>
-      </p:sp>
-      <p:sp>
-        <p:nvSpPr>
-          <p:cNvPr id="57" name="TextBox 56"/>
-          <p:cNvSpPr txBox="1"/>
-          <p:nvPr/>
-        </p:nvSpPr>
-        <p:spPr>
-          <a:xfrm>
-            <a:off x="6995160" y="1481328"/>
-            <a:ext cx="1463040" cy="164592"/>
-          </a:xfrm>
-          <a:prstGeom prst="rect">
-            <a:avLst/>
-          </a:prstGeom>
-          <a:noFill/>
-        </p:spPr>
-        <p:txBody>
-          <a:bodyPr wrap="square" lIns="0" rIns="0" tIns="0" bIns="0">
-            <a:spAutoFit/>
-          </a:bodyPr>
-          <a:lstStyle/>
-          <a:p>
-            <a:pPr algn="l"/>
-            <a:r>
-              <a:rPr sz="700" b="1" spc="50">
-                <a:solidFill>
-                  <a:srgbClr val="002FA7"/>
-                </a:solidFill>
-                <a:latin typeface="Arial"/>
-                <a:ea typeface="微软雅黑"/>
-              </a:rPr>
-              <a:t/>
-            </a:r>
-          </a:p>
-        </p:txBody>
-      </p:sp>
-      <p:sp>
-        <p:nvSpPr>
-          <p:cNvPr id="58" name="TextBox 57"/>
-          <p:cNvSpPr txBox="1"/>
-          <p:nvPr/>
-        </p:nvSpPr>
-        <p:spPr>
-          <a:xfrm>
-            <a:off x="8458200" y="1481328"/>
-            <a:ext cx="1645920" cy="164592"/>
-          </a:xfrm>
-          <a:prstGeom prst="rect">
-            <a:avLst/>
-          </a:prstGeom>
-          <a:noFill/>
-        </p:spPr>
-        <p:txBody>
-          <a:bodyPr wrap="square" lIns="0" rIns="0" tIns="0" bIns="0">
-            <a:spAutoFit/>
-          </a:bodyPr>
-          <a:lstStyle/>
-          <a:p>
-            <a:pPr algn="l"/>
-            <a:r>
-              <a:rPr sz="700" b="1" spc="50">
-                <a:solidFill>
-                  <a:srgbClr val="002FA7"/>
-                </a:solidFill>
-                <a:latin typeface="Arial"/>
-                <a:ea typeface="微软雅黑"/>
-              </a:rPr>
-              <a:t>早期 BOM 425</a:t>
-            </a:r>
-          </a:p>
-        </p:txBody>
-      </p:sp>
-      <p:sp>
-        <p:nvSpPr>
-          <p:cNvPr id="59" name="TextBox 58"/>
-          <p:cNvSpPr txBox="1"/>
-          <p:nvPr/>
-        </p:nvSpPr>
-        <p:spPr>
-          <a:xfrm>
-            <a:off x="10104120" y="1481328"/>
-            <a:ext cx="1645920" cy="164592"/>
-          </a:xfrm>
-          <a:prstGeom prst="rect">
-            <a:avLst/>
-          </a:prstGeom>
-          <a:noFill/>
-        </p:spPr>
-        <p:txBody>
-          <a:bodyPr wrap="square" lIns="0" rIns="0" tIns="0" bIns="0">
-            <a:spAutoFit/>
-          </a:bodyPr>
-          <a:lstStyle/>
-          <a:p>
-            <a:pPr algn="l"/>
-            <a:r>
-              <a:rPr sz="700" b="1" spc="50">
-                <a:solidFill>
-                  <a:srgbClr val="002FA7"/>
-                </a:solidFill>
-                <a:latin typeface="Arial"/>
-                <a:ea typeface="微软雅黑"/>
-              </a:rPr>
-              <a:t>降本后 BOM 110</a:t>
-            </a:r>
-          </a:p>
-        </p:txBody>
-      </p:sp>
-      <p:sp>
-        <p:nvSpPr>
-          <p:cNvPr id="60" name="TextBox 59"/>
-          <p:cNvSpPr txBox="1"/>
-          <p:nvPr/>
-        </p:nvSpPr>
-        <p:spPr>
-          <a:xfrm>
-            <a:off x="6995160" y="1664208"/>
-            <a:ext cx="1463040" cy="164592"/>
-          </a:xfrm>
-          <a:prstGeom prst="rect">
-            <a:avLst/>
-          </a:prstGeom>
-          <a:noFill/>
-        </p:spPr>
-        <p:txBody>
-          <a:bodyPr wrap="square" lIns="0" rIns="0" tIns="0" bIns="0">
-            <a:spAutoFit/>
-          </a:bodyPr>
-          <a:lstStyle/>
-          <a:p>
-            <a:pPr algn="l"/>
-            <a:r>
-              <a:rPr sz="700" b="1" spc="50">
-                <a:solidFill>
-                  <a:srgbClr val="333333"/>
-                </a:solidFill>
-                <a:latin typeface="Arial"/>
-                <a:ea typeface="微软雅黑"/>
-              </a:rPr>
-              <a:t>硬件 ASP</a:t>
-            </a:r>
-          </a:p>
-        </p:txBody>
-      </p:sp>
-      <p:sp>
-        <p:nvSpPr>
-          <p:cNvPr id="61" name="TextBox 60"/>
-          <p:cNvSpPr txBox="1"/>
-          <p:nvPr/>
-        </p:nvSpPr>
-        <p:spPr>
-          <a:xfrm>
-            <a:off x="8458200" y="1664208"/>
-            <a:ext cx="1645920" cy="164592"/>
-          </a:xfrm>
-          <a:prstGeom prst="rect">
-            <a:avLst/>
-          </a:prstGeom>
-          <a:noFill/>
-        </p:spPr>
-        <p:txBody>
-          <a:bodyPr wrap="square" lIns="0" rIns="0" tIns="0" bIns="0">
-            <a:spAutoFit/>
-          </a:bodyPr>
-          <a:lstStyle/>
-          <a:p>
-            <a:pPr algn="l"/>
-            <a:r>
-              <a:rPr sz="700" b="0" spc="50">
-                <a:solidFill>
-                  <a:srgbClr val="333333"/>
-                </a:solidFill>
-                <a:latin typeface="Arial"/>
-                <a:ea typeface="微软雅黑"/>
-              </a:rPr>
-              <a:t>599 元</a:t>
-            </a:r>
-          </a:p>
-        </p:txBody>
-      </p:sp>
-      <p:sp>
-        <p:nvSpPr>
-          <p:cNvPr id="62" name="TextBox 61"/>
-          <p:cNvSpPr txBox="1"/>
-          <p:nvPr/>
-        </p:nvSpPr>
-        <p:spPr>
-          <a:xfrm>
-            <a:off x="10104120" y="1664208"/>
-            <a:ext cx="1645920" cy="164592"/>
-          </a:xfrm>
-          <a:prstGeom prst="rect">
-            <a:avLst/>
-          </a:prstGeom>
-          <a:noFill/>
-        </p:spPr>
-        <p:txBody>
-          <a:bodyPr wrap="square" lIns="0" rIns="0" tIns="0" bIns="0">
-            <a:spAutoFit/>
-          </a:bodyPr>
-          <a:lstStyle/>
-          <a:p>
-            <a:pPr algn="l"/>
-            <a:r>
-              <a:rPr sz="700" b="0" spc="50">
-                <a:solidFill>
-                  <a:srgbClr val="333333"/>
-                </a:solidFill>
-                <a:latin typeface="Arial"/>
-                <a:ea typeface="微软雅黑"/>
-              </a:rPr>
-              <a:t>599 元</a:t>
-            </a:r>
-          </a:p>
-        </p:txBody>
-      </p:sp>
-      <p:sp>
-        <p:nvSpPr>
-          <p:cNvPr id="63" name="TextBox 62"/>
-          <p:cNvSpPr txBox="1"/>
-          <p:nvPr/>
-        </p:nvSpPr>
-        <p:spPr>
-          <a:xfrm>
-            <a:off x="6995160" y="1847088"/>
-            <a:ext cx="1463040" cy="164592"/>
-          </a:xfrm>
-          <a:prstGeom prst="rect">
-            <a:avLst/>
-          </a:prstGeom>
-          <a:noFill/>
-        </p:spPr>
-        <p:txBody>
-          <a:bodyPr wrap="square" lIns="0" rIns="0" tIns="0" bIns="0">
-            <a:spAutoFit/>
-          </a:bodyPr>
-          <a:lstStyle/>
-          <a:p>
-            <a:pPr algn="l"/>
-            <a:r>
-              <a:rPr sz="700" b="1" spc="50">
-                <a:solidFill>
-                  <a:srgbClr val="333333"/>
-                </a:solidFill>
-                <a:latin typeface="Arial"/>
-                <a:ea typeface="微软雅黑"/>
-              </a:rPr>
-              <a:t>硬件毛利</a:t>
-            </a:r>
-          </a:p>
-        </p:txBody>
-      </p:sp>
-      <p:sp>
-        <p:nvSpPr>
-          <p:cNvPr id="64" name="TextBox 63"/>
-          <p:cNvSpPr txBox="1"/>
-          <p:nvPr/>
-        </p:nvSpPr>
-        <p:spPr>
-          <a:xfrm>
-            <a:off x="8458200" y="1847088"/>
-            <a:ext cx="1645920" cy="164592"/>
-          </a:xfrm>
-          <a:prstGeom prst="rect">
-            <a:avLst/>
-          </a:prstGeom>
-          <a:noFill/>
-        </p:spPr>
-        <p:txBody>
-          <a:bodyPr wrap="square" lIns="0" rIns="0" tIns="0" bIns="0">
-            <a:spAutoFit/>
-          </a:bodyPr>
-          <a:lstStyle/>
-          <a:p>
-            <a:pPr algn="l"/>
-            <a:r>
-              <a:rPr sz="700" b="0" spc="50">
-                <a:solidFill>
-                  <a:srgbClr val="333333"/>
-                </a:solidFill>
-                <a:latin typeface="Arial"/>
-                <a:ea typeface="微软雅黑"/>
-              </a:rPr>
-              <a:t>174 元</a:t>
-            </a:r>
-          </a:p>
-        </p:txBody>
-      </p:sp>
-      <p:sp>
-        <p:nvSpPr>
-          <p:cNvPr id="65" name="TextBox 64"/>
-          <p:cNvSpPr txBox="1"/>
-          <p:nvPr/>
-        </p:nvSpPr>
-        <p:spPr>
-          <a:xfrm>
-            <a:off x="10104120" y="1847088"/>
-            <a:ext cx="1645920" cy="164592"/>
-          </a:xfrm>
-          <a:prstGeom prst="rect">
-            <a:avLst/>
-          </a:prstGeom>
-          <a:noFill/>
-        </p:spPr>
-        <p:txBody>
-          <a:bodyPr wrap="square" lIns="0" rIns="0" tIns="0" bIns="0">
-            <a:spAutoFit/>
-          </a:bodyPr>
-          <a:lstStyle/>
-          <a:p>
-            <a:pPr algn="l"/>
-            <a:r>
-              <a:rPr sz="700" b="0" spc="50">
-                <a:solidFill>
-                  <a:srgbClr val="333333"/>
-                </a:solidFill>
-                <a:latin typeface="Arial"/>
-                <a:ea typeface="微软雅黑"/>
-              </a:rPr>
-              <a:t>489 元</a:t>
-            </a:r>
-          </a:p>
-        </p:txBody>
-      </p:sp>
-      <p:sp>
-        <p:nvSpPr>
-          <p:cNvPr id="66" name="TextBox 65"/>
-          <p:cNvSpPr txBox="1"/>
-          <p:nvPr/>
-        </p:nvSpPr>
-        <p:spPr>
-          <a:xfrm>
-            <a:off x="6995160" y="2029968"/>
-            <a:ext cx="1463040" cy="164592"/>
-          </a:xfrm>
-          <a:prstGeom prst="rect">
-            <a:avLst/>
-          </a:prstGeom>
-          <a:noFill/>
-        </p:spPr>
-        <p:txBody>
-          <a:bodyPr wrap="square" lIns="0" rIns="0" tIns="0" bIns="0">
-            <a:spAutoFit/>
-          </a:bodyPr>
-          <a:lstStyle/>
-          <a:p>
-            <a:pPr algn="l"/>
-            <a:r>
-              <a:rPr sz="700" b="1" spc="50">
-                <a:solidFill>
-                  <a:srgbClr val="333333"/>
-                </a:solidFill>
-                <a:latin typeface="Arial"/>
-                <a:ea typeface="微软雅黑"/>
-              </a:rPr>
-              <a:t>订阅 ARPU（年）</a:t>
-            </a:r>
-          </a:p>
-        </p:txBody>
-      </p:sp>
-      <p:sp>
-        <p:nvSpPr>
-          <p:cNvPr id="67" name="TextBox 66"/>
-          <p:cNvSpPr txBox="1"/>
-          <p:nvPr/>
-        </p:nvSpPr>
-        <p:spPr>
-          <a:xfrm>
-            <a:off x="8458200" y="2029968"/>
-            <a:ext cx="1645920" cy="164592"/>
-          </a:xfrm>
-          <a:prstGeom prst="rect">
-            <a:avLst/>
-          </a:prstGeom>
-          <a:noFill/>
-        </p:spPr>
-        <p:txBody>
-          <a:bodyPr wrap="square" lIns="0" rIns="0" tIns="0" bIns="0">
-            <a:spAutoFit/>
-          </a:bodyPr>
-          <a:lstStyle/>
-          <a:p>
-            <a:pPr algn="l"/>
-            <a:r>
-              <a:rPr sz="700" b="0" spc="50">
-                <a:solidFill>
-                  <a:srgbClr val="333333"/>
-                </a:solidFill>
-                <a:latin typeface="Arial"/>
-                <a:ea typeface="微软雅黑"/>
-              </a:rPr>
-              <a:t>30 元</a:t>
-            </a:r>
-          </a:p>
-        </p:txBody>
-      </p:sp>
-      <p:sp>
-        <p:nvSpPr>
-          <p:cNvPr id="68" name="TextBox 67"/>
-          <p:cNvSpPr txBox="1"/>
-          <p:nvPr/>
-        </p:nvSpPr>
-        <p:spPr>
-          <a:xfrm>
-            <a:off x="10104120" y="2029968"/>
-            <a:ext cx="1645920" cy="164592"/>
-          </a:xfrm>
-          <a:prstGeom prst="rect">
-            <a:avLst/>
-          </a:prstGeom>
-          <a:noFill/>
-        </p:spPr>
-        <p:txBody>
-          <a:bodyPr wrap="square" lIns="0" rIns="0" tIns="0" bIns="0">
-            <a:spAutoFit/>
-          </a:bodyPr>
-          <a:lstStyle/>
-          <a:p>
-            <a:pPr algn="l"/>
-            <a:r>
-              <a:rPr sz="700" b="0" spc="50">
-                <a:solidFill>
-                  <a:srgbClr val="333333"/>
-                </a:solidFill>
-                <a:latin typeface="Arial"/>
-                <a:ea typeface="微软雅黑"/>
-              </a:rPr>
-              <a:t>30 元</a:t>
-            </a:r>
-          </a:p>
-        </p:txBody>
-      </p:sp>
-      <p:sp>
-        <p:nvSpPr>
-          <p:cNvPr id="69" name="TextBox 68"/>
-          <p:cNvSpPr txBox="1"/>
-          <p:nvPr/>
-        </p:nvSpPr>
-        <p:spPr>
-          <a:xfrm>
-            <a:off x="6995160" y="2212848"/>
-            <a:ext cx="1463040" cy="164592"/>
-          </a:xfrm>
-          <a:prstGeom prst="rect">
-            <a:avLst/>
-          </a:prstGeom>
-          <a:noFill/>
-        </p:spPr>
-        <p:txBody>
-          <a:bodyPr wrap="square" lIns="0" rIns="0" tIns="0" bIns="0">
-            <a:spAutoFit/>
-          </a:bodyPr>
-          <a:lstStyle/>
-          <a:p>
-            <a:pPr algn="l"/>
-            <a:r>
-              <a:rPr sz="700" b="1" spc="50">
-                <a:solidFill>
-                  <a:srgbClr val="333333"/>
-                </a:solidFill>
-                <a:latin typeface="Arial"/>
-                <a:ea typeface="微软雅黑"/>
-              </a:rPr>
-              <a:t>3年 LTV</a:t>
-            </a:r>
-          </a:p>
-        </p:txBody>
-      </p:sp>
-      <p:sp>
-        <p:nvSpPr>
-          <p:cNvPr id="70" name="TextBox 69"/>
-          <p:cNvSpPr txBox="1"/>
-          <p:nvPr/>
-        </p:nvSpPr>
-        <p:spPr>
-          <a:xfrm>
-            <a:off x="8458200" y="2212848"/>
-            <a:ext cx="1645920" cy="164592"/>
-          </a:xfrm>
-          <a:prstGeom prst="rect">
-            <a:avLst/>
-          </a:prstGeom>
-          <a:noFill/>
-        </p:spPr>
-        <p:txBody>
-          <a:bodyPr wrap="square" lIns="0" rIns="0" tIns="0" bIns="0">
-            <a:spAutoFit/>
-          </a:bodyPr>
-          <a:lstStyle/>
-          <a:p>
-            <a:pPr algn="l"/>
-            <a:r>
-              <a:rPr sz="700" b="0" spc="50">
-                <a:solidFill>
-                  <a:srgbClr val="333333"/>
-                </a:solidFill>
-                <a:latin typeface="Arial"/>
-                <a:ea typeface="微软雅黑"/>
-              </a:rPr>
-              <a:t>232 元</a:t>
-            </a:r>
-          </a:p>
-        </p:txBody>
-      </p:sp>
-      <p:sp>
-        <p:nvSpPr>
-          <p:cNvPr id="71" name="TextBox 70"/>
-          <p:cNvSpPr txBox="1"/>
-          <p:nvPr/>
-        </p:nvSpPr>
-        <p:spPr>
-          <a:xfrm>
-            <a:off x="10104120" y="2212848"/>
-            <a:ext cx="1645920" cy="164592"/>
-          </a:xfrm>
-          <a:prstGeom prst="rect">
-            <a:avLst/>
-          </a:prstGeom>
-          <a:noFill/>
-        </p:spPr>
-        <p:txBody>
-          <a:bodyPr wrap="square" lIns="0" rIns="0" tIns="0" bIns="0">
-            <a:spAutoFit/>
-          </a:bodyPr>
-          <a:lstStyle/>
-          <a:p>
-            <a:pPr algn="l"/>
-            <a:r>
-              <a:rPr sz="700" b="0" spc="50">
-                <a:solidFill>
-                  <a:srgbClr val="333333"/>
-                </a:solidFill>
-                <a:latin typeface="Arial"/>
-                <a:ea typeface="微软雅黑"/>
-              </a:rPr>
-              <a:t>547 元</a:t>
-            </a:r>
-          </a:p>
-        </p:txBody>
-      </p:sp>
-      <p:sp>
-        <p:nvSpPr>
-          <p:cNvPr id="72" name="TextBox 71"/>
-          <p:cNvSpPr txBox="1"/>
-          <p:nvPr/>
-        </p:nvSpPr>
-        <p:spPr>
-          <a:xfrm>
-            <a:off x="6995160" y="2395728"/>
-            <a:ext cx="1463040" cy="164592"/>
-          </a:xfrm>
-          <a:prstGeom prst="rect">
-            <a:avLst/>
-          </a:prstGeom>
-          <a:noFill/>
-        </p:spPr>
-        <p:txBody>
-          <a:bodyPr wrap="square" lIns="0" rIns="0" tIns="0" bIns="0">
-            <a:spAutoFit/>
-          </a:bodyPr>
-          <a:lstStyle/>
-          <a:p>
-            <a:pPr algn="l"/>
-            <a:r>
-              <a:rPr sz="700" b="1" spc="50">
-                <a:solidFill>
-                  <a:srgbClr val="333333"/>
-                </a:solidFill>
-                <a:latin typeface="Arial"/>
-                <a:ea typeface="微软雅黑"/>
-              </a:rPr>
-              <a:t>CAC</a:t>
-            </a:r>
-          </a:p>
-        </p:txBody>
-      </p:sp>
-      <p:sp>
-        <p:nvSpPr>
-          <p:cNvPr id="73" name="TextBox 72"/>
-          <p:cNvSpPr txBox="1"/>
-          <p:nvPr/>
-        </p:nvSpPr>
-        <p:spPr>
-          <a:xfrm>
-            <a:off x="8458200" y="2395728"/>
-            <a:ext cx="1645920" cy="164592"/>
-          </a:xfrm>
-          <a:prstGeom prst="rect">
-            <a:avLst/>
-          </a:prstGeom>
-          <a:noFill/>
-        </p:spPr>
-        <p:txBody>
-          <a:bodyPr wrap="square" lIns="0" rIns="0" tIns="0" bIns="0">
-            <a:spAutoFit/>
-          </a:bodyPr>
-          <a:lstStyle/>
-          <a:p>
-            <a:pPr algn="l"/>
-            <a:r>
-              <a:rPr sz="700" b="0" spc="50">
-                <a:solidFill>
-                  <a:srgbClr val="333333"/>
-                </a:solidFill>
-                <a:latin typeface="Arial"/>
-                <a:ea typeface="微软雅黑"/>
-              </a:rPr>
-              <a:t>300 元</a:t>
-            </a:r>
-          </a:p>
-        </p:txBody>
-      </p:sp>
-      <p:sp>
-        <p:nvSpPr>
-          <p:cNvPr id="74" name="TextBox 73"/>
-          <p:cNvSpPr txBox="1"/>
-          <p:nvPr/>
-        </p:nvSpPr>
-        <p:spPr>
-          <a:xfrm>
-            <a:off x="10104120" y="2395728"/>
-            <a:ext cx="1645920" cy="164592"/>
-          </a:xfrm>
-          <a:prstGeom prst="rect">
-            <a:avLst/>
-          </a:prstGeom>
-          <a:noFill/>
-        </p:spPr>
-        <p:txBody>
-          <a:bodyPr wrap="square" lIns="0" rIns="0" tIns="0" bIns="0">
-            <a:spAutoFit/>
-          </a:bodyPr>
-          <a:lstStyle/>
-          <a:p>
-            <a:pPr algn="l"/>
-            <a:r>
-              <a:rPr sz="700" b="0" spc="50">
-                <a:solidFill>
-                  <a:srgbClr val="333333"/>
-                </a:solidFill>
-                <a:latin typeface="Arial"/>
-                <a:ea typeface="微软雅黑"/>
-              </a:rPr>
-              <a:t>250 元</a:t>
-            </a:r>
-          </a:p>
-        </p:txBody>
-      </p:sp>
-      <p:sp>
-        <p:nvSpPr>
-          <p:cNvPr id="75" name="TextBox 74"/>
-          <p:cNvSpPr txBox="1"/>
-          <p:nvPr/>
-        </p:nvSpPr>
-        <p:spPr>
-          <a:xfrm>
-            <a:off x="6995160" y="2578608"/>
-            <a:ext cx="1463040" cy="164592"/>
-          </a:xfrm>
-          <a:prstGeom prst="rect">
-            <a:avLst/>
-          </a:prstGeom>
-          <a:noFill/>
-        </p:spPr>
-        <p:txBody>
-          <a:bodyPr wrap="square" lIns="0" rIns="0" tIns="0" bIns="0">
-            <a:spAutoFit/>
-          </a:bodyPr>
-          <a:lstStyle/>
-          <a:p>
-            <a:pPr algn="l"/>
-            <a:r>
-              <a:rPr sz="700" b="1" spc="50">
-                <a:solidFill>
-                  <a:srgbClr val="002FA7"/>
-                </a:solidFill>
-                <a:latin typeface="Arial"/>
-                <a:ea typeface="微软雅黑"/>
-              </a:rPr>
-              <a:t>LTV / CAC</a:t>
-            </a:r>
-          </a:p>
-        </p:txBody>
-      </p:sp>
-      <p:sp>
-        <p:nvSpPr>
-          <p:cNvPr id="76" name="TextBox 75"/>
-          <p:cNvSpPr txBox="1"/>
-          <p:nvPr/>
-        </p:nvSpPr>
-        <p:spPr>
-          <a:xfrm>
-            <a:off x="8458200" y="2578608"/>
-            <a:ext cx="1645920" cy="164592"/>
-          </a:xfrm>
-          <a:prstGeom prst="rect">
-            <a:avLst/>
-          </a:prstGeom>
-          <a:noFill/>
-        </p:spPr>
-        <p:txBody>
-          <a:bodyPr wrap="square" lIns="0" rIns="0" tIns="0" bIns="0">
-            <a:spAutoFit/>
-          </a:bodyPr>
-          <a:lstStyle/>
-          <a:p>
-            <a:pPr algn="l"/>
-            <a:r>
-              <a:rPr sz="700" b="1" spc="50">
-                <a:solidFill>
-                  <a:srgbClr val="0A0A0A"/>
-                </a:solidFill>
-                <a:latin typeface="Arial"/>
-                <a:ea typeface="微软雅黑"/>
-              </a:rPr>
-              <a:t>0.77</a:t>
-            </a:r>
-          </a:p>
-        </p:txBody>
-      </p:sp>
-      <p:sp>
-        <p:nvSpPr>
-          <p:cNvPr id="77" name="TextBox 76"/>
-          <p:cNvSpPr txBox="1"/>
-          <p:nvPr/>
-        </p:nvSpPr>
-        <p:spPr>
-          <a:xfrm>
-            <a:off x="10104120" y="2578608"/>
-            <a:ext cx="1645920" cy="164592"/>
-          </a:xfrm>
-          <a:prstGeom prst="rect">
-            <a:avLst/>
-          </a:prstGeom>
-          <a:noFill/>
-        </p:spPr>
-        <p:txBody>
-          <a:bodyPr wrap="square" lIns="0" rIns="0" tIns="0" bIns="0">
-            <a:spAutoFit/>
-          </a:bodyPr>
-          <a:lstStyle/>
-          <a:p>
-            <a:pPr algn="l"/>
-            <a:r>
-              <a:rPr sz="700" b="1" spc="50">
-                <a:solidFill>
-                  <a:srgbClr val="0A0A0A"/>
-                </a:solidFill>
-                <a:latin typeface="Arial"/>
-                <a:ea typeface="微软雅黑"/>
-              </a:rPr>
-              <a:t>2.19</a:t>
-            </a:r>
-          </a:p>
-        </p:txBody>
-      </p:sp>
-      <p:sp>
-        <p:nvSpPr>
-          <p:cNvPr id="78" name="TextBox 77"/>
-          <p:cNvSpPr txBox="1"/>
-          <p:nvPr/>
-        </p:nvSpPr>
-        <p:spPr>
-          <a:xfrm>
-            <a:off x="6995160" y="2807208"/>
-            <a:ext cx="4480560" cy="411480"/>
-          </a:xfrm>
-          <a:prstGeom prst="rect">
-            <a:avLst/>
-          </a:prstGeom>
-          <a:noFill/>
-        </p:spPr>
-        <p:txBody>
-          <a:bodyPr wrap="square" lIns="0" rIns="0" tIns="0" bIns="0">
-            <a:spAutoFit/>
-          </a:bodyPr>
-          <a:lstStyle/>
-          <a:p>
-            <a:pPr algn="l">
-              <a:lnSpc>
-                <a:spcPct val="115000"/>
-              </a:lnSpc>
-            </a:pPr>
-            <a:r>
-              <a:rPr sz="700" b="0">
-                <a:solidFill>
-                  <a:srgbClr val="737373"/>
-                </a:solidFill>
-                <a:latin typeface="Arial"/>
-                <a:ea typeface="微软雅黑"/>
-              </a:rPr>
-              <a:t>盈亏平衡约 Y4。敏感性：转化率 10%/15%/20% → 订阅 LTV 39/58/77 元，降本是转正主杠杆。</a:t>
+              <a:t>12 个月关键里程碑</a:t>
             </a:r>
           </a:p>
         </p:txBody>
       </p:sp>
       <p:cxnSp>
         <p:nvCxnSpPr>
-          <p:cNvPr id="79" name="Connector 78"/>
+          <p:cNvPr id="8" name="Connector 7"/>
           <p:cNvCxnSpPr/>
           <p:nvPr/>
         </p:nvCxnSpPr>
         <p:spPr>
           <a:xfrm>
-            <a:off x="502920" y="3611880"/>
+            <a:off x="502920" y="3063240"/>
             <a:ext cx="11183112" cy="0"/>
           </a:xfrm>
           <a:prstGeom prst="bentConnector3">
             <a:avLst/>
           </a:prstGeom>
-          <a:ln w="12700">
+          <a:ln w="19050">
             <a:solidFill>
               <a:srgbClr val="D4D4D2"/>
             </a:solidFill>
           </a:ln>
+          <a:effectLst/>
         </p:spPr>
         <p:style>
           <a:lnRef idx="2">
@@ -7586,14 +4990,58 @@
       </p:cxnSp>
       <p:sp>
         <p:nvSpPr>
-          <p:cNvPr id="80" name="TextBox 79"/>
+          <p:cNvPr id="9" name="Rectangle 8"/>
+          <p:cNvSpPr/>
+          <p:nvPr/>
+        </p:nvSpPr>
+        <p:spPr>
+          <a:xfrm>
+            <a:off x="1399032" y="2999232"/>
+            <a:ext cx="128016" cy="128016"/>
+          </a:xfrm>
+          <a:prstGeom prst="rect">
+            <a:avLst/>
+          </a:prstGeom>
+          <a:solidFill>
+            <a:srgbClr val="002FA7"/>
+          </a:solidFill>
+          <a:ln>
+            <a:noFill/>
+          </a:ln>
+          <a:effectLst/>
+        </p:spPr>
+        <p:style>
+          <a:lnRef idx="1">
+            <a:schemeClr val="accent1"/>
+          </a:lnRef>
+          <a:fillRef idx="3">
+            <a:schemeClr val="accent1"/>
+          </a:fillRef>
+          <a:effectRef idx="2">
+            <a:schemeClr val="accent1"/>
+          </a:effectRef>
+          <a:fontRef idx="minor">
+            <a:schemeClr val="lt1"/>
+          </a:fontRef>
+        </p:style>
+        <p:txBody>
+          <a:bodyPr rtlCol="0" anchor="ctr"/>
+          <a:lstStyle/>
+          <a:p>
+            <a:pPr algn="ctr"/>
+          </a:p>
+        </p:txBody>
+      </p:sp>
+      <p:sp>
+        <p:nvSpPr>
+          <p:cNvPr id="10" name="TextBox 9"/>
           <p:cNvSpPr txBox="1"/>
           <p:nvPr/>
         </p:nvSpPr>
         <p:spPr>
           <a:xfrm>
-            <a:off x="502920" y="3703320"/>
-            <a:ext cx="11183112" cy="182880"/>
+            <a:off x="182880" y="1554480"/>
+            <a:ext cx="2560320" cy="228600"/>
           </a:xfrm>
           <a:prstGeom prst="rect">
             <a:avLst/>
@@ -7601,35 +5049,35 @@
           <a:noFill/>
         </p:spPr>
         <p:txBody>
-          <a:bodyPr wrap="square" lIns="0" rIns="0" tIns="0" bIns="0">
+          <a:bodyPr wrap="square" anchor="t" lIns="0" rIns="0" tIns="0" bIns="0">
             <a:spAutoFit/>
           </a:bodyPr>
           <a:lstStyle/>
           <a:p>
-            <a:pPr algn="l"/>
-            <a:r>
-              <a:rPr sz="1000" b="1" spc="100">
+            <a:pPr algn="ctr"/>
+            <a:r>
+              <a:rPr sz="950" b="0" i="0" spc="60">
                 <a:solidFill>
                   <a:srgbClr val="002FA7"/>
                 </a:solidFill>
                 <a:latin typeface="Arial"/>
                 <a:ea typeface="微软雅黑"/>
               </a:rPr>
-              <a:t>12 个月里程碑</a:t>
-            </a:r>
-          </a:p>
-        </p:txBody>
-      </p:sp>
-      <p:sp>
-        <p:nvSpPr>
-          <p:cNvPr id="81" name="TextBox 80"/>
+              <a:t>M0–3</a:t>
+            </a:r>
+          </a:p>
+        </p:txBody>
+      </p:sp>
+      <p:sp>
+        <p:nvSpPr>
+          <p:cNvPr id="11" name="TextBox 10"/>
           <p:cNvSpPr txBox="1"/>
           <p:nvPr/>
         </p:nvSpPr>
         <p:spPr>
           <a:xfrm>
-            <a:off x="502920" y="3950208"/>
-            <a:ext cx="1371600" cy="201168"/>
+            <a:off x="182880" y="1828800"/>
+            <a:ext cx="2560320" cy="320040"/>
           </a:xfrm>
           <a:prstGeom prst="rect">
             <a:avLst/>
@@ -7637,35 +5085,35 @@
           <a:noFill/>
         </p:spPr>
         <p:txBody>
-          <a:bodyPr wrap="square" lIns="0" rIns="0" tIns="0" bIns="0">
+          <a:bodyPr wrap="square" anchor="t" lIns="0" rIns="0" tIns="0" bIns="0">
             <a:spAutoFit/>
           </a:bodyPr>
           <a:lstStyle/>
           <a:p>
-            <a:pPr algn="l"/>
-            <a:r>
-              <a:rPr sz="800" b="1" spc="50">
+            <a:pPr algn="ctr"/>
+            <a:r>
+              <a:rPr sz="1300" b="0" i="0">
                 <a:solidFill>
                   <a:srgbClr val="002FA7"/>
                 </a:solidFill>
                 <a:latin typeface="Arial"/>
                 <a:ea typeface="微软雅黑"/>
               </a:rPr>
-              <a:t>M0–M3</a:t>
-            </a:r>
-          </a:p>
-        </p:txBody>
-      </p:sp>
-      <p:sp>
-        <p:nvSpPr>
-          <p:cNvPr id="82" name="TextBox 81"/>
+              <a:t>AI 模型上线</a:t>
+            </a:r>
+          </a:p>
+        </p:txBody>
+      </p:sp>
+      <p:sp>
+        <p:nvSpPr>
+          <p:cNvPr id="12" name="TextBox 11"/>
           <p:cNvSpPr txBox="1"/>
           <p:nvPr/>
         </p:nvSpPr>
         <p:spPr>
           <a:xfrm>
-            <a:off x="1874519" y="3950208"/>
-            <a:ext cx="1371600" cy="201168"/>
+            <a:off x="137160" y="2221992"/>
+            <a:ext cx="2651760" cy="502920"/>
           </a:xfrm>
           <a:prstGeom prst="rect">
             <a:avLst/>
@@ -7673,35 +5121,84 @@
           <a:noFill/>
         </p:spPr>
         <p:txBody>
-          <a:bodyPr wrap="square" lIns="0" rIns="0" tIns="0" bIns="0">
+          <a:bodyPr wrap="square" anchor="t" lIns="0" rIns="0" tIns="0" bIns="0">
             <a:spAutoFit/>
           </a:bodyPr>
           <a:lstStyle/>
           <a:p>
-            <a:pPr algn="l"/>
-            <a:r>
-              <a:rPr sz="800" b="1" spc="50">
-                <a:solidFill>
-                  <a:srgbClr val="0A0A0A"/>
-                </a:solidFill>
-                <a:latin typeface="Arial"/>
-                <a:ea typeface="微软雅黑"/>
-              </a:rPr>
-              <a:t>原型产品</a:t>
-            </a:r>
-          </a:p>
-        </p:txBody>
-      </p:sp>
-      <p:sp>
-        <p:nvSpPr>
-          <p:cNvPr id="83" name="TextBox 82"/>
+            <a:pPr algn="ctr">
+              <a:lnSpc>
+                <a:spcPct val="125000"/>
+              </a:lnSpc>
+            </a:pPr>
+            <a:r>
+              <a:rPr sz="900" b="0" i="0">
+                <a:solidFill>
+                  <a:srgbClr val="737373"/>
+                </a:solidFill>
+                <a:latin typeface="Arial"/>
+                <a:ea typeface="微软雅黑"/>
+              </a:rPr>
+              <a:t>跌倒 + 生命体征
+内测 5–10 户</a:t>
+            </a:r>
+          </a:p>
+        </p:txBody>
+      </p:sp>
+      <p:sp>
+        <p:nvSpPr>
+          <p:cNvPr id="13" name="Rectangle 12"/>
+          <p:cNvSpPr/>
+          <p:nvPr/>
+        </p:nvSpPr>
+        <p:spPr>
+          <a:xfrm>
+            <a:off x="4447032" y="2999232"/>
+            <a:ext cx="128016" cy="128016"/>
+          </a:xfrm>
+          <a:prstGeom prst="rect">
+            <a:avLst/>
+          </a:prstGeom>
+          <a:solidFill>
+            <a:srgbClr val="0A0A0A"/>
+          </a:solidFill>
+          <a:ln>
+            <a:noFill/>
+          </a:ln>
+          <a:effectLst/>
+        </p:spPr>
+        <p:style>
+          <a:lnRef idx="1">
+            <a:schemeClr val="accent1"/>
+          </a:lnRef>
+          <a:fillRef idx="3">
+            <a:schemeClr val="accent1"/>
+          </a:fillRef>
+          <a:effectRef idx="2">
+            <a:schemeClr val="accent1"/>
+          </a:effectRef>
+          <a:fontRef idx="minor">
+            <a:schemeClr val="lt1"/>
+          </a:fontRef>
+        </p:style>
+        <p:txBody>
+          <a:bodyPr rtlCol="0" anchor="ctr"/>
+          <a:lstStyle/>
+          <a:p>
+            <a:pPr algn="ctr"/>
+          </a:p>
+        </p:txBody>
+      </p:sp>
+      <p:sp>
+        <p:nvSpPr>
+          <p:cNvPr id="14" name="TextBox 13"/>
           <p:cNvSpPr txBox="1"/>
           <p:nvPr/>
         </p:nvSpPr>
         <p:spPr>
           <a:xfrm>
-            <a:off x="3246120" y="3950208"/>
-            <a:ext cx="8686800" cy="201168"/>
+            <a:off x="3230880" y="3264408"/>
+            <a:ext cx="2560320" cy="228600"/>
           </a:xfrm>
           <a:prstGeom prst="rect">
             <a:avLst/>
@@ -7709,35 +5206,35 @@
           <a:noFill/>
         </p:spPr>
         <p:txBody>
-          <a:bodyPr wrap="square" lIns="0" rIns="0" tIns="0" bIns="0">
+          <a:bodyPr wrap="square" anchor="t" lIns="0" rIns="0" tIns="0" bIns="0">
             <a:spAutoFit/>
           </a:bodyPr>
           <a:lstStyle/>
           <a:p>
-            <a:pPr algn="l"/>
-            <a:r>
-              <a:rPr sz="800" b="0" spc="50">
-                <a:solidFill>
-                  <a:srgbClr val="333333"/>
-                </a:solidFill>
-                <a:latin typeface="Arial"/>
-                <a:ea typeface="微软雅黑"/>
-              </a:rPr>
-              <a:t>硬件上电出点云 → 采集 ≥100 文件 → 标注 ≥8,000 帧</a:t>
-            </a:r>
-          </a:p>
-        </p:txBody>
-      </p:sp>
-      <p:sp>
-        <p:nvSpPr>
-          <p:cNvPr id="84" name="TextBox 83"/>
+            <a:pPr algn="ctr"/>
+            <a:r>
+              <a:rPr sz="950" b="0" i="0" spc="60">
+                <a:solidFill>
+                  <a:srgbClr val="737373"/>
+                </a:solidFill>
+                <a:latin typeface="Arial"/>
+                <a:ea typeface="微软雅黑"/>
+              </a:rPr>
+              <a:t>M3–6</a:t>
+            </a:r>
+          </a:p>
+        </p:txBody>
+      </p:sp>
+      <p:sp>
+        <p:nvSpPr>
+          <p:cNvPr id="15" name="TextBox 14"/>
           <p:cNvSpPr txBox="1"/>
           <p:nvPr/>
         </p:nvSpPr>
         <p:spPr>
           <a:xfrm>
-            <a:off x="502920" y="4178808"/>
-            <a:ext cx="1371600" cy="201168"/>
+            <a:off x="3230880" y="3538728"/>
+            <a:ext cx="2560320" cy="320040"/>
           </a:xfrm>
           <a:prstGeom prst="rect">
             <a:avLst/>
@@ -7745,35 +5242,35 @@
           <a:noFill/>
         </p:spPr>
         <p:txBody>
-          <a:bodyPr wrap="square" lIns="0" rIns="0" tIns="0" bIns="0">
+          <a:bodyPr wrap="square" anchor="t" lIns="0" rIns="0" tIns="0" bIns="0">
             <a:spAutoFit/>
           </a:bodyPr>
           <a:lstStyle/>
           <a:p>
-            <a:pPr algn="l"/>
-            <a:r>
-              <a:rPr sz="800" b="1" spc="50">
-                <a:solidFill>
-                  <a:srgbClr val="002FA7"/>
-                </a:solidFill>
-                <a:latin typeface="Arial"/>
-                <a:ea typeface="微软雅黑"/>
-              </a:rPr>
-              <a:t>M3–M6</a:t>
-            </a:r>
-          </a:p>
-        </p:txBody>
-      </p:sp>
-      <p:sp>
-        <p:nvSpPr>
-          <p:cNvPr id="85" name="TextBox 84"/>
+            <a:pPr algn="ctr"/>
+            <a:r>
+              <a:rPr sz="1300" b="0" i="0">
+                <a:solidFill>
+                  <a:srgbClr val="0A0A0A"/>
+                </a:solidFill>
+                <a:latin typeface="Arial"/>
+                <a:ea typeface="微软雅黑"/>
+              </a:rPr>
+              <a:t>商用版上线</a:t>
+            </a:r>
+          </a:p>
+        </p:txBody>
+      </p:sp>
+      <p:sp>
+        <p:nvSpPr>
+          <p:cNvPr id="16" name="TextBox 15"/>
           <p:cNvSpPr txBox="1"/>
           <p:nvPr/>
         </p:nvSpPr>
         <p:spPr>
           <a:xfrm>
-            <a:off x="1874519" y="4178808"/>
-            <a:ext cx="1371600" cy="201168"/>
+            <a:off x="3185160" y="3931920"/>
+            <a:ext cx="2651760" cy="502920"/>
           </a:xfrm>
           <a:prstGeom prst="rect">
             <a:avLst/>
@@ -7781,35 +5278,84 @@
           <a:noFill/>
         </p:spPr>
         <p:txBody>
-          <a:bodyPr wrap="square" lIns="0" rIns="0" tIns="0" bIns="0">
+          <a:bodyPr wrap="square" anchor="t" lIns="0" rIns="0" tIns="0" bIns="0">
             <a:spAutoFit/>
           </a:bodyPr>
           <a:lstStyle/>
           <a:p>
-            <a:pPr algn="l"/>
-            <a:r>
-              <a:rPr sz="800" b="1" spc="50">
-                <a:solidFill>
-                  <a:srgbClr val="0A0A0A"/>
-                </a:solidFill>
-                <a:latin typeface="Arial"/>
-                <a:ea typeface="微软雅黑"/>
-              </a:rPr>
-              <a:t>软件产品</a:t>
-            </a:r>
-          </a:p>
-        </p:txBody>
-      </p:sp>
-      <p:sp>
-        <p:nvSpPr>
-          <p:cNvPr id="86" name="TextBox 85"/>
+            <a:pPr algn="ctr">
+              <a:lnSpc>
+                <a:spcPct val="125000"/>
+              </a:lnSpc>
+            </a:pPr>
+            <a:r>
+              <a:rPr sz="900" b="0" i="0">
+                <a:solidFill>
+                  <a:srgbClr val="737373"/>
+                </a:solidFill>
+                <a:latin typeface="Arial"/>
+                <a:ea typeface="微软雅黑"/>
+              </a:rPr>
+              <a:t>全屋套 S/L 发布
+开始公开售卖</a:t>
+            </a:r>
+          </a:p>
+        </p:txBody>
+      </p:sp>
+      <p:sp>
+        <p:nvSpPr>
+          <p:cNvPr id="17" name="Rectangle 16"/>
+          <p:cNvSpPr/>
+          <p:nvPr/>
+        </p:nvSpPr>
+        <p:spPr>
+          <a:xfrm>
+            <a:off x="7495032" y="2999232"/>
+            <a:ext cx="128016" cy="128016"/>
+          </a:xfrm>
+          <a:prstGeom prst="rect">
+            <a:avLst/>
+          </a:prstGeom>
+          <a:solidFill>
+            <a:srgbClr val="0A0A0A"/>
+          </a:solidFill>
+          <a:ln>
+            <a:noFill/>
+          </a:ln>
+          <a:effectLst/>
+        </p:spPr>
+        <p:style>
+          <a:lnRef idx="1">
+            <a:schemeClr val="accent1"/>
+          </a:lnRef>
+          <a:fillRef idx="3">
+            <a:schemeClr val="accent1"/>
+          </a:fillRef>
+          <a:effectRef idx="2">
+            <a:schemeClr val="accent1"/>
+          </a:effectRef>
+          <a:fontRef idx="minor">
+            <a:schemeClr val="lt1"/>
+          </a:fontRef>
+        </p:style>
+        <p:txBody>
+          <a:bodyPr rtlCol="0" anchor="ctr"/>
+          <a:lstStyle/>
+          <a:p>
+            <a:pPr algn="ctr"/>
+          </a:p>
+        </p:txBody>
+      </p:sp>
+      <p:sp>
+        <p:nvSpPr>
+          <p:cNvPr id="18" name="TextBox 17"/>
           <p:cNvSpPr txBox="1"/>
           <p:nvPr/>
         </p:nvSpPr>
         <p:spPr>
           <a:xfrm>
-            <a:off x="3246120" y="4178808"/>
-            <a:ext cx="8686800" cy="201168"/>
+            <a:off x="6278880" y="1554480"/>
+            <a:ext cx="2560320" cy="228600"/>
           </a:xfrm>
           <a:prstGeom prst="rect">
             <a:avLst/>
@@ -7817,35 +5363,35 @@
           <a:noFill/>
         </p:spPr>
         <p:txBody>
-          <a:bodyPr wrap="square" lIns="0" rIns="0" tIns="0" bIns="0">
+          <a:bodyPr wrap="square" anchor="t" lIns="0" rIns="0" tIns="0" bIns="0">
             <a:spAutoFit/>
           </a:bodyPr>
           <a:lstStyle/>
           <a:p>
-            <a:pPr algn="l"/>
-            <a:r>
-              <a:rPr sz="800" b="0" spc="50">
-                <a:solidFill>
-                  <a:srgbClr val="333333"/>
-                </a:solidFill>
-                <a:latin typeface="Arial"/>
-                <a:ea typeface="微软雅黑"/>
-              </a:rPr>
-              <a:t>ALG-0 训练（F1≥0.85）→ A/B 对比 → 推理管线 → Dashboard → 内测 5–8 户</a:t>
-            </a:r>
-          </a:p>
-        </p:txBody>
-      </p:sp>
-      <p:sp>
-        <p:nvSpPr>
-          <p:cNvPr id="87" name="TextBox 86"/>
+            <a:pPr algn="ctr"/>
+            <a:r>
+              <a:rPr sz="950" b="0" i="0" spc="60">
+                <a:solidFill>
+                  <a:srgbClr val="737373"/>
+                </a:solidFill>
+                <a:latin typeface="Arial"/>
+                <a:ea typeface="微软雅黑"/>
+              </a:rPr>
+              <a:t>M6–9</a:t>
+            </a:r>
+          </a:p>
+        </p:txBody>
+      </p:sp>
+      <p:sp>
+        <p:nvSpPr>
+          <p:cNvPr id="19" name="TextBox 18"/>
           <p:cNvSpPr txBox="1"/>
           <p:nvPr/>
         </p:nvSpPr>
         <p:spPr>
           <a:xfrm>
-            <a:off x="502920" y="4407408"/>
-            <a:ext cx="1371600" cy="201168"/>
+            <a:off x="6278880" y="1828800"/>
+            <a:ext cx="2560320" cy="320040"/>
           </a:xfrm>
           <a:prstGeom prst="rect">
             <a:avLst/>
@@ -7853,35 +5399,35 @@
           <a:noFill/>
         </p:spPr>
         <p:txBody>
-          <a:bodyPr wrap="square" lIns="0" rIns="0" tIns="0" bIns="0">
+          <a:bodyPr wrap="square" anchor="t" lIns="0" rIns="0" tIns="0" bIns="0">
             <a:spAutoFit/>
           </a:bodyPr>
           <a:lstStyle/>
           <a:p>
-            <a:pPr algn="l"/>
-            <a:r>
-              <a:rPr sz="800" b="1" spc="50">
-                <a:solidFill>
-                  <a:srgbClr val="002FA7"/>
-                </a:solidFill>
-                <a:latin typeface="Arial"/>
-                <a:ea typeface="微软雅黑"/>
-              </a:rPr>
-              <a:t>M6–M9</a:t>
-            </a:r>
-          </a:p>
-        </p:txBody>
-      </p:sp>
-      <p:sp>
-        <p:nvSpPr>
-          <p:cNvPr id="88" name="TextBox 87"/>
+            <a:pPr algn="ctr"/>
+            <a:r>
+              <a:rPr sz="1300" b="0" i="0">
+                <a:solidFill>
+                  <a:srgbClr val="0A0A0A"/>
+                </a:solidFill>
+                <a:latin typeface="Arial"/>
+                <a:ea typeface="微软雅黑"/>
+              </a:rPr>
+              <a:t>规模化验证</a:t>
+            </a:r>
+          </a:p>
+        </p:txBody>
+      </p:sp>
+      <p:sp>
+        <p:nvSpPr>
+          <p:cNvPr id="20" name="TextBox 19"/>
           <p:cNvSpPr txBox="1"/>
           <p:nvPr/>
         </p:nvSpPr>
         <p:spPr>
           <a:xfrm>
-            <a:off x="1874519" y="4407408"/>
-            <a:ext cx="1371600" cy="201168"/>
+            <a:off x="6233160" y="2221992"/>
+            <a:ext cx="2651760" cy="502920"/>
           </a:xfrm>
           <a:prstGeom prst="rect">
             <a:avLst/>
@@ -7889,35 +5435,84 @@
           <a:noFill/>
         </p:spPr>
         <p:txBody>
-          <a:bodyPr wrap="square" lIns="0" rIns="0" tIns="0" bIns="0">
+          <a:bodyPr wrap="square" anchor="t" lIns="0" rIns="0" tIns="0" bIns="0">
             <a:spAutoFit/>
           </a:bodyPr>
           <a:lstStyle/>
           <a:p>
-            <a:pPr algn="l"/>
-            <a:r>
-              <a:rPr sz="800" b="1" spc="50">
-                <a:solidFill>
-                  <a:srgbClr val="0A0A0A"/>
-                </a:solidFill>
-                <a:latin typeface="Arial"/>
-                <a:ea typeface="微软雅黑"/>
-              </a:rPr>
-              <a:t>算法迭代</a:t>
-            </a:r>
-          </a:p>
-        </p:txBody>
-      </p:sp>
-      <p:sp>
-        <p:nvSpPr>
-          <p:cNvPr id="89" name="TextBox 88"/>
+            <a:pPr algn="ctr">
+              <a:lnSpc>
+                <a:spcPct val="125000"/>
+              </a:lnSpc>
+            </a:pPr>
+            <a:r>
+              <a:rPr sz="900" b="0" i="0">
+                <a:solidFill>
+                  <a:srgbClr val="737373"/>
+                </a:solidFill>
+                <a:latin typeface="Arial"/>
+                <a:ea typeface="微软雅黑"/>
+              </a:rPr>
+              <a:t>500 户装机
+误报优化到位</a:t>
+            </a:r>
+          </a:p>
+        </p:txBody>
+      </p:sp>
+      <p:sp>
+        <p:nvSpPr>
+          <p:cNvPr id="21" name="Rectangle 20"/>
+          <p:cNvSpPr/>
+          <p:nvPr/>
+        </p:nvSpPr>
+        <p:spPr>
+          <a:xfrm>
+            <a:off x="10543032" y="2999232"/>
+            <a:ext cx="128016" cy="128016"/>
+          </a:xfrm>
+          <a:prstGeom prst="rect">
+            <a:avLst/>
+          </a:prstGeom>
+          <a:solidFill>
+            <a:srgbClr val="002FA7"/>
+          </a:solidFill>
+          <a:ln>
+            <a:noFill/>
+          </a:ln>
+          <a:effectLst/>
+        </p:spPr>
+        <p:style>
+          <a:lnRef idx="1">
+            <a:schemeClr val="accent1"/>
+          </a:lnRef>
+          <a:fillRef idx="3">
+            <a:schemeClr val="accent1"/>
+          </a:fillRef>
+          <a:effectRef idx="2">
+            <a:schemeClr val="accent1"/>
+          </a:effectRef>
+          <a:fontRef idx="minor">
+            <a:schemeClr val="lt1"/>
+          </a:fontRef>
+        </p:style>
+        <p:txBody>
+          <a:bodyPr rtlCol="0" anchor="ctr"/>
+          <a:lstStyle/>
+          <a:p>
+            <a:pPr algn="ctr"/>
+          </a:p>
+        </p:txBody>
+      </p:sp>
+      <p:sp>
+        <p:nvSpPr>
+          <p:cNvPr id="22" name="TextBox 21"/>
           <p:cNvSpPr txBox="1"/>
           <p:nvPr/>
         </p:nvSpPr>
         <p:spPr>
           <a:xfrm>
-            <a:off x="3246120" y="4407408"/>
-            <a:ext cx="8686800" cy="201168"/>
+            <a:off x="9326880" y="3264408"/>
+            <a:ext cx="2560320" cy="228600"/>
           </a:xfrm>
           <a:prstGeom prst="rect">
             <a:avLst/>
@@ -7925,35 +5520,35 @@
           <a:noFill/>
         </p:spPr>
         <p:txBody>
-          <a:bodyPr wrap="square" lIns="0" rIns="0" tIns="0" bIns="0">
+          <a:bodyPr wrap="square" anchor="t" lIns="0" rIns="0" tIns="0" bIns="0">
             <a:spAutoFit/>
           </a:bodyPr>
           <a:lstStyle/>
           <a:p>
-            <a:pPr algn="l"/>
-            <a:r>
-              <a:rPr sz="800" b="0" spc="50">
-                <a:solidFill>
-                  <a:srgbClr val="333333"/>
-                </a:solidFill>
-                <a:latin typeface="Arial"/>
-                <a:ea typeface="微软雅黑"/>
-              </a:rPr>
-              <a:t>降误报 → 长尾标注 → 自监督验证</a:t>
-            </a:r>
-          </a:p>
-        </p:txBody>
-      </p:sp>
-      <p:sp>
-        <p:nvSpPr>
-          <p:cNvPr id="90" name="TextBox 89"/>
+            <a:pPr algn="ctr"/>
+            <a:r>
+              <a:rPr sz="950" b="0" i="0" spc="60">
+                <a:solidFill>
+                  <a:srgbClr val="002FA7"/>
+                </a:solidFill>
+                <a:latin typeface="Arial"/>
+                <a:ea typeface="微软雅黑"/>
+              </a:rPr>
+              <a:t>M9–12</a:t>
+            </a:r>
+          </a:p>
+        </p:txBody>
+      </p:sp>
+      <p:sp>
+        <p:nvSpPr>
+          <p:cNvPr id="23" name="TextBox 22"/>
           <p:cNvSpPr txBox="1"/>
           <p:nvPr/>
         </p:nvSpPr>
         <p:spPr>
           <a:xfrm>
-            <a:off x="502920" y="4636008"/>
-            <a:ext cx="1371600" cy="201168"/>
+            <a:off x="9326880" y="3538728"/>
+            <a:ext cx="2560320" cy="320040"/>
           </a:xfrm>
           <a:prstGeom prst="rect">
             <a:avLst/>
@@ -7961,35 +5556,35 @@
           <a:noFill/>
         </p:spPr>
         <p:txBody>
-          <a:bodyPr wrap="square" lIns="0" rIns="0" tIns="0" bIns="0">
+          <a:bodyPr wrap="square" anchor="t" lIns="0" rIns="0" tIns="0" bIns="0">
             <a:spAutoFit/>
           </a:bodyPr>
           <a:lstStyle/>
           <a:p>
-            <a:pPr algn="l"/>
-            <a:r>
-              <a:rPr sz="800" b="1" spc="50">
+            <a:pPr algn="ctr"/>
+            <a:r>
+              <a:rPr sz="1300" b="0" i="0">
                 <a:solidFill>
                   <a:srgbClr val="002FA7"/>
                 </a:solidFill>
                 <a:latin typeface="Arial"/>
                 <a:ea typeface="微软雅黑"/>
               </a:rPr>
-              <a:t>M9–M12</a:t>
-            </a:r>
-          </a:p>
-        </p:txBody>
-      </p:sp>
-      <p:sp>
-        <p:nvSpPr>
-          <p:cNvPr id="91" name="TextBox 90"/>
+              <a:t>数据飞轮</a:t>
+            </a:r>
+          </a:p>
+        </p:txBody>
+      </p:sp>
+      <p:sp>
+        <p:nvSpPr>
+          <p:cNvPr id="24" name="TextBox 23"/>
           <p:cNvSpPr txBox="1"/>
           <p:nvPr/>
         </p:nvSpPr>
         <p:spPr>
           <a:xfrm>
-            <a:off x="1874519" y="4636008"/>
-            <a:ext cx="1371600" cy="201168"/>
+            <a:off x="9281160" y="3931920"/>
+            <a:ext cx="2651760" cy="502920"/>
           </a:xfrm>
           <a:prstGeom prst="rect">
             <a:avLst/>
@@ -7997,70 +5592,39 @@
           <a:noFill/>
         </p:spPr>
         <p:txBody>
-          <a:bodyPr wrap="square" lIns="0" rIns="0" tIns="0" bIns="0">
+          <a:bodyPr wrap="square" anchor="t" lIns="0" rIns="0" tIns="0" bIns="0">
             <a:spAutoFit/>
           </a:bodyPr>
           <a:lstStyle/>
           <a:p>
-            <a:pPr algn="l"/>
-            <a:r>
-              <a:rPr sz="800" b="1" spc="50">
-                <a:solidFill>
-                  <a:srgbClr val="0A0A0A"/>
-                </a:solidFill>
-                <a:latin typeface="Arial"/>
-                <a:ea typeface="微软雅黑"/>
-              </a:rPr>
-              <a:t>商用冷启动</a:t>
-            </a:r>
-          </a:p>
-        </p:txBody>
-      </p:sp>
-      <p:sp>
-        <p:nvSpPr>
-          <p:cNvPr id="92" name="TextBox 91"/>
-          <p:cNvSpPr txBox="1"/>
-          <p:nvPr/>
-        </p:nvSpPr>
-        <p:spPr>
-          <a:xfrm>
-            <a:off x="3246120" y="4636008"/>
-            <a:ext cx="8686800" cy="201168"/>
-          </a:xfrm>
-          <a:prstGeom prst="rect">
-            <a:avLst/>
-          </a:prstGeom>
-          <a:noFill/>
-        </p:spPr>
-        <p:txBody>
-          <a:bodyPr wrap="square" lIns="0" rIns="0" tIns="0" bIns="0">
-            <a:spAutoFit/>
-          </a:bodyPr>
-          <a:lstStyle/>
-          <a:p>
-            <a:pPr algn="l"/>
-            <a:r>
-              <a:rPr sz="800" b="0" spc="50">
-                <a:solidFill>
-                  <a:srgbClr val="333333"/>
-                </a:solidFill>
-                <a:latin typeface="Arial"/>
-                <a:ea typeface="微软雅黑"/>
-              </a:rPr>
-              <a:t>iOS 上线 → 高级订阅 → 首批 500–1,000 户 → 启动 A 轮</a:t>
+            <a:pPr algn="ctr">
+              <a:lnSpc>
+                <a:spcPct val="125000"/>
+              </a:lnSpc>
+            </a:pPr>
+            <a:r>
+              <a:rPr sz="900" b="0" i="0">
+                <a:solidFill>
+                  <a:srgbClr val="737373"/>
+                </a:solidFill>
+                <a:latin typeface="Arial"/>
+                <a:ea typeface="微软雅黑"/>
+              </a:rPr>
+              <a:t>1,000+ 户
+启动 A 轮</a:t>
             </a:r>
           </a:p>
         </p:txBody>
       </p:sp>
       <p:cxnSp>
         <p:nvCxnSpPr>
-          <p:cNvPr id="93" name="Connector 92"/>
+          <p:cNvPr id="25" name="Connector 24"/>
           <p:cNvCxnSpPr/>
           <p:nvPr/>
         </p:nvCxnSpPr>
         <p:spPr>
           <a:xfrm>
-            <a:off x="502920" y="4937760"/>
+            <a:off x="502920" y="4297680"/>
             <a:ext cx="11183112" cy="0"/>
           </a:xfrm>
           <a:prstGeom prst="bentConnector3">
@@ -8071,6 +5635,7 @@
               <a:srgbClr val="D4D4D2"/>
             </a:solidFill>
           </a:ln>
+          <a:effectLst/>
         </p:spPr>
         <p:style>
           <a:lnRef idx="2">
@@ -8089,14 +5654,14 @@
       </p:cxnSp>
       <p:sp>
         <p:nvSpPr>
-          <p:cNvPr id="94" name="TextBox 93"/>
+          <p:cNvPr id="26" name="TextBox 25"/>
           <p:cNvSpPr txBox="1"/>
           <p:nvPr/>
         </p:nvSpPr>
         <p:spPr>
           <a:xfrm>
-            <a:off x="502920" y="5029200"/>
-            <a:ext cx="11183112" cy="164592"/>
+            <a:off x="502920" y="4434840"/>
+            <a:ext cx="5486400" cy="274320"/>
           </a:xfrm>
           <a:prstGeom prst="rect">
             <a:avLst/>
@@ -8104,35 +5669,79 @@
           <a:noFill/>
         </p:spPr>
         <p:txBody>
-          <a:bodyPr wrap="square" lIns="0" rIns="0" tIns="0" bIns="0">
+          <a:bodyPr wrap="square" anchor="t" lIns="0" rIns="0" tIns="0" bIns="0">
             <a:spAutoFit/>
           </a:bodyPr>
           <a:lstStyle/>
           <a:p>
             <a:pPr algn="l"/>
             <a:r>
-              <a:rPr sz="1000" b="1" spc="100">
-                <a:solidFill>
-                  <a:srgbClr val="002FA7"/>
-                </a:solidFill>
-                <a:latin typeface="Arial"/>
-                <a:ea typeface="微软雅黑"/>
-              </a:rPr>
-              <a:t>盈亏平衡路径（约 Y4）</a:t>
-            </a:r>
-          </a:p>
-        </p:txBody>
-      </p:sp>
-      <p:sp>
-        <p:nvSpPr>
-          <p:cNvPr id="95" name="TextBox 94"/>
+              <a:rPr sz="1100" b="0" i="0" spc="100">
+                <a:solidFill>
+                  <a:srgbClr val="0A0A0A"/>
+                </a:solidFill>
+                <a:latin typeface="Arial"/>
+                <a:ea typeface="微软雅黑"/>
+              </a:rPr>
+              <a:t>当前已完成工作</a:t>
+            </a:r>
+          </a:p>
+        </p:txBody>
+      </p:sp>
+      <p:sp>
+        <p:nvSpPr>
+          <p:cNvPr id="27" name="Rectangle 26"/>
+          <p:cNvSpPr/>
+          <p:nvPr/>
+        </p:nvSpPr>
+        <p:spPr>
+          <a:xfrm>
+            <a:off x="502920" y="4800600"/>
+            <a:ext cx="3602736" cy="384048"/>
+          </a:xfrm>
+          <a:prstGeom prst="rect">
+            <a:avLst/>
+          </a:prstGeom>
+          <a:solidFill>
+            <a:srgbClr val="F5F5F4"/>
+          </a:solidFill>
+          <a:ln>
+            <a:noFill/>
+          </a:ln>
+          <a:effectLst/>
+        </p:spPr>
+        <p:style>
+          <a:lnRef idx="1">
+            <a:schemeClr val="accent1"/>
+          </a:lnRef>
+          <a:fillRef idx="3">
+            <a:schemeClr val="accent1"/>
+          </a:fillRef>
+          <a:effectRef idx="2">
+            <a:schemeClr val="accent1"/>
+          </a:effectRef>
+          <a:fontRef idx="minor">
+            <a:schemeClr val="lt1"/>
+          </a:fontRef>
+        </p:style>
+        <p:txBody>
+          <a:bodyPr rtlCol="0" anchor="ctr"/>
+          <a:lstStyle/>
+          <a:p>
+            <a:pPr algn="ctr"/>
+          </a:p>
+        </p:txBody>
+      </p:sp>
+      <p:sp>
+        <p:nvSpPr>
+          <p:cNvPr id="28" name="TextBox 27"/>
           <p:cNvSpPr txBox="1"/>
           <p:nvPr/>
         </p:nvSpPr>
         <p:spPr>
           <a:xfrm>
-            <a:off x="502920" y="5230368"/>
-            <a:ext cx="11183112" cy="320040"/>
+            <a:off x="667512" y="4855464"/>
+            <a:ext cx="3273552" cy="274320"/>
           </a:xfrm>
           <a:prstGeom prst="rect">
             <a:avLst/>
@@ -8140,39 +5749,35 @@
           <a:noFill/>
         </p:spPr>
         <p:txBody>
-          <a:bodyPr wrap="square" lIns="0" rIns="0" tIns="0" bIns="0">
+          <a:bodyPr wrap="square" anchor="t" lIns="0" rIns="0" tIns="0" bIns="0">
             <a:spAutoFit/>
           </a:bodyPr>
           <a:lstStyle/>
           <a:p>
-            <a:pPr algn="l">
-              <a:lnSpc>
-                <a:spcPct val="120000"/>
-              </a:lnSpc>
-            </a:pPr>
-            <a:r>
-              <a:rPr sz="800" b="0">
-                <a:solidFill>
-                  <a:srgbClr val="333333"/>
-                </a:solidFill>
-                <a:latin typeface="Arial"/>
-                <a:ea typeface="微软雅黑"/>
-              </a:rPr>
-              <a:t>① 国产 SoC 降本 BOM 425→110 → 硬件毛利 174→489 元 | ② 装机到 3–5 万户 → 固定费用摊薄 | ③ 订阅续费累积 → 存量收入占比上升 | ④ Y4 单月打平，Y5 全年盈利</a:t>
-            </a:r>
-          </a:p>
-        </p:txBody>
-      </p:sp>
-      <p:sp>
-        <p:nvSpPr>
-          <p:cNvPr id="96" name="TextBox 95"/>
+            <a:pPr algn="l"/>
+            <a:r>
+              <a:rPr sz="1100" b="0" i="0">
+                <a:solidFill>
+                  <a:srgbClr val="0A0A0A"/>
+                </a:solidFill>
+                <a:latin typeface="Arial"/>
+                <a:ea typeface="微软雅黑"/>
+              </a:rPr>
+              <a:t>⚙️ 地基系统</a:t>
+            </a:r>
+          </a:p>
+        </p:txBody>
+      </p:sp>
+      <p:sp>
+        <p:nvSpPr>
+          <p:cNvPr id="29" name="TextBox 28"/>
           <p:cNvSpPr txBox="1"/>
           <p:nvPr/>
         </p:nvSpPr>
         <p:spPr>
           <a:xfrm>
-            <a:off x="502920" y="5623560"/>
-            <a:ext cx="11183112" cy="274320"/>
+            <a:off x="667512" y="5257800"/>
+            <a:ext cx="3273552" cy="210312"/>
           </a:xfrm>
           <a:prstGeom prst="rect">
             <a:avLst/>
@@ -8180,7 +5785,7 @@
           <a:noFill/>
         </p:spPr>
         <p:txBody>
-          <a:bodyPr wrap="square" lIns="0" rIns="0" tIns="0" bIns="0">
+          <a:bodyPr wrap="square" anchor="t" lIns="0" rIns="0" tIns="0" bIns="0">
             <a:spAutoFit/>
           </a:bodyPr>
           <a:lstStyle/>
@@ -8191,28 +5796,28 @@
               </a:lnSpc>
             </a:pPr>
             <a:r>
-              <a:rPr sz="800" b="0">
+              <a:rPr sz="900" b="0" i="0">
                 <a:solidFill>
                   <a:srgbClr val="737373"/>
                 </a:solidFill>
                 <a:latin typeface="Arial"/>
                 <a:ea typeface="微软雅黑"/>
               </a:rPr>
-              <a:t>退出路径：Y6–Y7 目标 20–50 万户，年收入 6,000万–1.9亿。对标 Vayyar（$1B），P/S 4–6× → 退出估值 2.4–11.4 亿。</a:t>
-            </a:r>
-          </a:p>
-        </p:txBody>
-      </p:sp>
-      <p:sp>
-        <p:nvSpPr>
-          <p:cNvPr id="97" name="TextBox 96"/>
+              <a:t>✓  Django + DRF 后端</a:t>
+            </a:r>
+          </a:p>
+        </p:txBody>
+      </p:sp>
+      <p:sp>
+        <p:nvSpPr>
+          <p:cNvPr id="30" name="TextBox 29"/>
           <p:cNvSpPr txBox="1"/>
           <p:nvPr/>
         </p:nvSpPr>
         <p:spPr>
           <a:xfrm>
-            <a:off x="502920" y="6263640"/>
-            <a:ext cx="11183112" cy="182880"/>
+            <a:off x="667512" y="5486400"/>
+            <a:ext cx="3273552" cy="210312"/>
           </a:xfrm>
           <a:prstGeom prst="rect">
             <a:avLst/>
@@ -8220,21 +5825,861 @@
           <a:noFill/>
         </p:spPr>
         <p:txBody>
-          <a:bodyPr wrap="square" lIns="0" rIns="0" tIns="0" bIns="0">
+          <a:bodyPr wrap="square" anchor="t" lIns="0" rIns="0" tIns="0" bIns="0">
             <a:spAutoFit/>
           </a:bodyPr>
           <a:lstStyle/>
           <a:p>
-            <a:pPr algn="r"/>
-            <a:r>
-              <a:rPr sz="800" b="0" spc="100">
+            <a:pPr algn="l">
+              <a:lnSpc>
+                <a:spcPct val="115000"/>
+              </a:lnSpc>
+            </a:pPr>
+            <a:r>
+              <a:rPr sz="900" b="0" i="0">
                 <a:solidFill>
                   <a:srgbClr val="737373"/>
                 </a:solidFill>
                 <a:latin typeface="Arial"/>
                 <a:ea typeface="微软雅黑"/>
               </a:rPr>
-              <a:t>家安 housafe · 天使轮 300 万</a:t>
+              <a:t>✓  JWT 鉴权（注册/登录/刷新）</a:t>
+            </a:r>
+          </a:p>
+        </p:txBody>
+      </p:sp>
+      <p:sp>
+        <p:nvSpPr>
+          <p:cNvPr id="31" name="TextBox 30"/>
+          <p:cNvSpPr txBox="1"/>
+          <p:nvPr/>
+        </p:nvSpPr>
+        <p:spPr>
+          <a:xfrm>
+            <a:off x="667512" y="5715000"/>
+            <a:ext cx="3273552" cy="210312"/>
+          </a:xfrm>
+          <a:prstGeom prst="rect">
+            <a:avLst/>
+          </a:prstGeom>
+          <a:noFill/>
+        </p:spPr>
+        <p:txBody>
+          <a:bodyPr wrap="square" anchor="t" lIns="0" rIns="0" tIns="0" bIns="0">
+            <a:spAutoFit/>
+          </a:bodyPr>
+          <a:lstStyle/>
+          <a:p>
+            <a:pPr algn="l">
+              <a:lnSpc>
+                <a:spcPct val="115000"/>
+              </a:lnSpc>
+            </a:pPr>
+            <a:r>
+              <a:rPr sz="900" b="0" i="0">
+                <a:solidFill>
+                  <a:srgbClr val="737373"/>
+                </a:solidFill>
+                <a:latin typeface="Arial"/>
+                <a:ea typeface="微软雅黑"/>
+              </a:rPr>
+              <a:t>✓  事件契约包（Tier-1 感知事件）</a:t>
+            </a:r>
+          </a:p>
+        </p:txBody>
+      </p:sp>
+      <p:sp>
+        <p:nvSpPr>
+          <p:cNvPr id="32" name="TextBox 31"/>
+          <p:cNvSpPr txBox="1"/>
+          <p:nvPr/>
+        </p:nvSpPr>
+        <p:spPr>
+          <a:xfrm>
+            <a:off x="667512" y="5943600"/>
+            <a:ext cx="3273552" cy="210312"/>
+          </a:xfrm>
+          <a:prstGeom prst="rect">
+            <a:avLst/>
+          </a:prstGeom>
+          <a:noFill/>
+        </p:spPr>
+        <p:txBody>
+          <a:bodyPr wrap="square" anchor="t" lIns="0" rIns="0" tIns="0" bIns="0">
+            <a:spAutoFit/>
+          </a:bodyPr>
+          <a:lstStyle/>
+          <a:p>
+            <a:pPr algn="l">
+              <a:lnSpc>
+                <a:spcPct val="115000"/>
+              </a:lnSpc>
+            </a:pPr>
+            <a:r>
+              <a:rPr sz="900" b="0" i="0">
+                <a:solidFill>
+                  <a:srgbClr val="737373"/>
+                </a:solidFill>
+                <a:latin typeface="Arial"/>
+                <a:ea typeface="微软雅黑"/>
+              </a:rPr>
+              <a:t>✓  TimescaleDB 时序存储 + 查询</a:t>
+            </a:r>
+          </a:p>
+        </p:txBody>
+      </p:sp>
+      <p:sp>
+        <p:nvSpPr>
+          <p:cNvPr id="33" name="TextBox 32"/>
+          <p:cNvSpPr txBox="1"/>
+          <p:nvPr/>
+        </p:nvSpPr>
+        <p:spPr>
+          <a:xfrm>
+            <a:off x="667512" y="6172200"/>
+            <a:ext cx="3273552" cy="210312"/>
+          </a:xfrm>
+          <a:prstGeom prst="rect">
+            <a:avLst/>
+          </a:prstGeom>
+          <a:noFill/>
+        </p:spPr>
+        <p:txBody>
+          <a:bodyPr wrap="square" anchor="t" lIns="0" rIns="0" tIns="0" bIns="0">
+            <a:spAutoFit/>
+          </a:bodyPr>
+          <a:lstStyle/>
+          <a:p>
+            <a:pPr algn="l">
+              <a:lnSpc>
+                <a:spcPct val="115000"/>
+              </a:lnSpc>
+            </a:pPr>
+            <a:r>
+              <a:rPr sz="900" b="0" i="0">
+                <a:solidFill>
+                  <a:srgbClr val="737373"/>
+                </a:solidFill>
+                <a:latin typeface="Arial"/>
+                <a:ea typeface="微软雅黑"/>
+              </a:rPr>
+              <a:t>✓  WebSocket 实时通道（JWT+家庭隔离）</a:t>
+            </a:r>
+          </a:p>
+        </p:txBody>
+      </p:sp>
+      <p:sp>
+        <p:nvSpPr>
+          <p:cNvPr id="34" name="TextBox 33"/>
+          <p:cNvSpPr txBox="1"/>
+          <p:nvPr/>
+        </p:nvSpPr>
+        <p:spPr>
+          <a:xfrm>
+            <a:off x="667512" y="6400800"/>
+            <a:ext cx="3273552" cy="210312"/>
+          </a:xfrm>
+          <a:prstGeom prst="rect">
+            <a:avLst/>
+          </a:prstGeom>
+          <a:noFill/>
+        </p:spPr>
+        <p:txBody>
+          <a:bodyPr wrap="square" anchor="t" lIns="0" rIns="0" tIns="0" bIns="0">
+            <a:spAutoFit/>
+          </a:bodyPr>
+          <a:lstStyle/>
+          <a:p>
+            <a:pPr algn="l">
+              <a:lnSpc>
+                <a:spcPct val="115000"/>
+              </a:lnSpc>
+            </a:pPr>
+            <a:r>
+              <a:rPr sz="900" b="0" i="0">
+                <a:solidFill>
+                  <a:srgbClr val="737373"/>
+                </a:solidFill>
+                <a:latin typeface="Arial"/>
+                <a:ea typeface="微软雅黑"/>
+              </a:rPr>
+              <a:t>✓  设备绑定/列表/重命名</a:t>
+            </a:r>
+          </a:p>
+        </p:txBody>
+      </p:sp>
+      <p:sp>
+        <p:nvSpPr>
+          <p:cNvPr id="35" name="TextBox 34"/>
+          <p:cNvSpPr txBox="1"/>
+          <p:nvPr/>
+        </p:nvSpPr>
+        <p:spPr>
+          <a:xfrm>
+            <a:off x="667512" y="6629400"/>
+            <a:ext cx="3273552" cy="210312"/>
+          </a:xfrm>
+          <a:prstGeom prst="rect">
+            <a:avLst/>
+          </a:prstGeom>
+          <a:noFill/>
+        </p:spPr>
+        <p:txBody>
+          <a:bodyPr wrap="square" anchor="t" lIns="0" rIns="0" tIns="0" bIns="0">
+            <a:spAutoFit/>
+          </a:bodyPr>
+          <a:lstStyle/>
+          <a:p>
+            <a:pPr algn="l">
+              <a:lnSpc>
+                <a:spcPct val="115000"/>
+              </a:lnSpc>
+            </a:pPr>
+            <a:r>
+              <a:rPr sz="900" b="0" i="0">
+                <a:solidFill>
+                  <a:srgbClr val="737373"/>
+                </a:solidFill>
+                <a:latin typeface="Arial"/>
+                <a:ea typeface="微软雅黑"/>
+              </a:rPr>
+              <a:t>✓  仿真器 + 端到端冒烟测试</a:t>
+            </a:r>
+          </a:p>
+        </p:txBody>
+      </p:sp>
+      <p:sp>
+        <p:nvSpPr>
+          <p:cNvPr id="36" name="Rectangle 35"/>
+          <p:cNvSpPr/>
+          <p:nvPr/>
+        </p:nvSpPr>
+        <p:spPr>
+          <a:xfrm>
+            <a:off x="4325112" y="4800600"/>
+            <a:ext cx="3602736" cy="384048"/>
+          </a:xfrm>
+          <a:prstGeom prst="rect">
+            <a:avLst/>
+          </a:prstGeom>
+          <a:solidFill>
+            <a:srgbClr val="F5F5F4"/>
+          </a:solidFill>
+          <a:ln>
+            <a:noFill/>
+          </a:ln>
+          <a:effectLst/>
+        </p:spPr>
+        <p:style>
+          <a:lnRef idx="1">
+            <a:schemeClr val="accent1"/>
+          </a:lnRef>
+          <a:fillRef idx="3">
+            <a:schemeClr val="accent1"/>
+          </a:fillRef>
+          <a:effectRef idx="2">
+            <a:schemeClr val="accent1"/>
+          </a:effectRef>
+          <a:fontRef idx="minor">
+            <a:schemeClr val="lt1"/>
+          </a:fontRef>
+        </p:style>
+        <p:txBody>
+          <a:bodyPr rtlCol="0" anchor="ctr"/>
+          <a:lstStyle/>
+          <a:p>
+            <a:pPr algn="ctr"/>
+          </a:p>
+        </p:txBody>
+      </p:sp>
+      <p:sp>
+        <p:nvSpPr>
+          <p:cNvPr id="37" name="TextBox 36"/>
+          <p:cNvSpPr txBox="1"/>
+          <p:nvPr/>
+        </p:nvSpPr>
+        <p:spPr>
+          <a:xfrm>
+            <a:off x="4489703" y="4855464"/>
+            <a:ext cx="3273552" cy="274320"/>
+          </a:xfrm>
+          <a:prstGeom prst="rect">
+            <a:avLst/>
+          </a:prstGeom>
+          <a:noFill/>
+        </p:spPr>
+        <p:txBody>
+          <a:bodyPr wrap="square" anchor="t" lIns="0" rIns="0" tIns="0" bIns="0">
+            <a:spAutoFit/>
+          </a:bodyPr>
+          <a:lstStyle/>
+          <a:p>
+            <a:pPr algn="l"/>
+            <a:r>
+              <a:rPr sz="1100" b="0" i="0">
+                <a:solidFill>
+                  <a:srgbClr val="0A0A0A"/>
+                </a:solidFill>
+                <a:latin typeface="Arial"/>
+                <a:ea typeface="微软雅黑"/>
+              </a:rPr>
+              <a:t>🧠 AI 引擎</a:t>
+            </a:r>
+          </a:p>
+        </p:txBody>
+      </p:sp>
+      <p:sp>
+        <p:nvSpPr>
+          <p:cNvPr id="38" name="TextBox 37"/>
+          <p:cNvSpPr txBox="1"/>
+          <p:nvPr/>
+        </p:nvSpPr>
+        <p:spPr>
+          <a:xfrm>
+            <a:off x="4489703" y="5257800"/>
+            <a:ext cx="3273552" cy="210312"/>
+          </a:xfrm>
+          <a:prstGeom prst="rect">
+            <a:avLst/>
+          </a:prstGeom>
+          <a:noFill/>
+        </p:spPr>
+        <p:txBody>
+          <a:bodyPr wrap="square" anchor="t" lIns="0" rIns="0" tIns="0" bIns="0">
+            <a:spAutoFit/>
+          </a:bodyPr>
+          <a:lstStyle/>
+          <a:p>
+            <a:pPr algn="l">
+              <a:lnSpc>
+                <a:spcPct val="115000"/>
+              </a:lnSpc>
+            </a:pPr>
+            <a:r>
+              <a:rPr sz="900" b="0" i="0">
+                <a:solidFill>
+                  <a:srgbClr val="737373"/>
+                </a:solidFill>
+                <a:latin typeface="Arial"/>
+                <a:ea typeface="微软雅黑"/>
+              </a:rPr>
+              <a:t>✓  世界模型共享类型定义</a:t>
+            </a:r>
+          </a:p>
+        </p:txBody>
+      </p:sp>
+      <p:sp>
+        <p:nvSpPr>
+          <p:cNvPr id="39" name="TextBox 38"/>
+          <p:cNvSpPr txBox="1"/>
+          <p:nvPr/>
+        </p:nvSpPr>
+        <p:spPr>
+          <a:xfrm>
+            <a:off x="4489703" y="5486400"/>
+            <a:ext cx="3273552" cy="210312"/>
+          </a:xfrm>
+          <a:prstGeom prst="rect">
+            <a:avLst/>
+          </a:prstGeom>
+          <a:noFill/>
+        </p:spPr>
+        <p:txBody>
+          <a:bodyPr wrap="square" anchor="t" lIns="0" rIns="0" tIns="0" bIns="0">
+            <a:spAutoFit/>
+          </a:bodyPr>
+          <a:lstStyle/>
+          <a:p>
+            <a:pPr algn="l">
+              <a:lnSpc>
+                <a:spcPct val="115000"/>
+              </a:lnSpc>
+            </a:pPr>
+            <a:r>
+              <a:rPr sz="900" b="0" i="0">
+                <a:solidFill>
+                  <a:srgbClr val="737373"/>
+                </a:solidFill>
+                <a:latin typeface="Arial"/>
+                <a:ea typeface="微软雅黑"/>
+              </a:rPr>
+              <a:t>✓  Redis Stream 消费端</a:t>
+            </a:r>
+          </a:p>
+        </p:txBody>
+      </p:sp>
+      <p:sp>
+        <p:nvSpPr>
+          <p:cNvPr id="40" name="TextBox 39"/>
+          <p:cNvSpPr txBox="1"/>
+          <p:nvPr/>
+        </p:nvSpPr>
+        <p:spPr>
+          <a:xfrm>
+            <a:off x="4489703" y="5715000"/>
+            <a:ext cx="3273552" cy="210312"/>
+          </a:xfrm>
+          <a:prstGeom prst="rect">
+            <a:avLst/>
+          </a:prstGeom>
+          <a:noFill/>
+        </p:spPr>
+        <p:txBody>
+          <a:bodyPr wrap="square" anchor="t" lIns="0" rIns="0" tIns="0" bIns="0">
+            <a:spAutoFit/>
+          </a:bodyPr>
+          <a:lstStyle/>
+          <a:p>
+            <a:pPr algn="l">
+              <a:lnSpc>
+                <a:spcPct val="115000"/>
+              </a:lnSpc>
+            </a:pPr>
+            <a:r>
+              <a:rPr sz="900" b="0" i="0">
+                <a:solidFill>
+                  <a:srgbClr val="737373"/>
+                </a:solidFill>
+                <a:latin typeface="Arial"/>
+                <a:ea typeface="微软雅黑"/>
+              </a:rPr>
+              <a:t>✓  Typed Frame 解析</a:t>
+            </a:r>
+          </a:p>
+        </p:txBody>
+      </p:sp>
+      <p:sp>
+        <p:nvSpPr>
+          <p:cNvPr id="41" name="TextBox 40"/>
+          <p:cNvSpPr txBox="1"/>
+          <p:nvPr/>
+        </p:nvSpPr>
+        <p:spPr>
+          <a:xfrm>
+            <a:off x="4489703" y="5943600"/>
+            <a:ext cx="3273552" cy="210312"/>
+          </a:xfrm>
+          <a:prstGeom prst="rect">
+            <a:avLst/>
+          </a:prstGeom>
+          <a:noFill/>
+        </p:spPr>
+        <p:txBody>
+          <a:bodyPr wrap="square" anchor="t" lIns="0" rIns="0" tIns="0" bIns="0">
+            <a:spAutoFit/>
+          </a:bodyPr>
+          <a:lstStyle/>
+          <a:p>
+            <a:pPr algn="l">
+              <a:lnSpc>
+                <a:spcPct val="115000"/>
+              </a:lnSpc>
+            </a:pPr>
+            <a:r>
+              <a:rPr sz="900" b="0" i="0">
+                <a:solidFill>
+                  <a:srgbClr val="737373"/>
+                </a:solidFill>
+                <a:latin typeface="Arial"/>
+                <a:ea typeface="微软雅黑"/>
+              </a:rPr>
+              <a:t>✓  FallbackEngine（3 条确定性规则）</a:t>
+            </a:r>
+          </a:p>
+        </p:txBody>
+      </p:sp>
+      <p:sp>
+        <p:nvSpPr>
+          <p:cNvPr id="42" name="TextBox 41"/>
+          <p:cNvSpPr txBox="1"/>
+          <p:nvPr/>
+        </p:nvSpPr>
+        <p:spPr>
+          <a:xfrm>
+            <a:off x="4489703" y="6172200"/>
+            <a:ext cx="3273552" cy="210312"/>
+          </a:xfrm>
+          <a:prstGeom prst="rect">
+            <a:avLst/>
+          </a:prstGeom>
+          <a:noFill/>
+        </p:spPr>
+        <p:txBody>
+          <a:bodyPr wrap="square" anchor="t" lIns="0" rIns="0" tIns="0" bIns="0">
+            <a:spAutoFit/>
+          </a:bodyPr>
+          <a:lstStyle/>
+          <a:p>
+            <a:pPr algn="l">
+              <a:lnSpc>
+                <a:spcPct val="115000"/>
+              </a:lnSpc>
+            </a:pPr>
+            <a:r>
+              <a:rPr sz="900" b="0" i="0">
+                <a:solidFill>
+                  <a:srgbClr val="737373"/>
+                </a:solidFill>
+                <a:latin typeface="Arial"/>
+                <a:ea typeface="微软雅黑"/>
+              </a:rPr>
+              <a:t>✓  ELPD Encoder/Decoder 架构就绪</a:t>
+            </a:r>
+          </a:p>
+        </p:txBody>
+      </p:sp>
+      <p:sp>
+        <p:nvSpPr>
+          <p:cNvPr id="43" name="Rectangle 42"/>
+          <p:cNvSpPr/>
+          <p:nvPr/>
+        </p:nvSpPr>
+        <p:spPr>
+          <a:xfrm>
+            <a:off x="8147304" y="4800600"/>
+            <a:ext cx="3602736" cy="384048"/>
+          </a:xfrm>
+          <a:prstGeom prst="rect">
+            <a:avLst/>
+          </a:prstGeom>
+          <a:solidFill>
+            <a:srgbClr val="F5F5F4"/>
+          </a:solidFill>
+          <a:ln>
+            <a:noFill/>
+          </a:ln>
+          <a:effectLst/>
+        </p:spPr>
+        <p:style>
+          <a:lnRef idx="1">
+            <a:schemeClr val="accent1"/>
+          </a:lnRef>
+          <a:fillRef idx="3">
+            <a:schemeClr val="accent1"/>
+          </a:fillRef>
+          <a:effectRef idx="2">
+            <a:schemeClr val="accent1"/>
+          </a:effectRef>
+          <a:fontRef idx="minor">
+            <a:schemeClr val="lt1"/>
+          </a:fontRef>
+        </p:style>
+        <p:txBody>
+          <a:bodyPr rtlCol="0" anchor="ctr"/>
+          <a:lstStyle/>
+          <a:p>
+            <a:pPr algn="ctr"/>
+          </a:p>
+        </p:txBody>
+      </p:sp>
+      <p:sp>
+        <p:nvSpPr>
+          <p:cNvPr id="44" name="TextBox 43"/>
+          <p:cNvSpPr txBox="1"/>
+          <p:nvPr/>
+        </p:nvSpPr>
+        <p:spPr>
+          <a:xfrm>
+            <a:off x="8311896" y="4855464"/>
+            <a:ext cx="3273552" cy="274320"/>
+          </a:xfrm>
+          <a:prstGeom prst="rect">
+            <a:avLst/>
+          </a:prstGeom>
+          <a:noFill/>
+        </p:spPr>
+        <p:txBody>
+          <a:bodyPr wrap="square" anchor="t" lIns="0" rIns="0" tIns="0" bIns="0">
+            <a:spAutoFit/>
+          </a:bodyPr>
+          <a:lstStyle/>
+          <a:p>
+            <a:pPr algn="l"/>
+            <a:r>
+              <a:rPr sz="1100" b="0" i="0">
+                <a:solidFill>
+                  <a:srgbClr val="0A0A0A"/>
+                </a:solidFill>
+                <a:latin typeface="Arial"/>
+                <a:ea typeface="微软雅黑"/>
+              </a:rPr>
+              <a:t>📱 前端 App</a:t>
+            </a:r>
+          </a:p>
+        </p:txBody>
+      </p:sp>
+      <p:sp>
+        <p:nvSpPr>
+          <p:cNvPr id="45" name="TextBox 44"/>
+          <p:cNvSpPr txBox="1"/>
+          <p:nvPr/>
+        </p:nvSpPr>
+        <p:spPr>
+          <a:xfrm>
+            <a:off x="8311896" y="5257800"/>
+            <a:ext cx="3273552" cy="210312"/>
+          </a:xfrm>
+          <a:prstGeom prst="rect">
+            <a:avLst/>
+          </a:prstGeom>
+          <a:noFill/>
+        </p:spPr>
+        <p:txBody>
+          <a:bodyPr wrap="square" anchor="t" lIns="0" rIns="0" tIns="0" bIns="0">
+            <a:spAutoFit/>
+          </a:bodyPr>
+          <a:lstStyle/>
+          <a:p>
+            <a:pPr algn="l">
+              <a:lnSpc>
+                <a:spcPct val="115000"/>
+              </a:lnSpc>
+            </a:pPr>
+            <a:r>
+              <a:rPr sz="900" b="0" i="0">
+                <a:solidFill>
+                  <a:srgbClr val="737373"/>
+                </a:solidFill>
+                <a:latin typeface="Arial"/>
+                <a:ea typeface="微软雅黑"/>
+              </a:rPr>
+              <a:t>✓  Expo 项目框架</a:t>
+            </a:r>
+          </a:p>
+        </p:txBody>
+      </p:sp>
+      <p:sp>
+        <p:nvSpPr>
+          <p:cNvPr id="46" name="TextBox 45"/>
+          <p:cNvSpPr txBox="1"/>
+          <p:nvPr/>
+        </p:nvSpPr>
+        <p:spPr>
+          <a:xfrm>
+            <a:off x="8311896" y="5486400"/>
+            <a:ext cx="3273552" cy="210312"/>
+          </a:xfrm>
+          <a:prstGeom prst="rect">
+            <a:avLst/>
+          </a:prstGeom>
+          <a:noFill/>
+        </p:spPr>
+        <p:txBody>
+          <a:bodyPr wrap="square" anchor="t" lIns="0" rIns="0" tIns="0" bIns="0">
+            <a:spAutoFit/>
+          </a:bodyPr>
+          <a:lstStyle/>
+          <a:p>
+            <a:pPr algn="l">
+              <a:lnSpc>
+                <a:spcPct val="115000"/>
+              </a:lnSpc>
+            </a:pPr>
+            <a:r>
+              <a:rPr sz="900" b="0" i="0">
+                <a:solidFill>
+                  <a:srgbClr val="737373"/>
+                </a:solidFill>
+                <a:latin typeface="Arial"/>
+                <a:ea typeface="微软雅黑"/>
+              </a:rPr>
+              <a:t>✓  主题系统（暖白+青绿养老基调）</a:t>
+            </a:r>
+          </a:p>
+        </p:txBody>
+      </p:sp>
+      <p:sp>
+        <p:nvSpPr>
+          <p:cNvPr id="47" name="TextBox 46"/>
+          <p:cNvSpPr txBox="1"/>
+          <p:nvPr/>
+        </p:nvSpPr>
+        <p:spPr>
+          <a:xfrm>
+            <a:off x="8311896" y="5715000"/>
+            <a:ext cx="3273552" cy="210312"/>
+          </a:xfrm>
+          <a:prstGeom prst="rect">
+            <a:avLst/>
+          </a:prstGeom>
+          <a:noFill/>
+        </p:spPr>
+        <p:txBody>
+          <a:bodyPr wrap="square" anchor="t" lIns="0" rIns="0" tIns="0" bIns="0">
+            <a:spAutoFit/>
+          </a:bodyPr>
+          <a:lstStyle/>
+          <a:p>
+            <a:pPr algn="l">
+              <a:lnSpc>
+                <a:spcPct val="115000"/>
+              </a:lnSpc>
+            </a:pPr>
+            <a:r>
+              <a:rPr sz="900" b="0" i="0">
+                <a:solidFill>
+                  <a:srgbClr val="737373"/>
+                </a:solidFill>
+                <a:latin typeface="Arial"/>
+                <a:ea typeface="微软雅黑"/>
+              </a:rPr>
+              <a:t>✓  登录/注册流程</a:t>
+            </a:r>
+          </a:p>
+        </p:txBody>
+      </p:sp>
+      <p:sp>
+        <p:nvSpPr>
+          <p:cNvPr id="48" name="TextBox 47"/>
+          <p:cNvSpPr txBox="1"/>
+          <p:nvPr/>
+        </p:nvSpPr>
+        <p:spPr>
+          <a:xfrm>
+            <a:off x="8311896" y="5943600"/>
+            <a:ext cx="3273552" cy="210312"/>
+          </a:xfrm>
+          <a:prstGeom prst="rect">
+            <a:avLst/>
+          </a:prstGeom>
+          <a:noFill/>
+        </p:spPr>
+        <p:txBody>
+          <a:bodyPr wrap="square" anchor="t" lIns="0" rIns="0" tIns="0" bIns="0">
+            <a:spAutoFit/>
+          </a:bodyPr>
+          <a:lstStyle/>
+          <a:p>
+            <a:pPr algn="l">
+              <a:lnSpc>
+                <a:spcPct val="115000"/>
+              </a:lnSpc>
+            </a:pPr>
+            <a:r>
+              <a:rPr sz="900" b="0" i="0">
+                <a:solidFill>
+                  <a:srgbClr val="737373"/>
+                </a:solidFill>
+                <a:latin typeface="Arial"/>
+                <a:ea typeface="微软雅黑"/>
+              </a:rPr>
+              <a:t>✓  实时 Today 首页</a:t>
+            </a:r>
+          </a:p>
+        </p:txBody>
+      </p:sp>
+      <p:sp>
+        <p:nvSpPr>
+          <p:cNvPr id="49" name="TextBox 48"/>
+          <p:cNvSpPr txBox="1"/>
+          <p:nvPr/>
+        </p:nvSpPr>
+        <p:spPr>
+          <a:xfrm>
+            <a:off x="8311896" y="6172200"/>
+            <a:ext cx="3273552" cy="210312"/>
+          </a:xfrm>
+          <a:prstGeom prst="rect">
+            <a:avLst/>
+          </a:prstGeom>
+          <a:noFill/>
+        </p:spPr>
+        <p:txBody>
+          <a:bodyPr wrap="square" anchor="t" lIns="0" rIns="0" tIns="0" bIns="0">
+            <a:spAutoFit/>
+          </a:bodyPr>
+          <a:lstStyle/>
+          <a:p>
+            <a:pPr algn="l">
+              <a:lnSpc>
+                <a:spcPct val="115000"/>
+              </a:lnSpc>
+            </a:pPr>
+            <a:r>
+              <a:rPr sz="900" b="0" i="0">
+                <a:solidFill>
+                  <a:srgbClr val="737373"/>
+                </a:solidFill>
+                <a:latin typeface="Arial"/>
+                <a:ea typeface="微软雅黑"/>
+              </a:rPr>
+              <a:t>✓  家庭/老人管理界面</a:t>
+            </a:r>
+          </a:p>
+        </p:txBody>
+      </p:sp>
+      <p:cxnSp>
+        <p:nvCxnSpPr>
+          <p:cNvPr id="50" name="Connector 49"/>
+          <p:cNvCxnSpPr/>
+          <p:nvPr/>
+        </p:nvCxnSpPr>
+        <p:spPr>
+          <a:xfrm>
+            <a:off x="502920" y="6263640"/>
+            <a:ext cx="11183112" cy="0"/>
+          </a:xfrm>
+          <a:prstGeom prst="bentConnector3">
+            <a:avLst/>
+          </a:prstGeom>
+          <a:ln w="10160">
+            <a:solidFill>
+              <a:srgbClr val="D4D4D2"/>
+            </a:solidFill>
+          </a:ln>
+          <a:effectLst/>
+        </p:spPr>
+        <p:style>
+          <a:lnRef idx="2">
+            <a:schemeClr val="accent1"/>
+          </a:lnRef>
+          <a:fillRef idx="0">
+            <a:schemeClr val="accent1"/>
+          </a:fillRef>
+          <a:effectRef idx="1">
+            <a:schemeClr val="accent1"/>
+          </a:effectRef>
+          <a:fontRef idx="minor">
+            <a:schemeClr val="tx1"/>
+          </a:fontRef>
+        </p:style>
+      </p:cxnSp>
+      <p:sp>
+        <p:nvSpPr>
+          <p:cNvPr id="51" name="TextBox 50"/>
+          <p:cNvSpPr txBox="1"/>
+          <p:nvPr/>
+        </p:nvSpPr>
+        <p:spPr>
+          <a:xfrm>
+            <a:off x="502920" y="6355080"/>
+            <a:ext cx="11183112" cy="365760"/>
+          </a:xfrm>
+          <a:prstGeom prst="rect">
+            <a:avLst/>
+          </a:prstGeom>
+          <a:noFill/>
+        </p:spPr>
+        <p:txBody>
+          <a:bodyPr wrap="square" anchor="t" lIns="0" rIns="0" tIns="0" bIns="0">
+            <a:spAutoFit/>
+          </a:bodyPr>
+          <a:lstStyle/>
+          <a:p>
+            <a:pPr algn="l">
+              <a:lnSpc>
+                <a:spcPct val="130000"/>
+              </a:lnSpc>
+            </a:pPr>
+            <a:r>
+              <a:rPr sz="950" b="0" i="0">
+                <a:solidFill>
+                  <a:srgbClr val="404040"/>
+                </a:solidFill>
+                <a:latin typeface="Arial"/>
+                <a:ea typeface="微软雅黑"/>
+              </a:rPr>
+              <a:t>软件骨架已跑通。本轮 500 万天使轮资金主要投向 AI 模型训练与调优、雷达硬件采购与试产、种子用户获取——从"能跑"到"能卖"。</a:t>
             </a:r>
           </a:p>
         </p:txBody>
